--- a/agent-observability-course/10-graphics/slides/section-13.pptx
+++ b/agent-observability-course/10-graphics/slides/section-13.pptx
@@ -34,6 +34,13 @@
     <p:sldId id="282" r:id="rId34"/>
     <p:sldId id="283" r:id="rId35"/>
     <p:sldId id="284" r:id="rId36"/>
+    <p:sldId id="285" r:id="rId37"/>
+    <p:sldId id="286" r:id="rId38"/>
+    <p:sldId id="287" r:id="rId39"/>
+    <p:sldId id="288" r:id="rId40"/>
+    <p:sldId id="289" r:id="rId41"/>
+    <p:sldId id="290" r:id="rId42"/>
+    <p:sldId id="291" r:id="rId43"/>
   </p:sldIdLst>
   <p:sldSz cx="12191695" cy="6858000" type="screen4x3"/>
   <p:notesSz cx="6858000" cy="9144000"/>
@@ -670,7 +677,7 @@
           <a:lstStyle/>
           <a:p>
             <a:r>
-              <a:t>First group: volume. One, a written sampling policy. What head rate the SDK applies, what the Collector keeps regardless. If it's not written, it's whatever someone last typed. Two, volume estimated. Spans per day times bytes per span, projected ninety days. Atlas at fourteen hundred sessions a day, four steps each, ten kilobytes a step is about fifty-six megabytes a day. Small. Your company's agent at fifty thousand sessions is two gigabytes a day, and that's a budget line. Three, retention set per environment, with an alarm on ClickHouse disk.</a:t>
+              <a:t>First group: volume. One, a written sampling policy. What head rate the SDK applies, what the Collector keeps regardless. If it's not written, it's whatever someone last typed. Two, volume estimated. Spans per day times bytes per span, projected ninety days. Atlas's replayed day is four thousand sessions and seventy thousand five hundred and sixty spans, about forty megabytes of attributes in the local store. Small. Multiply by your own traffic, and by however much prompt text you capture, and it becomes a budget line. Three, retention set per environment, with an alarm on ClickHouse disk.</a:t>
             </a:r>
           </a:p>
         </p:txBody>
@@ -810,7 +817,19 @@
           <a:lstStyle/>
           <a:p>
             <a:r>
-              <a:t>Third group: secrets. Seven, no backend credentials in Atlas; the Collector holds them, from Lecture 13.2. Eight, a project per environment, with keys scoped to each, so a dev key can never write to prod. Nine, masking *tested*. Not configured, tested. A unit test sends a fake email and employee ID through `pii.mask`, and an integration test asserts the span that leaves the Collector has a hash where the ID was. Masking that isn't tested drifts the first time someone adds a field.</a:t>
+              <a:t>Third group: secrets. Seven, no backend credentials in Atlas; the Collector holds them, from Lecture 13.2. Eight, a project per environment, with keys scoped to each, so a dev key can never write to prod. Nine, masking *tested*. Not configured, tested.</a:t>
+            </a:r>
+          </a:p>
+          <a:p/>
+          <a:p>
+            <a:r>
+              <a:t>[SCREEN: Terminal: `pytest -q tests/unit/test_pii.py` → `15 passed`; `pytest -q tests/integration/test_spans.py -k pii` → `1 passed`.]</a:t>
+            </a:r>
+          </a:p>
+          <a:p/>
+          <a:p>
+            <a:r>
+              <a:t>Fifteen unit tests on the masking functions, and one integration test, `test_no_raw_pii_reaches_any_span`, that runs requests with a fake email, card and employee ID through Atlas and asserts none of them reaches any span. The Collector's redact rules are the second layer, and you check those from the data in Lab 7. Masking that isn't tested drifts the first time someone adds a field.</a:t>
             </a:r>
           </a:p>
         </p:txBody>
@@ -1108,7 +1127,19 @@
           <a:p/>
           <a:p>
             <a:r>
-              <a:t>[DEMO: Restart Atlas with `configure_tracing(batch=False)` forced (env `ATLAS_TRACING_BATCH=0` in the demo branch), backends still down....]</a:t>
+              <a:t>[SCREEN: Terminal: `pytest -q tests/integration/test_exporter_failure.py` → `3 passed`. Then a ten-line script that configures tracing wi...]</a:t>
+            </a:r>
+          </a:p>
+          <a:p/>
+          <a:p>
+            <a:r>
+              <a:t>The repo turns this demo into tests. Three of them: requests survive an exporter that raises, a slow exporter doesn't block the request path, and the server starts with its OTLP endpoint pointing nowhere. All green.</a:t>
+            </a:r>
+          </a:p>
+          <a:p/>
+          <a:p>
+            <a:r>
+              <a:t>Now let me show you how to break it, because you'll inherit code that does. A fake exporter that takes two hundred milliseconds per export, like a struggling backend. Twenty spans with the batch processor: no measurable time. The same twenty spans with the simple processor, `batch=False`: four seconds. Every span now waits for the export.</a:t>
             </a:r>
           </a:p>
         </p:txBody>
@@ -1178,7 +1209,7 @@
           <a:lstStyle/>
           <a:p>
             <a:r>
-              <a:t>Force the simple processor, which `configure_tracing` supports for tests because it's easy to reason about, and restart with the backends down. p95 goes from three seconds to eight and a half within thirty seconds. Every request now waits for the export to fail. That's how a monitoring outage becomes a product outage, and it's one flag.</a:t>
+              <a:t>`configure_tracing` supports the simple processor because tests are easier to reason about with it. In production it's how a monitoring outage becomes a product outage: two hundred milliseconds per span, a dozen spans per request, and your p95 just grew by seconds. One flag.</a:t>
             </a:r>
           </a:p>
           <a:p/>
@@ -1190,19 +1221,19 @@
           <a:p/>
           <a:p>
             <a:r>
-              <a:t>[DEMO: Revert to batch mode. Start Langfuse and the Collector again. Within a minute, new traces appear in Langfuse; `/healthz` shows `ot...]</a:t>
+              <a:t>[DEMO: `docker compose -f deploy/docker-compose.observability.yml start otel-collector`. Within a minute new traces appear in Phoenix; th...]</a:t>
             </a:r>
           </a:p>
           <a:p/>
           <a:p>
             <a:r>
-              <a:t>Revert, bring the backends back, and within a minute new traces arrive and the health field flips back. The dropped spans are gone; there's a gap in the timeline. That's the trade. You lost eight minutes of traces and kept eight minutes of a working helpdesk. Every time, take that trade.</a:t>
+              <a:t>Bring the Collector back, and within a minute new traces arrive and the failure count stops growing. The dropped spans are gone; there's a gap in the timeline. That's the trade. You lost eight minutes of traces and kept eight minutes of a working helpdesk. Every time, take that trade.</a:t>
             </a:r>
           </a:p>
           <a:p/>
           <a:p>
             <a:r>
-              <a:t>Add this to your integration tests: configure tracing with an unreachable OTLP endpoint, send ten requests, assert every one returns two hundred within budget and that `exporter_health()` reports the failure. `FailingSpanExporter` in `otel_setup.py` exists for exactly this. It's a twelve-line test and it protects the most important property this stack has.</a:t>
+              <a:t>Keep those three tests in every repo you run. `test_exporter_failure.py` is under eighty lines, and it protects the most important property this stack has: telemetry can fail, the service can't.</a:t>
             </a:r>
           </a:p>
         </p:txBody>
@@ -1496,19 +1527,25 @@
           <a:lstStyle/>
           <a:p>
             <a:r>
-              <a:t>Seven steps. Bring up both stacks and get every container healthy. Make sure Atlas exports to the Collector only; if there's a Langfuse key in Atlas's environment, you skipped Lecture 13.2. Replay a day offline and see it in Langfuse and Grafana.</a:t>
+              <a:t>Seven steps. Bring up both stacks and get every container healthy. Make sure Atlas exports to the Collector only; if there's a Langfuse key in Atlas's environment, you skipped Lecture 13.2. Drive traffic with the swarm and see it in Langfuse and Grafana. The offline replay won't do here: it writes to the local store and never passes through the Collector or Prometheus.</a:t>
             </a:r>
           </a:p>
           <a:p/>
           <a:p>
             <a:r>
-              <a:t>Then prove two things from the data. Open a tool span and see a hash where the payload was. Filter to errors and slow traces and confirm they're all there, while normal traffic is sampled down. The config says it works; the data proves it.</a:t>
+              <a:t>[SCREEN: Phoenix on `localhost:6006`, one `execute_tool lookup_ticket` span's attributes: no `gen_ai.tool.call.result`; `gen_ai.tool.call...]</a:t>
             </a:r>
           </a:p>
           <a:p/>
           <a:p>
             <a:r>
-              <a:t>Get the budget gate green locally, push a branch, and get it green in CI. Then run the chaos test yourself: stop Langfuse during a replay, watch p95 hold, watch the export-failure counter climb and the health endpoint say so.</a:t>
+              <a:t>Then prove two things from the data. Open a tool span: the result is gone and the arguments are a hash. Filter to errors and slow traces and confirm they're all there, while normal traffic is sampled down. The config says it works; the data proves it.</a:t>
+            </a:r>
+          </a:p>
+          <a:p/>
+          <a:p>
+            <a:r>
+              <a:t>Get the budget gate green locally, push a branch, and get it green in CI. Then run the chaos test yourself: stop the Collector during a swarm, watch the requests keep coming, and watch the export-failure counter climb and the health endpoint say so.</a:t>
             </a:r>
           </a:p>
         </p:txBody>
@@ -1578,7 +1615,7 @@
           <a:lstStyle/>
           <a:p>
             <a:r>
-              <a:t>(continued) Seven steps. Bring up both stacks and get every container healthy. Make sure Atlas exports to the Collector only; if there's a Langfuse key in Atlas's environment, you skipped Lecture 13.2. Replay a d</a:t>
+              <a:t>(continued) Seven steps. Bring up both stacks and get every container healthy. Make sure Atlas exports to the Collector only; if there's a Langfuse key in Atlas's environment, you skipped Lecture 13.2. Drive traf</a:t>
             </a:r>
           </a:p>
         </p:txBody>
@@ -1718,7 +1755,7 @@
           <a:lstStyle/>
           <a:p>
             <a:r>
-              <a:t>Four places people get stuck. ClickHouse restarting means Docker needs more memory. Traces visible in the Collector logs but not in Langfuse means the endpoint path or the auth header is wrong; check the current Langfuse OTLP docs. An empty Grafana dashboard means Prometheus isn't scraping Atlas; read the Prometheus logs. And a budget gate that fails on a fresh clone almost always means offline mode isn't set.</a:t>
+              <a:t>Four places people get stuck. ClickHouse restarting means Docker needs more memory. Traces visible in the Collector logs but not in Langfuse means the endpoint path or the auth header is wrong; check the current Langfuse OTLP docs. An empty Grafana dashboard means no live traffic or a down scrape target; check Prometheus's targets page on port nine zero nine one. And a budget gate that fails on a fresh clone almost always means offline mode isn't set.</a:t>
             </a:r>
           </a:p>
           <a:p/>
@@ -2232,7 +2269,7 @@
           <a:p/>
           <a:p>
             <a:r>
-              <a:t>Ninety seconds in CI, zero dollars, and two of the three incidents from Section 11 never happen. Next, the checklist that makes the whole stack production-ready.</a:t>
+              <a:t>Seconds on your laptop, zero dollars, and the config changes behind two of the three incidents from Section 11 never merge. Next, the checklist that makes the whole stack production-ready.</a:t>
             </a:r>
           </a:p>
         </p:txBody>
@@ -5524,7 +5561,7 @@
                 </a:solidFill>
                 <a:latin typeface="Inter"/>
               </a:rPr>
-              <a:t>AI Agent Observability &amp; Cost Control · Section 13 · Lecture 13.3</a:t>
+              <a:t>AI Agent Observability &amp; Cost Control · Section 13 · Lecture 13.2</a:t>
             </a:r>
           </a:p>
         </p:txBody>
@@ -5537,8 +5574,8 @@
         </p:nvSpPr>
         <p:spPr>
           <a:xfrm>
-            <a:off x="6675120" y="320040"/>
-            <a:ext cx="5074920" cy="548640"/>
+            <a:off x="1371600" y="822960"/>
+            <a:ext cx="9418320" cy="457200"/>
           </a:xfrm>
           <a:prstGeom prst="rect">
             <a:avLst/>
@@ -5551,15 +5588,15 @@
           </a:bodyPr>
           <a:lstStyle/>
           <a:p>
-            <a:pPr algn="r"/>
-            <a:r>
-              <a:rPr sz="1000" b="0">
-                <a:solidFill>
-                  <a:srgbClr val="94A3B8"/>
-                </a:solidFill>
-                <a:latin typeface="Inter"/>
-              </a:rPr>
-              <a:t>SECTION 13 · DEPLOYING THE STACK AND CI BUDGET GATES</a:t>
+            <a:pPr algn="ctr"/>
+            <a:r>
+              <a:rPr sz="1200" b="1">
+                <a:solidFill>
+                  <a:srgbClr val="00D4AA"/>
+                </a:solidFill>
+                <a:latin typeface="Inter"/>
+              </a:rPr>
+              <a:t>RECAP</a:t>
             </a:r>
           </a:p>
         </p:txBody>
@@ -5572,8 +5609,8 @@
         </p:nvSpPr>
         <p:spPr>
           <a:xfrm>
-            <a:off x="914400" y="1417320"/>
-            <a:ext cx="10332720" cy="457200"/>
+            <a:off x="1371600" y="1234440"/>
+            <a:ext cx="9418320" cy="822960"/>
           </a:xfrm>
           <a:prstGeom prst="rect">
             <a:avLst/>
@@ -5586,73 +5623,37 @@
           </a:bodyPr>
           <a:lstStyle/>
           <a:p>
-            <a:r>
-              <a:rPr sz="1200" b="1">
-                <a:solidFill>
-                  <a:srgbClr val="00D4AA"/>
-                </a:solidFill>
-                <a:latin typeface="Inter"/>
-              </a:rPr>
-              <a:t>LECTURE 13.3</a:t>
-            </a:r>
-          </a:p>
-        </p:txBody>
-      </p:sp>
-      <p:sp>
-        <p:nvSpPr>
-          <p:cNvPr id="5" name="TextBox 4"/>
-          <p:cNvSpPr txBox="1"/>
-          <p:nvPr/>
-        </p:nvSpPr>
-        <p:spPr>
-          <a:xfrm>
-            <a:off x="914400" y="1874519"/>
-            <a:ext cx="10332720" cy="1645920"/>
-          </a:xfrm>
-          <a:prstGeom prst="rect">
-            <a:avLst/>
-          </a:prstGeom>
-          <a:noFill/>
-        </p:spPr>
-        <p:txBody>
-          <a:bodyPr wrap="square" lIns="45720" rIns="45720" tIns="27432" bIns="27432" anchor="t">
-            <a:spAutoFit/>
-          </a:bodyPr>
-          <a:lstStyle/>
-          <a:p>
-            <a:pPr>
-              <a:lnSpc>
-                <a:spcPct val="110000"/>
-              </a:lnSpc>
-            </a:pPr>
-            <a:r>
-              <a:rPr sz="3000" b="1">
+            <a:pPr algn="ctr"/>
+            <a:r>
+              <a:rPr sz="2600" b="1">
                 <a:solidFill>
                   <a:srgbClr val="FFFFFF"/>
                 </a:solidFill>
                 <a:latin typeface="Inter"/>
               </a:rPr>
-              <a:t>Code-along: the CI budget gate</a:t>
-            </a:r>
-          </a:p>
-        </p:txBody>
-      </p:sp>
-      <p:sp>
-        <p:nvSpPr>
-          <p:cNvPr id="6" name="Rectangle 5"/>
+              <a:t>Key takeaways</a:t>
+            </a:r>
+          </a:p>
+        </p:txBody>
+      </p:sp>
+      <p:sp>
+        <p:nvSpPr>
+          <p:cNvPr id="5" name="Rounded Rectangle 4"/>
           <p:cNvSpPr/>
           <p:nvPr/>
         </p:nvSpPr>
         <p:spPr>
           <a:xfrm>
-            <a:off x="914400" y="3794760"/>
-            <a:ext cx="64008" cy="1143000"/>
-          </a:xfrm>
-          <a:prstGeom prst="rect">
-            <a:avLst/>
+            <a:off x="2011680" y="2514600"/>
+            <a:ext cx="8138160" cy="777240"/>
+          </a:xfrm>
+          <a:prstGeom prst="roundRect">
+            <a:avLst>
+              <a:gd name="adj" fmla="val 6588"/>
+            </a:avLst>
           </a:prstGeom>
           <a:solidFill>
-            <a:srgbClr val="00D4AA"/>
+            <a:srgbClr val="1A2742"/>
           </a:solidFill>
           <a:ln>
             <a:noFill/>
@@ -5681,14 +5682,48 @@
       </p:sp>
       <p:sp>
         <p:nvSpPr>
+          <p:cNvPr id="6" name="TextBox 5"/>
+          <p:cNvSpPr txBox="1"/>
+          <p:nvPr/>
+        </p:nvSpPr>
+        <p:spPr>
+          <a:xfrm>
+            <a:off x="2194560" y="2514600"/>
+            <a:ext cx="548640" cy="777240"/>
+          </a:xfrm>
+          <a:prstGeom prst="rect">
+            <a:avLst/>
+          </a:prstGeom>
+          <a:noFill/>
+        </p:spPr>
+        <p:txBody>
+          <a:bodyPr wrap="square" lIns="45720" rIns="45720" tIns="27432" bIns="27432" anchor="ctr">
+            <a:spAutoFit/>
+          </a:bodyPr>
+          <a:lstStyle/>
+          <a:p>
+            <a:r>
+              <a:rPr sz="2200" b="1">
+                <a:solidFill>
+                  <a:srgbClr val="00D4AA"/>
+                </a:solidFill>
+                <a:latin typeface="Inter"/>
+              </a:rPr>
+              <a:t>✓</a:t>
+            </a:r>
+          </a:p>
+        </p:txBody>
+      </p:sp>
+      <p:sp>
+        <p:nvSpPr>
           <p:cNvPr id="7" name="TextBox 6"/>
           <p:cNvSpPr txBox="1"/>
           <p:nvPr/>
         </p:nvSpPr>
         <p:spPr>
           <a:xfrm>
-            <a:off x="1188720" y="3749039"/>
-            <a:ext cx="9692640" cy="1280160"/>
+            <a:off x="2788920" y="2514600"/>
+            <a:ext cx="7223760" cy="777240"/>
           </a:xfrm>
           <a:prstGeom prst="rect">
             <a:avLst/>
@@ -5701,19 +5736,238 @@
           </a:bodyPr>
           <a:lstStyle/>
           <a:p>
-            <a:pPr>
-              <a:lnSpc>
-                <a:spcPct val="130000"/>
-              </a:lnSpc>
-            </a:pPr>
-            <a:r>
-              <a:rPr sz="1600" b="0">
-                <a:solidFill>
-                  <a:srgbClr val="CBD5E1"/>
-                </a:solidFill>
-                <a:latin typeface="Inter"/>
-              </a:rPr>
-              <a:t>Write a budget gate test that replays a deterministic day offline and asserts cost per session, p95 latency and tokens per generation…</a:t>
+            <a:r>
+              <a:rPr sz="1800" b="1">
+                <a:solidFill>
+                  <a:srgbClr val="FFFFFF"/>
+                </a:solidFill>
+                <a:latin typeface="Inter"/>
+              </a:rPr>
+              <a:t>Receivers, processors, exporters, in a pipeline</a:t>
+            </a:r>
+          </a:p>
+        </p:txBody>
+      </p:sp>
+      <p:sp>
+        <p:nvSpPr>
+          <p:cNvPr id="8" name="Rounded Rectangle 7"/>
+          <p:cNvSpPr/>
+          <p:nvPr/>
+        </p:nvSpPr>
+        <p:spPr>
+          <a:xfrm>
+            <a:off x="2011680" y="3474720"/>
+            <a:ext cx="8138160" cy="777240"/>
+          </a:xfrm>
+          <a:prstGeom prst="roundRect">
+            <a:avLst>
+              <a:gd name="adj" fmla="val 6588"/>
+            </a:avLst>
+          </a:prstGeom>
+          <a:solidFill>
+            <a:srgbClr val="1A2742"/>
+          </a:solidFill>
+          <a:ln>
+            <a:noFill/>
+          </a:ln>
+          <a:effectLst/>
+        </p:spPr>
+        <p:style>
+          <a:lnRef idx="1">
+            <a:schemeClr val="accent1"/>
+          </a:lnRef>
+          <a:fillRef idx="3">
+            <a:schemeClr val="accent1"/>
+          </a:fillRef>
+          <a:effectRef idx="2">
+            <a:schemeClr val="accent1"/>
+          </a:effectRef>
+          <a:fontRef idx="minor">
+            <a:schemeClr val="lt1"/>
+          </a:fontRef>
+        </p:style>
+        <p:txBody>
+          <a:bodyPr rtlCol="0" anchor="ctr"/>
+          <a:lstStyle/>
+          <a:p/>
+        </p:txBody>
+      </p:sp>
+      <p:sp>
+        <p:nvSpPr>
+          <p:cNvPr id="9" name="TextBox 8"/>
+          <p:cNvSpPr txBox="1"/>
+          <p:nvPr/>
+        </p:nvSpPr>
+        <p:spPr>
+          <a:xfrm>
+            <a:off x="2194560" y="3474720"/>
+            <a:ext cx="548640" cy="777240"/>
+          </a:xfrm>
+          <a:prstGeom prst="rect">
+            <a:avLst/>
+          </a:prstGeom>
+          <a:noFill/>
+        </p:spPr>
+        <p:txBody>
+          <a:bodyPr wrap="square" lIns="45720" rIns="45720" tIns="27432" bIns="27432" anchor="ctr">
+            <a:spAutoFit/>
+          </a:bodyPr>
+          <a:lstStyle/>
+          <a:p>
+            <a:r>
+              <a:rPr sz="2200" b="1">
+                <a:solidFill>
+                  <a:srgbClr val="00D4AA"/>
+                </a:solidFill>
+                <a:latin typeface="Inter"/>
+              </a:rPr>
+              <a:t>✓</a:t>
+            </a:r>
+          </a:p>
+        </p:txBody>
+      </p:sp>
+      <p:sp>
+        <p:nvSpPr>
+          <p:cNvPr id="10" name="TextBox 9"/>
+          <p:cNvSpPr txBox="1"/>
+          <p:nvPr/>
+        </p:nvSpPr>
+        <p:spPr>
+          <a:xfrm>
+            <a:off x="2788920" y="3474720"/>
+            <a:ext cx="7223760" cy="777240"/>
+          </a:xfrm>
+          <a:prstGeom prst="rect">
+            <a:avLst/>
+          </a:prstGeom>
+          <a:noFill/>
+        </p:spPr>
+        <p:txBody>
+          <a:bodyPr wrap="square" lIns="45720" rIns="45720" tIns="27432" bIns="27432" anchor="ctr">
+            <a:spAutoFit/>
+          </a:bodyPr>
+          <a:lstStyle/>
+          <a:p>
+            <a:r>
+              <a:rPr sz="1800" b="1">
+                <a:solidFill>
+                  <a:srgbClr val="FFFFFF"/>
+                </a:solidFill>
+                <a:latin typeface="Inter"/>
+              </a:rPr>
+              <a:t>Redact and tail sample once, for every backend</a:t>
+            </a:r>
+          </a:p>
+        </p:txBody>
+      </p:sp>
+      <p:sp>
+        <p:nvSpPr>
+          <p:cNvPr id="11" name="Rounded Rectangle 10"/>
+          <p:cNvSpPr/>
+          <p:nvPr/>
+        </p:nvSpPr>
+        <p:spPr>
+          <a:xfrm>
+            <a:off x="2011680" y="4434840"/>
+            <a:ext cx="8138160" cy="777240"/>
+          </a:xfrm>
+          <a:prstGeom prst="roundRect">
+            <a:avLst>
+              <a:gd name="adj" fmla="val 6588"/>
+            </a:avLst>
+          </a:prstGeom>
+          <a:solidFill>
+            <a:srgbClr val="1A2742"/>
+          </a:solidFill>
+          <a:ln>
+            <a:noFill/>
+          </a:ln>
+          <a:effectLst/>
+        </p:spPr>
+        <p:style>
+          <a:lnRef idx="1">
+            <a:schemeClr val="accent1"/>
+          </a:lnRef>
+          <a:fillRef idx="3">
+            <a:schemeClr val="accent1"/>
+          </a:fillRef>
+          <a:effectRef idx="2">
+            <a:schemeClr val="accent1"/>
+          </a:effectRef>
+          <a:fontRef idx="minor">
+            <a:schemeClr val="lt1"/>
+          </a:fontRef>
+        </p:style>
+        <p:txBody>
+          <a:bodyPr rtlCol="0" anchor="ctr"/>
+          <a:lstStyle/>
+          <a:p/>
+        </p:txBody>
+      </p:sp>
+      <p:sp>
+        <p:nvSpPr>
+          <p:cNvPr id="12" name="TextBox 11"/>
+          <p:cNvSpPr txBox="1"/>
+          <p:nvPr/>
+        </p:nvSpPr>
+        <p:spPr>
+          <a:xfrm>
+            <a:off x="2194560" y="4434840"/>
+            <a:ext cx="548640" cy="777240"/>
+          </a:xfrm>
+          <a:prstGeom prst="rect">
+            <a:avLst/>
+          </a:prstGeom>
+          <a:noFill/>
+        </p:spPr>
+        <p:txBody>
+          <a:bodyPr wrap="square" lIns="45720" rIns="45720" tIns="27432" bIns="27432" anchor="ctr">
+            <a:spAutoFit/>
+          </a:bodyPr>
+          <a:lstStyle/>
+          <a:p>
+            <a:r>
+              <a:rPr sz="2200" b="1">
+                <a:solidFill>
+                  <a:srgbClr val="00D4AA"/>
+                </a:solidFill>
+                <a:latin typeface="Inter"/>
+              </a:rPr>
+              <a:t>✓</a:t>
+            </a:r>
+          </a:p>
+        </p:txBody>
+      </p:sp>
+      <p:sp>
+        <p:nvSpPr>
+          <p:cNvPr id="13" name="TextBox 12"/>
+          <p:cNvSpPr txBox="1"/>
+          <p:nvPr/>
+        </p:nvSpPr>
+        <p:spPr>
+          <a:xfrm>
+            <a:off x="2788920" y="4434840"/>
+            <a:ext cx="7223760" cy="777240"/>
+          </a:xfrm>
+          <a:prstGeom prst="rect">
+            <a:avLst/>
+          </a:prstGeom>
+          <a:noFill/>
+        </p:spPr>
+        <p:txBody>
+          <a:bodyPr wrap="square" lIns="45720" rIns="45720" tIns="27432" bIns="27432" anchor="ctr">
+            <a:spAutoFit/>
+          </a:bodyPr>
+          <a:lstStyle/>
+          <a:p>
+            <a:r>
+              <a:rPr sz="1800" b="1">
+                <a:solidFill>
+                  <a:srgbClr val="FFFFFF"/>
+                </a:solidFill>
+                <a:latin typeface="Inter"/>
+              </a:rPr>
+              <a:t>Credentials live in the Collector</a:t>
             </a:r>
           </a:p>
         </p:txBody>
@@ -5773,7 +6027,7 @@
                 </a:solidFill>
                 <a:latin typeface="Inter"/>
               </a:rPr>
-              <a:t>AI Agent Observability &amp; Cost Control · Section 13 · Lecture 13.3</a:t>
+              <a:t>AI Agent Observability &amp; Cost Control · Section 13 · Lecture 13.2</a:t>
             </a:r>
           </a:p>
         </p:txBody>
@@ -5786,8 +6040,42 @@
         </p:nvSpPr>
         <p:spPr>
           <a:xfrm>
-            <a:off x="457200" y="411480"/>
-            <a:ext cx="11247120" cy="868680"/>
+            <a:off x="2377440" y="2286000"/>
+            <a:ext cx="1097280" cy="1097280"/>
+          </a:xfrm>
+          <a:prstGeom prst="rect">
+            <a:avLst/>
+          </a:prstGeom>
+          <a:noFill/>
+        </p:spPr>
+        <p:txBody>
+          <a:bodyPr wrap="square" lIns="45720" rIns="45720" tIns="27432" bIns="27432" anchor="ctr">
+            <a:spAutoFit/>
+          </a:bodyPr>
+          <a:lstStyle/>
+          <a:p>
+            <a:r>
+              <a:rPr sz="5400" b="1">
+                <a:solidFill>
+                  <a:srgbClr val="00D4AA"/>
+                </a:solidFill>
+                <a:latin typeface="Inter"/>
+              </a:rPr>
+              <a:t>→</a:t>
+            </a:r>
+          </a:p>
+        </p:txBody>
+      </p:sp>
+      <p:sp>
+        <p:nvSpPr>
+          <p:cNvPr id="4" name="TextBox 3"/>
+          <p:cNvSpPr txBox="1"/>
+          <p:nvPr/>
+        </p:nvSpPr>
+        <p:spPr>
+          <a:xfrm>
+            <a:off x="3566160" y="2148840"/>
+            <a:ext cx="7315200" cy="457200"/>
           </a:xfrm>
           <a:prstGeom prst="rect">
             <a:avLst/>
@@ -5800,11 +6088,40 @@
           </a:bodyPr>
           <a:lstStyle/>
           <a:p>
-            <a:pPr>
-              <a:lnSpc>
-                <a:spcPct val="110000"/>
-              </a:lnSpc>
-            </a:pPr>
+            <a:r>
+              <a:rPr sz="1400" b="0">
+                <a:solidFill>
+                  <a:srgbClr val="94A3B8"/>
+                </a:solidFill>
+                <a:latin typeface="Inter"/>
+              </a:rPr>
+              <a:t>Next up:</a:t>
+            </a:r>
+          </a:p>
+        </p:txBody>
+      </p:sp>
+      <p:sp>
+        <p:nvSpPr>
+          <p:cNvPr id="5" name="TextBox 4"/>
+          <p:cNvSpPr txBox="1"/>
+          <p:nvPr/>
+        </p:nvSpPr>
+        <p:spPr>
+          <a:xfrm>
+            <a:off x="3566160" y="2560320"/>
+            <a:ext cx="7315200" cy="1097280"/>
+          </a:xfrm>
+          <a:prstGeom prst="rect">
+            <a:avLst/>
+          </a:prstGeom>
+          <a:noFill/>
+        </p:spPr>
+        <p:txBody>
+          <a:bodyPr wrap="square" lIns="45720" rIns="45720" tIns="27432" bIns="27432" anchor="t">
+            <a:spAutoFit/>
+          </a:bodyPr>
+          <a:lstStyle/>
+          <a:p>
             <a:r>
               <a:rPr sz="2600" b="1">
                 <a:solidFill>
@@ -5812,63 +6129,21 @@
                 </a:solidFill>
                 <a:latin typeface="Inter"/>
               </a:rPr>
-              <a:t>What the gate catches, and what it doesn't</a:t>
-            </a:r>
-          </a:p>
-        </p:txBody>
-      </p:sp>
-      <p:sp>
-        <p:nvSpPr>
-          <p:cNvPr id="4" name="Rectangle 3"/>
-          <p:cNvSpPr/>
-          <p:nvPr/>
-        </p:nvSpPr>
-        <p:spPr>
-          <a:xfrm>
-            <a:off x="502920" y="1024128"/>
-            <a:ext cx="822960" cy="54864"/>
-          </a:xfrm>
-          <a:prstGeom prst="rect">
-            <a:avLst/>
-          </a:prstGeom>
-          <a:solidFill>
-            <a:srgbClr val="00D4AA"/>
-          </a:solidFill>
-          <a:ln>
-            <a:noFill/>
-          </a:ln>
-          <a:effectLst/>
-        </p:spPr>
-        <p:style>
-          <a:lnRef idx="1">
-            <a:schemeClr val="accent1"/>
-          </a:lnRef>
-          <a:fillRef idx="3">
-            <a:schemeClr val="accent1"/>
-          </a:fillRef>
-          <a:effectRef idx="2">
-            <a:schemeClr val="accent1"/>
-          </a:effectRef>
-          <a:fontRef idx="minor">
-            <a:schemeClr val="lt1"/>
-          </a:fontRef>
-        </p:style>
-        <p:txBody>
-          <a:bodyPr rtlCol="0" anchor="ctr"/>
-          <a:lstStyle/>
-          <a:p/>
-        </p:txBody>
-      </p:sp>
-      <p:sp>
-        <p:nvSpPr>
-          <p:cNvPr id="5" name="TextBox 4"/>
-          <p:cNvSpPr txBox="1"/>
-          <p:nvPr/>
-        </p:nvSpPr>
-        <p:spPr>
-          <a:xfrm>
-            <a:off x="640080" y="1417320"/>
-            <a:ext cx="10881360" cy="4892040"/>
+              <a:t>Code-along: the CI budget gate</a:t>
+            </a:r>
+          </a:p>
+        </p:txBody>
+      </p:sp>
+      <p:sp>
+        <p:nvSpPr>
+          <p:cNvPr id="6" name="TextBox 5"/>
+          <p:cNvSpPr txBox="1"/>
+          <p:nvPr/>
+        </p:nvSpPr>
+        <p:spPr>
+          <a:xfrm>
+            <a:off x="3566160" y="3703320"/>
+            <a:ext cx="7315200" cy="1097280"/>
           </a:xfrm>
           <a:prstGeom prst="rect">
             <a:avLst/>
@@ -5881,99 +6156,14 @@
           </a:bodyPr>
           <a:lstStyle/>
           <a:p>
-            <a:pPr marL="292608" indent="-292608">
-              <a:lnSpc>
-                <a:spcPct val="120000"/>
-              </a:lnSpc>
-              <a:spcAft>
-                <a:spcPts val="1260"/>
-              </a:spcAft>
-              <a:buClr>
-                <a:srgbClr val="00D4AA"/>
-              </a:buClr>
-              <a:buFont typeface="Inter"/>
-              <a:buChar char="•"/>
-            </a:pPr>
-            <a:r>
-              <a:rPr sz="1800" b="0">
-                <a:solidFill>
-                  <a:srgbClr val="FFFFFF"/>
-                </a:solidFill>
-                <a:latin typeface="Inter"/>
-              </a:rPr>
-              <a:t>Catches: context diet off, top-k changes, model swaps, prompt length growth, step limit changes, retry settings that stack timeouts</a:t>
-            </a:r>
-          </a:p>
-          <a:p>
-            <a:pPr marL="292608" indent="-292608">
-              <a:lnSpc>
-                <a:spcPct val="120000"/>
-              </a:lnSpc>
-              <a:spcAft>
-                <a:spcPts val="1260"/>
-              </a:spcAft>
-              <a:buClr>
-                <a:srgbClr val="00D4AA"/>
-              </a:buClr>
-              <a:buFont typeface="Inter"/>
-              <a:buChar char="•"/>
-            </a:pPr>
-            <a:r>
-              <a:rPr sz="1800" b="0">
-                <a:solidFill>
-                  <a:srgbClr val="FFFFFF"/>
-                </a:solidFill>
-                <a:latin typeface="Inter"/>
-              </a:rPr>
-              <a:t>Catches: anything deterministic that changes tokens, steps or simulated latency, including env and config</a:t>
-            </a:r>
-          </a:p>
-          <a:p>
-            <a:pPr marL="292608" indent="-292608">
-              <a:lnSpc>
-                <a:spcPct val="120000"/>
-              </a:lnSpc>
-              <a:spcAft>
-                <a:spcPts val="1260"/>
-              </a:spcAft>
-              <a:buClr>
-                <a:srgbClr val="00D4AA"/>
-              </a:buClr>
-              <a:buFont typeface="Inter"/>
-              <a:buChar char="•"/>
-            </a:pPr>
-            <a:r>
-              <a:rPr sz="1800" b="0">
-                <a:solidFill>
-                  <a:srgbClr val="FFFFFF"/>
-                </a:solidFill>
-                <a:latin typeface="Inter"/>
-              </a:rPr>
-              <a:t>Doesn't catch: provider slowdowns, quality regressions, real-world intent shift</a:t>
-            </a:r>
-          </a:p>
-          <a:p>
-            <a:pPr marL="292608" indent="-292608">
-              <a:lnSpc>
-                <a:spcPct val="120000"/>
-              </a:lnSpc>
-              <a:spcAft>
-                <a:spcPts val="1260"/>
-              </a:spcAft>
-              <a:buClr>
-                <a:srgbClr val="00D4AA"/>
-              </a:buClr>
-              <a:buFont typeface="Inter"/>
-              <a:buChar char="•"/>
-            </a:pPr>
-            <a:r>
-              <a:rPr sz="1800" b="0">
-                <a:solidFill>
-                  <a:srgbClr val="FFFFFF"/>
-                </a:solidFill>
-                <a:latin typeface="Inter"/>
-              </a:rPr>
-              <a:t>For those: fallbacks and breakers (Section 7), online judge and drift (Section 8), the live-evals job</a:t>
+            <a:r>
+              <a:rPr sz="1400" b="0">
+                <a:solidFill>
+                  <a:srgbClr val="94A3B8"/>
+                </a:solidFill>
+                <a:latin typeface="Inter"/>
+              </a:rPr>
+              <a:t>Next, the CI budget gate: a test that replays a day of traffic and fails the pull request…</a:t>
             </a:r>
           </a:p>
         </p:txBody>
@@ -6046,8 +6236,158 @@
         </p:nvSpPr>
         <p:spPr>
           <a:xfrm>
-            <a:off x="2377440" y="2286000"/>
-            <a:ext cx="1097280" cy="1097280"/>
+            <a:off x="6675120" y="320040"/>
+            <a:ext cx="5074920" cy="548640"/>
+          </a:xfrm>
+          <a:prstGeom prst="rect">
+            <a:avLst/>
+          </a:prstGeom>
+          <a:noFill/>
+        </p:spPr>
+        <p:txBody>
+          <a:bodyPr wrap="square" lIns="45720" rIns="45720" tIns="27432" bIns="27432" anchor="t">
+            <a:spAutoFit/>
+          </a:bodyPr>
+          <a:lstStyle/>
+          <a:p>
+            <a:pPr algn="r"/>
+            <a:r>
+              <a:rPr sz="1000" b="0">
+                <a:solidFill>
+                  <a:srgbClr val="94A3B8"/>
+                </a:solidFill>
+                <a:latin typeface="Inter"/>
+              </a:rPr>
+              <a:t>SECTION 13 · DEPLOYING THE STACK AND CI BUDGET GATES</a:t>
+            </a:r>
+          </a:p>
+        </p:txBody>
+      </p:sp>
+      <p:sp>
+        <p:nvSpPr>
+          <p:cNvPr id="4" name="TextBox 3"/>
+          <p:cNvSpPr txBox="1"/>
+          <p:nvPr/>
+        </p:nvSpPr>
+        <p:spPr>
+          <a:xfrm>
+            <a:off x="914400" y="1417320"/>
+            <a:ext cx="10332720" cy="457200"/>
+          </a:xfrm>
+          <a:prstGeom prst="rect">
+            <a:avLst/>
+          </a:prstGeom>
+          <a:noFill/>
+        </p:spPr>
+        <p:txBody>
+          <a:bodyPr wrap="square" lIns="45720" rIns="45720" tIns="27432" bIns="27432" anchor="t">
+            <a:spAutoFit/>
+          </a:bodyPr>
+          <a:lstStyle/>
+          <a:p>
+            <a:r>
+              <a:rPr sz="1200" b="1">
+                <a:solidFill>
+                  <a:srgbClr val="00D4AA"/>
+                </a:solidFill>
+                <a:latin typeface="Inter"/>
+              </a:rPr>
+              <a:t>LECTURE 13.3</a:t>
+            </a:r>
+          </a:p>
+        </p:txBody>
+      </p:sp>
+      <p:sp>
+        <p:nvSpPr>
+          <p:cNvPr id="5" name="TextBox 4"/>
+          <p:cNvSpPr txBox="1"/>
+          <p:nvPr/>
+        </p:nvSpPr>
+        <p:spPr>
+          <a:xfrm>
+            <a:off x="914400" y="1874519"/>
+            <a:ext cx="10332720" cy="1645920"/>
+          </a:xfrm>
+          <a:prstGeom prst="rect">
+            <a:avLst/>
+          </a:prstGeom>
+          <a:noFill/>
+        </p:spPr>
+        <p:txBody>
+          <a:bodyPr wrap="square" lIns="45720" rIns="45720" tIns="27432" bIns="27432" anchor="t">
+            <a:spAutoFit/>
+          </a:bodyPr>
+          <a:lstStyle/>
+          <a:p>
+            <a:pPr>
+              <a:lnSpc>
+                <a:spcPct val="110000"/>
+              </a:lnSpc>
+            </a:pPr>
+            <a:r>
+              <a:rPr sz="3000" b="1">
+                <a:solidFill>
+                  <a:srgbClr val="FFFFFF"/>
+                </a:solidFill>
+                <a:latin typeface="Inter"/>
+              </a:rPr>
+              <a:t>Code-along: the CI budget gate</a:t>
+            </a:r>
+          </a:p>
+        </p:txBody>
+      </p:sp>
+      <p:sp>
+        <p:nvSpPr>
+          <p:cNvPr id="6" name="Rectangle 5"/>
+          <p:cNvSpPr/>
+          <p:nvPr/>
+        </p:nvSpPr>
+        <p:spPr>
+          <a:xfrm>
+            <a:off x="914400" y="3794760"/>
+            <a:ext cx="64008" cy="1143000"/>
+          </a:xfrm>
+          <a:prstGeom prst="rect">
+            <a:avLst/>
+          </a:prstGeom>
+          <a:solidFill>
+            <a:srgbClr val="00D4AA"/>
+          </a:solidFill>
+          <a:ln>
+            <a:noFill/>
+          </a:ln>
+          <a:effectLst/>
+        </p:spPr>
+        <p:style>
+          <a:lnRef idx="1">
+            <a:schemeClr val="accent1"/>
+          </a:lnRef>
+          <a:fillRef idx="3">
+            <a:schemeClr val="accent1"/>
+          </a:fillRef>
+          <a:effectRef idx="2">
+            <a:schemeClr val="accent1"/>
+          </a:effectRef>
+          <a:fontRef idx="minor">
+            <a:schemeClr val="lt1"/>
+          </a:fontRef>
+        </p:style>
+        <p:txBody>
+          <a:bodyPr rtlCol="0" anchor="ctr"/>
+          <a:lstStyle/>
+          <a:p/>
+        </p:txBody>
+      </p:sp>
+      <p:sp>
+        <p:nvSpPr>
+          <p:cNvPr id="7" name="TextBox 6"/>
+          <p:cNvSpPr txBox="1"/>
+          <p:nvPr/>
+        </p:nvSpPr>
+        <p:spPr>
+          <a:xfrm>
+            <a:off x="1188720" y="3749039"/>
+            <a:ext cx="9692640" cy="1280160"/>
           </a:xfrm>
           <a:prstGeom prst="rect">
             <a:avLst/>
@@ -6060,116 +6400,19 @@
           </a:bodyPr>
           <a:lstStyle/>
           <a:p>
-            <a:r>
-              <a:rPr sz="5400" b="1">
-                <a:solidFill>
-                  <a:srgbClr val="00D4AA"/>
-                </a:solidFill>
-                <a:latin typeface="Inter"/>
-              </a:rPr>
-              <a:t>→</a:t>
-            </a:r>
-          </a:p>
-        </p:txBody>
-      </p:sp>
-      <p:sp>
-        <p:nvSpPr>
-          <p:cNvPr id="4" name="TextBox 3"/>
-          <p:cNvSpPr txBox="1"/>
-          <p:nvPr/>
-        </p:nvSpPr>
-        <p:spPr>
-          <a:xfrm>
-            <a:off x="3566160" y="2148840"/>
-            <a:ext cx="7315200" cy="457200"/>
-          </a:xfrm>
-          <a:prstGeom prst="rect">
-            <a:avLst/>
-          </a:prstGeom>
-          <a:noFill/>
-        </p:spPr>
-        <p:txBody>
-          <a:bodyPr wrap="square" lIns="45720" rIns="45720" tIns="27432" bIns="27432" anchor="t">
-            <a:spAutoFit/>
-          </a:bodyPr>
-          <a:lstStyle/>
-          <a:p>
-            <a:r>
-              <a:rPr sz="1400" b="0">
-                <a:solidFill>
-                  <a:srgbClr val="94A3B8"/>
-                </a:solidFill>
-                <a:latin typeface="Inter"/>
-              </a:rPr>
-              <a:t>Next up:</a:t>
-            </a:r>
-          </a:p>
-        </p:txBody>
-      </p:sp>
-      <p:sp>
-        <p:nvSpPr>
-          <p:cNvPr id="5" name="TextBox 4"/>
-          <p:cNvSpPr txBox="1"/>
-          <p:nvPr/>
-        </p:nvSpPr>
-        <p:spPr>
-          <a:xfrm>
-            <a:off x="3566160" y="2560320"/>
-            <a:ext cx="7315200" cy="1097280"/>
-          </a:xfrm>
-          <a:prstGeom prst="rect">
-            <a:avLst/>
-          </a:prstGeom>
-          <a:noFill/>
-        </p:spPr>
-        <p:txBody>
-          <a:bodyPr wrap="square" lIns="45720" rIns="45720" tIns="27432" bIns="27432" anchor="t">
-            <a:spAutoFit/>
-          </a:bodyPr>
-          <a:lstStyle/>
-          <a:p>
-            <a:r>
-              <a:rPr sz="2600" b="1">
-                <a:solidFill>
-                  <a:srgbClr val="FFFFFF"/>
-                </a:solidFill>
-                <a:latin typeface="Inter"/>
-              </a:rPr>
-              <a:t>Production readiness checklist for observability</a:t>
-            </a:r>
-          </a:p>
-        </p:txBody>
-      </p:sp>
-      <p:sp>
-        <p:nvSpPr>
-          <p:cNvPr id="6" name="TextBox 5"/>
-          <p:cNvSpPr txBox="1"/>
-          <p:nvPr/>
-        </p:nvSpPr>
-        <p:spPr>
-          <a:xfrm>
-            <a:off x="3566160" y="3703320"/>
-            <a:ext cx="7315200" cy="1097280"/>
-          </a:xfrm>
-          <a:prstGeom prst="rect">
-            <a:avLst/>
-          </a:prstGeom>
-          <a:noFill/>
-        </p:spPr>
-        <p:txBody>
-          <a:bodyPr wrap="square" lIns="45720" rIns="45720" tIns="27432" bIns="27432" anchor="t">
-            <a:spAutoFit/>
-          </a:bodyPr>
-          <a:lstStyle/>
-          <a:p>
-            <a:r>
-              <a:rPr sz="1400" b="0">
-                <a:solidFill>
-                  <a:srgbClr val="94A3B8"/>
-                </a:solidFill>
-                <a:latin typeface="Inter"/>
-              </a:rPr>
-              <a:t>Next, the production readiness checklist: sampling, back-pressure, secrets, dashboards as code and alert ownership.</a:t>
+            <a:pPr>
+              <a:lnSpc>
+                <a:spcPct val="130000"/>
+              </a:lnSpc>
+            </a:pPr>
+            <a:r>
+              <a:rPr sz="1600" b="0">
+                <a:solidFill>
+                  <a:srgbClr val="CBD5E1"/>
+                </a:solidFill>
+                <a:latin typeface="Inter"/>
+              </a:rPr>
+              <a:t>Write a budget gate test that replays a deterministic day offline and asserts cost per session, p95 latency and tokens per generation…</a:t>
             </a:r>
           </a:p>
         </p:txBody>
@@ -6229,7 +6472,7 @@
                 </a:solidFill>
                 <a:latin typeface="Inter"/>
               </a:rPr>
-              <a:t>AI Agent Observability &amp; Cost Control · Section 13 · Lecture 13.4</a:t>
+              <a:t>AI Agent Observability &amp; Cost Control · Section 13 · Lecture 13.3</a:t>
             </a:r>
           </a:p>
         </p:txBody>
@@ -6242,77 +6485,8 @@
         </p:nvSpPr>
         <p:spPr>
           <a:xfrm>
-            <a:off x="6675120" y="320040"/>
-            <a:ext cx="5074920" cy="548640"/>
-          </a:xfrm>
-          <a:prstGeom prst="rect">
-            <a:avLst/>
-          </a:prstGeom>
-          <a:noFill/>
-        </p:spPr>
-        <p:txBody>
-          <a:bodyPr wrap="square" lIns="45720" rIns="45720" tIns="27432" bIns="27432" anchor="t">
-            <a:spAutoFit/>
-          </a:bodyPr>
-          <a:lstStyle/>
-          <a:p>
-            <a:pPr algn="r"/>
-            <a:r>
-              <a:rPr sz="1000" b="0">
-                <a:solidFill>
-                  <a:srgbClr val="94A3B8"/>
-                </a:solidFill>
-                <a:latin typeface="Inter"/>
-              </a:rPr>
-              <a:t>SECTION 13 · DEPLOYING THE STACK AND CI BUDGET GATES</a:t>
-            </a:r>
-          </a:p>
-        </p:txBody>
-      </p:sp>
-      <p:sp>
-        <p:nvSpPr>
-          <p:cNvPr id="4" name="TextBox 3"/>
-          <p:cNvSpPr txBox="1"/>
-          <p:nvPr/>
-        </p:nvSpPr>
-        <p:spPr>
-          <a:xfrm>
-            <a:off x="914400" y="1417320"/>
-            <a:ext cx="10332720" cy="457200"/>
-          </a:xfrm>
-          <a:prstGeom prst="rect">
-            <a:avLst/>
-          </a:prstGeom>
-          <a:noFill/>
-        </p:spPr>
-        <p:txBody>
-          <a:bodyPr wrap="square" lIns="45720" rIns="45720" tIns="27432" bIns="27432" anchor="t">
-            <a:spAutoFit/>
-          </a:bodyPr>
-          <a:lstStyle/>
-          <a:p>
-            <a:r>
-              <a:rPr sz="1200" b="1">
-                <a:solidFill>
-                  <a:srgbClr val="00D4AA"/>
-                </a:solidFill>
-                <a:latin typeface="Inter"/>
-              </a:rPr>
-              <a:t>LECTURE 13.4</a:t>
-            </a:r>
-          </a:p>
-        </p:txBody>
-      </p:sp>
-      <p:sp>
-        <p:nvSpPr>
-          <p:cNvPr id="5" name="TextBox 4"/>
-          <p:cNvSpPr txBox="1"/>
-          <p:nvPr/>
-        </p:nvSpPr>
-        <p:spPr>
-          <a:xfrm>
-            <a:off x="914400" y="1874519"/>
-            <a:ext cx="10332720" cy="1645920"/>
+            <a:off x="457200" y="411480"/>
+            <a:ext cx="11247120" cy="868680"/>
           </a:xfrm>
           <a:prstGeom prst="rect">
             <a:avLst/>
@@ -6331,27 +6505,27 @@
               </a:lnSpc>
             </a:pPr>
             <a:r>
-              <a:rPr sz="3000" b="1">
+              <a:rPr sz="2600" b="1">
                 <a:solidFill>
                   <a:srgbClr val="FFFFFF"/>
                 </a:solidFill>
                 <a:latin typeface="Inter"/>
               </a:rPr>
-              <a:t>Production readiness checklist for observability</a:t>
-            </a:r>
-          </a:p>
-        </p:txBody>
-      </p:sp>
-      <p:sp>
-        <p:nvSpPr>
-          <p:cNvPr id="6" name="Rectangle 5"/>
+              <a:t>What the gate catches, and what it doesn't</a:t>
+            </a:r>
+          </a:p>
+        </p:txBody>
+      </p:sp>
+      <p:sp>
+        <p:nvSpPr>
+          <p:cNvPr id="4" name="Rectangle 3"/>
           <p:cNvSpPr/>
           <p:nvPr/>
         </p:nvSpPr>
         <p:spPr>
           <a:xfrm>
-            <a:off x="914400" y="3794760"/>
-            <a:ext cx="64008" cy="1143000"/>
+            <a:off x="502920" y="1024128"/>
+            <a:ext cx="822960" cy="54864"/>
           </a:xfrm>
           <a:prstGeom prst="rect">
             <a:avLst/>
@@ -6386,39 +6560,119 @@
       </p:sp>
       <p:sp>
         <p:nvSpPr>
-          <p:cNvPr id="7" name="TextBox 6"/>
-          <p:cNvSpPr txBox="1"/>
-          <p:nvPr/>
-        </p:nvSpPr>
-        <p:spPr>
-          <a:xfrm>
-            <a:off x="1188720" y="3749039"/>
-            <a:ext cx="9692640" cy="1280160"/>
-          </a:xfrm>
-          <a:prstGeom prst="rect">
-            <a:avLst/>
-          </a:prstGeom>
-          <a:noFill/>
-        </p:spPr>
-        <p:txBody>
-          <a:bodyPr wrap="square" lIns="45720" rIns="45720" tIns="27432" bIns="27432" anchor="ctr">
-            <a:spAutoFit/>
-          </a:bodyPr>
-          <a:lstStyle/>
-          <a:p>
-            <a:pPr>
+          <p:cNvPr id="5" name="TextBox 4"/>
+          <p:cNvSpPr txBox="1"/>
+          <p:nvPr/>
+        </p:nvSpPr>
+        <p:spPr>
+          <a:xfrm>
+            <a:off x="640080" y="1417320"/>
+            <a:ext cx="10881360" cy="4892040"/>
+          </a:xfrm>
+          <a:prstGeom prst="rect">
+            <a:avLst/>
+          </a:prstGeom>
+          <a:noFill/>
+        </p:spPr>
+        <p:txBody>
+          <a:bodyPr wrap="square" lIns="45720" rIns="45720" tIns="27432" bIns="27432" anchor="t">
+            <a:spAutoFit/>
+          </a:bodyPr>
+          <a:lstStyle/>
+          <a:p>
+            <a:pPr marL="292608" indent="-292608">
               <a:lnSpc>
-                <a:spcPct val="130000"/>
+                <a:spcPct val="120000"/>
               </a:lnSpc>
+              <a:spcAft>
+                <a:spcPts val="1260"/>
+              </a:spcAft>
+              <a:buClr>
+                <a:srgbClr val="00D4AA"/>
+              </a:buClr>
+              <a:buFont typeface="Inter"/>
+              <a:buChar char="•"/>
             </a:pPr>
             <a:r>
-              <a:rPr sz="1600" b="0">
-                <a:solidFill>
-                  <a:srgbClr val="CBD5E1"/>
-                </a:solidFill>
-                <a:latin typeface="Inter"/>
-              </a:rPr>
-              <a:t>Walk the twelve-item production checklist and know what "done" means for each.</a:t>
+              <a:rPr sz="1800" b="0">
+                <a:solidFill>
+                  <a:srgbClr val="FFFFFF"/>
+                </a:solidFill>
+                <a:latin typeface="Inter"/>
+              </a:rPr>
+              <a:t>Catches: top-k and relevance-floor changes, diet settings, model swaps, prompt length growth, step limit changes, retry settings that stack timeouts</a:t>
+            </a:r>
+          </a:p>
+          <a:p>
+            <a:pPr marL="292608" indent="-292608">
+              <a:lnSpc>
+                <a:spcPct val="120000"/>
+              </a:lnSpc>
+              <a:spcAft>
+                <a:spcPts val="1260"/>
+              </a:spcAft>
+              <a:buClr>
+                <a:srgbClr val="00D4AA"/>
+              </a:buClr>
+              <a:buFont typeface="Inter"/>
+              <a:buChar char="•"/>
+            </a:pPr>
+            <a:r>
+              <a:rPr sz="1800" b="0">
+                <a:solidFill>
+                  <a:srgbClr val="FFFFFF"/>
+                </a:solidFill>
+                <a:latin typeface="Inter"/>
+              </a:rPr>
+              <a:t>Catches: anything deterministic that changes tokens, steps or simulated latency, including env and config</a:t>
+            </a:r>
+          </a:p>
+          <a:p>
+            <a:pPr marL="292608" indent="-292608">
+              <a:lnSpc>
+                <a:spcPct val="120000"/>
+              </a:lnSpc>
+              <a:spcAft>
+                <a:spcPts val="1260"/>
+              </a:spcAft>
+              <a:buClr>
+                <a:srgbClr val="00D4AA"/>
+              </a:buClr>
+              <a:buFont typeface="Inter"/>
+              <a:buChar char="•"/>
+            </a:pPr>
+            <a:r>
+              <a:rPr sz="1800" b="0">
+                <a:solidFill>
+                  <a:srgbClr val="FFFFFF"/>
+                </a:solidFill>
+                <a:latin typeface="Inter"/>
+              </a:rPr>
+              <a:t>Doesn't catch: provider slowdowns, quality regressions, real-world intent shift</a:t>
+            </a:r>
+          </a:p>
+          <a:p>
+            <a:pPr marL="292608" indent="-292608">
+              <a:lnSpc>
+                <a:spcPct val="120000"/>
+              </a:lnSpc>
+              <a:spcAft>
+                <a:spcPts val="1260"/>
+              </a:spcAft>
+              <a:buClr>
+                <a:srgbClr val="00D4AA"/>
+              </a:buClr>
+              <a:buFont typeface="Inter"/>
+              <a:buChar char="•"/>
+            </a:pPr>
+            <a:r>
+              <a:rPr sz="1800" b="0">
+                <a:solidFill>
+                  <a:srgbClr val="FFFFFF"/>
+                </a:solidFill>
+                <a:latin typeface="Inter"/>
+              </a:rPr>
+              <a:t>For those: fallbacks and breakers (Section 7), online judge and drift (Section 8), the live-evals job</a:t>
             </a:r>
           </a:p>
         </p:txBody>
@@ -6478,7 +6732,7 @@
                 </a:solidFill>
                 <a:latin typeface="Inter"/>
               </a:rPr>
-              <a:t>AI Agent Observability &amp; Cost Control · Section 13 · Lecture 13.4</a:t>
+              <a:t>AI Agent Observability &amp; Cost Control · Section 13 · Lecture 13.3</a:t>
             </a:r>
           </a:p>
         </p:txBody>
@@ -6491,8 +6745,8 @@
         </p:nvSpPr>
         <p:spPr>
           <a:xfrm>
-            <a:off x="457200" y="411480"/>
-            <a:ext cx="11247120" cy="868680"/>
+            <a:off x="1371600" y="822960"/>
+            <a:ext cx="9418320" cy="457200"/>
           </a:xfrm>
           <a:prstGeom prst="rect">
             <a:avLst/>
@@ -6505,11 +6759,42 @@
           </a:bodyPr>
           <a:lstStyle/>
           <a:p>
-            <a:pPr>
-              <a:lnSpc>
-                <a:spcPct val="110000"/>
-              </a:lnSpc>
-            </a:pPr>
+            <a:pPr algn="ctr"/>
+            <a:r>
+              <a:rPr sz="1200" b="1">
+                <a:solidFill>
+                  <a:srgbClr val="00D4AA"/>
+                </a:solidFill>
+                <a:latin typeface="Inter"/>
+              </a:rPr>
+              <a:t>RECAP</a:t>
+            </a:r>
+          </a:p>
+        </p:txBody>
+      </p:sp>
+      <p:sp>
+        <p:nvSpPr>
+          <p:cNvPr id="4" name="TextBox 3"/>
+          <p:cNvSpPr txBox="1"/>
+          <p:nvPr/>
+        </p:nvSpPr>
+        <p:spPr>
+          <a:xfrm>
+            <a:off x="1371600" y="1234440"/>
+            <a:ext cx="9418320" cy="822960"/>
+          </a:xfrm>
+          <a:prstGeom prst="rect">
+            <a:avLst/>
+          </a:prstGeom>
+          <a:noFill/>
+        </p:spPr>
+        <p:txBody>
+          <a:bodyPr wrap="square" lIns="45720" rIns="45720" tIns="27432" bIns="27432" anchor="t">
+            <a:spAutoFit/>
+          </a:bodyPr>
+          <a:lstStyle/>
+          <a:p>
+            <a:pPr algn="ctr"/>
             <a:r>
               <a:rPr sz="2600" b="1">
                 <a:solidFill>
@@ -6517,27 +6802,29 @@
                 </a:solidFill>
                 <a:latin typeface="Inter"/>
               </a:rPr>
-              <a:t>Sampling and volume</a:t>
-            </a:r>
-          </a:p>
-        </p:txBody>
-      </p:sp>
-      <p:sp>
-        <p:nvSpPr>
-          <p:cNvPr id="4" name="Rectangle 3"/>
+              <a:t>Key takeaways</a:t>
+            </a:r>
+          </a:p>
+        </p:txBody>
+      </p:sp>
+      <p:sp>
+        <p:nvSpPr>
+          <p:cNvPr id="5" name="Rounded Rectangle 4"/>
           <p:cNvSpPr/>
           <p:nvPr/>
         </p:nvSpPr>
         <p:spPr>
           <a:xfrm>
-            <a:off x="502920" y="1024128"/>
-            <a:ext cx="822960" cy="54864"/>
-          </a:xfrm>
-          <a:prstGeom prst="rect">
-            <a:avLst/>
+            <a:off x="2011680" y="2514600"/>
+            <a:ext cx="8138160" cy="777240"/>
+          </a:xfrm>
+          <a:prstGeom prst="roundRect">
+            <a:avLst>
+              <a:gd name="adj" fmla="val 6588"/>
+            </a:avLst>
           </a:prstGeom>
           <a:solidFill>
-            <a:srgbClr val="00D4AA"/>
+            <a:srgbClr val="1A2742"/>
           </a:solidFill>
           <a:ln>
             <a:noFill/>
@@ -6566,95 +6853,292 @@
       </p:sp>
       <p:sp>
         <p:nvSpPr>
-          <p:cNvPr id="5" name="TextBox 4"/>
-          <p:cNvSpPr txBox="1"/>
-          <p:nvPr/>
-        </p:nvSpPr>
-        <p:spPr>
-          <a:xfrm>
-            <a:off x="640080" y="1417320"/>
-            <a:ext cx="10881360" cy="4892040"/>
-          </a:xfrm>
-          <a:prstGeom prst="rect">
-            <a:avLst/>
-          </a:prstGeom>
-          <a:noFill/>
-        </p:spPr>
-        <p:txBody>
-          <a:bodyPr wrap="square" lIns="45720" rIns="45720" tIns="27432" bIns="27432" anchor="t">
-            <a:spAutoFit/>
-          </a:bodyPr>
-          <a:lstStyle/>
-          <a:p>
-            <a:pPr marL="292608" indent="-292608">
-              <a:lnSpc>
-                <a:spcPct val="120000"/>
-              </a:lnSpc>
-              <a:spcAft>
-                <a:spcPts val="1260"/>
-              </a:spcAft>
-              <a:buClr>
-                <a:srgbClr val="00D4AA"/>
-              </a:buClr>
-              <a:buFont typeface="Inter"/>
-              <a:buChar char="•"/>
-            </a:pPr>
-            <a:r>
-              <a:rPr sz="1800" b="0">
+          <p:cNvPr id="6" name="TextBox 5"/>
+          <p:cNvSpPr txBox="1"/>
+          <p:nvPr/>
+        </p:nvSpPr>
+        <p:spPr>
+          <a:xfrm>
+            <a:off x="2194560" y="2514600"/>
+            <a:ext cx="548640" cy="777240"/>
+          </a:xfrm>
+          <a:prstGeom prst="rect">
+            <a:avLst/>
+          </a:prstGeom>
+          <a:noFill/>
+        </p:spPr>
+        <p:txBody>
+          <a:bodyPr wrap="square" lIns="45720" rIns="45720" tIns="27432" bIns="27432" anchor="ctr">
+            <a:spAutoFit/>
+          </a:bodyPr>
+          <a:lstStyle/>
+          <a:p>
+            <a:r>
+              <a:rPr sz="2200" b="1">
+                <a:solidFill>
+                  <a:srgbClr val="00D4AA"/>
+                </a:solidFill>
+                <a:latin typeface="Inter"/>
+              </a:rPr>
+              <a:t>✓</a:t>
+            </a:r>
+          </a:p>
+        </p:txBody>
+      </p:sp>
+      <p:sp>
+        <p:nvSpPr>
+          <p:cNvPr id="7" name="TextBox 6"/>
+          <p:cNvSpPr txBox="1"/>
+          <p:nvPr/>
+        </p:nvSpPr>
+        <p:spPr>
+          <a:xfrm>
+            <a:off x="2788920" y="2514600"/>
+            <a:ext cx="7223760" cy="777240"/>
+          </a:xfrm>
+          <a:prstGeom prst="rect">
+            <a:avLst/>
+          </a:prstGeom>
+          <a:noFill/>
+        </p:spPr>
+        <p:txBody>
+          <a:bodyPr wrap="square" lIns="45720" rIns="45720" tIns="27432" bIns="27432" anchor="ctr">
+            <a:spAutoFit/>
+          </a:bodyPr>
+          <a:lstStyle/>
+          <a:p>
+            <a:r>
+              <a:rPr sz="1800" b="1">
                 <a:solidFill>
                   <a:srgbClr val="FFFFFF"/>
                 </a:solidFill>
                 <a:latin typeface="Inter"/>
               </a:rPr>
-              <a:t>Sampling policy written down: head rate in the SDK, tail rules in the Collector</a:t>
-            </a:r>
-          </a:p>
-          <a:p>
-            <a:pPr marL="292608" indent="-292608">
-              <a:lnSpc>
-                <a:spcPct val="120000"/>
-              </a:lnSpc>
-              <a:spcAft>
-                <a:spcPts val="1260"/>
-              </a:spcAft>
-              <a:buClr>
-                <a:srgbClr val="00D4AA"/>
-              </a:buClr>
-              <a:buFont typeface="Inter"/>
-              <a:buChar char="•"/>
-            </a:pPr>
-            <a:r>
-              <a:rPr sz="1800" b="0">
+              <a:t>Replay a fixed day, assert five budgets</a:t>
+            </a:r>
+          </a:p>
+        </p:txBody>
+      </p:sp>
+      <p:sp>
+        <p:nvSpPr>
+          <p:cNvPr id="8" name="Rounded Rectangle 7"/>
+          <p:cNvSpPr/>
+          <p:nvPr/>
+        </p:nvSpPr>
+        <p:spPr>
+          <a:xfrm>
+            <a:off x="2011680" y="3474720"/>
+            <a:ext cx="8138160" cy="777240"/>
+          </a:xfrm>
+          <a:prstGeom prst="roundRect">
+            <a:avLst>
+              <a:gd name="adj" fmla="val 6588"/>
+            </a:avLst>
+          </a:prstGeom>
+          <a:solidFill>
+            <a:srgbClr val="1A2742"/>
+          </a:solidFill>
+          <a:ln>
+            <a:noFill/>
+          </a:ln>
+          <a:effectLst/>
+        </p:spPr>
+        <p:style>
+          <a:lnRef idx="1">
+            <a:schemeClr val="accent1"/>
+          </a:lnRef>
+          <a:fillRef idx="3">
+            <a:schemeClr val="accent1"/>
+          </a:fillRef>
+          <a:effectRef idx="2">
+            <a:schemeClr val="accent1"/>
+          </a:effectRef>
+          <a:fontRef idx="minor">
+            <a:schemeClr val="lt1"/>
+          </a:fontRef>
+        </p:style>
+        <p:txBody>
+          <a:bodyPr rtlCol="0" anchor="ctr"/>
+          <a:lstStyle/>
+          <a:p/>
+        </p:txBody>
+      </p:sp>
+      <p:sp>
+        <p:nvSpPr>
+          <p:cNvPr id="9" name="TextBox 8"/>
+          <p:cNvSpPr txBox="1"/>
+          <p:nvPr/>
+        </p:nvSpPr>
+        <p:spPr>
+          <a:xfrm>
+            <a:off x="2194560" y="3474720"/>
+            <a:ext cx="548640" cy="777240"/>
+          </a:xfrm>
+          <a:prstGeom prst="rect">
+            <a:avLst/>
+          </a:prstGeom>
+          <a:noFill/>
+        </p:spPr>
+        <p:txBody>
+          <a:bodyPr wrap="square" lIns="45720" rIns="45720" tIns="27432" bIns="27432" anchor="ctr">
+            <a:spAutoFit/>
+          </a:bodyPr>
+          <a:lstStyle/>
+          <a:p>
+            <a:r>
+              <a:rPr sz="2200" b="1">
+                <a:solidFill>
+                  <a:srgbClr val="00D4AA"/>
+                </a:solidFill>
+                <a:latin typeface="Inter"/>
+              </a:rPr>
+              <a:t>✓</a:t>
+            </a:r>
+          </a:p>
+        </p:txBody>
+      </p:sp>
+      <p:sp>
+        <p:nvSpPr>
+          <p:cNvPr id="10" name="TextBox 9"/>
+          <p:cNvSpPr txBox="1"/>
+          <p:nvPr/>
+        </p:nvSpPr>
+        <p:spPr>
+          <a:xfrm>
+            <a:off x="2788920" y="3474720"/>
+            <a:ext cx="7223760" cy="777240"/>
+          </a:xfrm>
+          <a:prstGeom prst="rect">
+            <a:avLst/>
+          </a:prstGeom>
+          <a:noFill/>
+        </p:spPr>
+        <p:txBody>
+          <a:bodyPr wrap="square" lIns="45720" rIns="45720" tIns="27432" bIns="27432" anchor="ctr">
+            <a:spAutoFit/>
+          </a:bodyPr>
+          <a:lstStyle/>
+          <a:p>
+            <a:r>
+              <a:rPr sz="1800" b="1">
                 <a:solidFill>
                   <a:srgbClr val="FFFFFF"/>
                 </a:solidFill>
                 <a:latin typeface="Inter"/>
               </a:rPr>
-              <a:t>Volume estimated: spans per day × bytes per span; storage and cost projected for 90 days</a:t>
-            </a:r>
-          </a:p>
-          <a:p>
-            <a:pPr marL="292608" indent="-292608">
-              <a:lnSpc>
-                <a:spcPct val="120000"/>
-              </a:lnSpc>
-              <a:spcAft>
-                <a:spcPts val="1260"/>
-              </a:spcAft>
-              <a:buClr>
-                <a:srgbClr val="00D4AA"/>
-              </a:buClr>
-              <a:buFont typeface="Inter"/>
-              <a:buChar char="•"/>
-            </a:pPr>
-            <a:r>
-              <a:rPr sz="1800" b="0">
+              <a:t>Red with a number and a trace id</a:t>
+            </a:r>
+          </a:p>
+        </p:txBody>
+      </p:sp>
+      <p:sp>
+        <p:nvSpPr>
+          <p:cNvPr id="11" name="Rounded Rectangle 10"/>
+          <p:cNvSpPr/>
+          <p:nvPr/>
+        </p:nvSpPr>
+        <p:spPr>
+          <a:xfrm>
+            <a:off x="2011680" y="4434840"/>
+            <a:ext cx="8138160" cy="777240"/>
+          </a:xfrm>
+          <a:prstGeom prst="roundRect">
+            <a:avLst>
+              <a:gd name="adj" fmla="val 6588"/>
+            </a:avLst>
+          </a:prstGeom>
+          <a:solidFill>
+            <a:srgbClr val="1A2742"/>
+          </a:solidFill>
+          <a:ln>
+            <a:noFill/>
+          </a:ln>
+          <a:effectLst/>
+        </p:spPr>
+        <p:style>
+          <a:lnRef idx="1">
+            <a:schemeClr val="accent1"/>
+          </a:lnRef>
+          <a:fillRef idx="3">
+            <a:schemeClr val="accent1"/>
+          </a:fillRef>
+          <a:effectRef idx="2">
+            <a:schemeClr val="accent1"/>
+          </a:effectRef>
+          <a:fontRef idx="minor">
+            <a:schemeClr val="lt1"/>
+          </a:fontRef>
+        </p:style>
+        <p:txBody>
+          <a:bodyPr rtlCol="0" anchor="ctr"/>
+          <a:lstStyle/>
+          <a:p/>
+        </p:txBody>
+      </p:sp>
+      <p:sp>
+        <p:nvSpPr>
+          <p:cNvPr id="12" name="TextBox 11"/>
+          <p:cNvSpPr txBox="1"/>
+          <p:nvPr/>
+        </p:nvSpPr>
+        <p:spPr>
+          <a:xfrm>
+            <a:off x="2194560" y="4434840"/>
+            <a:ext cx="548640" cy="777240"/>
+          </a:xfrm>
+          <a:prstGeom prst="rect">
+            <a:avLst/>
+          </a:prstGeom>
+          <a:noFill/>
+        </p:spPr>
+        <p:txBody>
+          <a:bodyPr wrap="square" lIns="45720" rIns="45720" tIns="27432" bIns="27432" anchor="ctr">
+            <a:spAutoFit/>
+          </a:bodyPr>
+          <a:lstStyle/>
+          <a:p>
+            <a:r>
+              <a:rPr sz="2200" b="1">
+                <a:solidFill>
+                  <a:srgbClr val="00D4AA"/>
+                </a:solidFill>
+                <a:latin typeface="Inter"/>
+              </a:rPr>
+              <a:t>✓</a:t>
+            </a:r>
+          </a:p>
+        </p:txBody>
+      </p:sp>
+      <p:sp>
+        <p:nvSpPr>
+          <p:cNvPr id="13" name="TextBox 12"/>
+          <p:cNvSpPr txBox="1"/>
+          <p:nvPr/>
+        </p:nvSpPr>
+        <p:spPr>
+          <a:xfrm>
+            <a:off x="2788920" y="4434840"/>
+            <a:ext cx="7223760" cy="777240"/>
+          </a:xfrm>
+          <a:prstGeom prst="rect">
+            <a:avLst/>
+          </a:prstGeom>
+          <a:noFill/>
+        </p:spPr>
+        <p:txBody>
+          <a:bodyPr wrap="square" lIns="45720" rIns="45720" tIns="27432" bIns="27432" anchor="ctr">
+            <a:spAutoFit/>
+          </a:bodyPr>
+          <a:lstStyle/>
+          <a:p>
+            <a:r>
+              <a:rPr sz="1800" b="1">
                 <a:solidFill>
                   <a:srgbClr val="FFFFFF"/>
                 </a:solidFill>
                 <a:latin typeface="Inter"/>
               </a:rPr>
-              <a:t>Retention set per environment (Lecture 10.3); ClickHouse disk alarmed</a:t>
+              <a:t>Release tag on every trace</a:t>
             </a:r>
           </a:p>
         </p:txBody>
@@ -6714,7 +7198,7 @@
                 </a:solidFill>
                 <a:latin typeface="Inter"/>
               </a:rPr>
-              <a:t>AI Agent Observability &amp; Cost Control · Section 13 · Lecture 13.4</a:t>
+              <a:t>AI Agent Observability &amp; Cost Control · Section 13 · Lecture 13.3</a:t>
             </a:r>
           </a:p>
         </p:txBody>
@@ -6727,8 +7211,42 @@
         </p:nvSpPr>
         <p:spPr>
           <a:xfrm>
-            <a:off x="457200" y="411480"/>
-            <a:ext cx="11247120" cy="868680"/>
+            <a:off x="2377440" y="2286000"/>
+            <a:ext cx="1097280" cy="1097280"/>
+          </a:xfrm>
+          <a:prstGeom prst="rect">
+            <a:avLst/>
+          </a:prstGeom>
+          <a:noFill/>
+        </p:spPr>
+        <p:txBody>
+          <a:bodyPr wrap="square" lIns="45720" rIns="45720" tIns="27432" bIns="27432" anchor="ctr">
+            <a:spAutoFit/>
+          </a:bodyPr>
+          <a:lstStyle/>
+          <a:p>
+            <a:r>
+              <a:rPr sz="5400" b="1">
+                <a:solidFill>
+                  <a:srgbClr val="00D4AA"/>
+                </a:solidFill>
+                <a:latin typeface="Inter"/>
+              </a:rPr>
+              <a:t>→</a:t>
+            </a:r>
+          </a:p>
+        </p:txBody>
+      </p:sp>
+      <p:sp>
+        <p:nvSpPr>
+          <p:cNvPr id="4" name="TextBox 3"/>
+          <p:cNvSpPr txBox="1"/>
+          <p:nvPr/>
+        </p:nvSpPr>
+        <p:spPr>
+          <a:xfrm>
+            <a:off x="3566160" y="2148840"/>
+            <a:ext cx="7315200" cy="457200"/>
           </a:xfrm>
           <a:prstGeom prst="rect">
             <a:avLst/>
@@ -6741,11 +7259,40 @@
           </a:bodyPr>
           <a:lstStyle/>
           <a:p>
-            <a:pPr>
-              <a:lnSpc>
-                <a:spcPct val="110000"/>
-              </a:lnSpc>
-            </a:pPr>
+            <a:r>
+              <a:rPr sz="1400" b="0">
+                <a:solidFill>
+                  <a:srgbClr val="94A3B8"/>
+                </a:solidFill>
+                <a:latin typeface="Inter"/>
+              </a:rPr>
+              <a:t>Next up:</a:t>
+            </a:r>
+          </a:p>
+        </p:txBody>
+      </p:sp>
+      <p:sp>
+        <p:nvSpPr>
+          <p:cNvPr id="5" name="TextBox 4"/>
+          <p:cNvSpPr txBox="1"/>
+          <p:nvPr/>
+        </p:nvSpPr>
+        <p:spPr>
+          <a:xfrm>
+            <a:off x="3566160" y="2560320"/>
+            <a:ext cx="7315200" cy="1097280"/>
+          </a:xfrm>
+          <a:prstGeom prst="rect">
+            <a:avLst/>
+          </a:prstGeom>
+          <a:noFill/>
+        </p:spPr>
+        <p:txBody>
+          <a:bodyPr wrap="square" lIns="45720" rIns="45720" tIns="27432" bIns="27432" anchor="t">
+            <a:spAutoFit/>
+          </a:bodyPr>
+          <a:lstStyle/>
+          <a:p>
             <a:r>
               <a:rPr sz="2600" b="1">
                 <a:solidFill>
@@ -6753,63 +7300,21 @@
                 </a:solidFill>
                 <a:latin typeface="Inter"/>
               </a:rPr>
-              <a:t>Never block a request</a:t>
-            </a:r>
-          </a:p>
-        </p:txBody>
-      </p:sp>
-      <p:sp>
-        <p:nvSpPr>
-          <p:cNvPr id="4" name="Rectangle 3"/>
-          <p:cNvSpPr/>
-          <p:nvPr/>
-        </p:nvSpPr>
-        <p:spPr>
-          <a:xfrm>
-            <a:off x="502920" y="1024128"/>
-            <a:ext cx="822960" cy="54864"/>
-          </a:xfrm>
-          <a:prstGeom prst="rect">
-            <a:avLst/>
-          </a:prstGeom>
-          <a:solidFill>
-            <a:srgbClr val="00D4AA"/>
-          </a:solidFill>
-          <a:ln>
-            <a:noFill/>
-          </a:ln>
-          <a:effectLst/>
-        </p:spPr>
-        <p:style>
-          <a:lnRef idx="1">
-            <a:schemeClr val="accent1"/>
-          </a:lnRef>
-          <a:fillRef idx="3">
-            <a:schemeClr val="accent1"/>
-          </a:fillRef>
-          <a:effectRef idx="2">
-            <a:schemeClr val="accent1"/>
-          </a:effectRef>
-          <a:fontRef idx="minor">
-            <a:schemeClr val="lt1"/>
-          </a:fontRef>
-        </p:style>
-        <p:txBody>
-          <a:bodyPr rtlCol="0" anchor="ctr"/>
-          <a:lstStyle/>
-          <a:p/>
-        </p:txBody>
-      </p:sp>
-      <p:sp>
-        <p:nvSpPr>
-          <p:cNvPr id="5" name="TextBox 4"/>
-          <p:cNvSpPr txBox="1"/>
-          <p:nvPr/>
-        </p:nvSpPr>
-        <p:spPr>
-          <a:xfrm>
-            <a:off x="457200" y="1325880"/>
-            <a:ext cx="4023360" cy="4983480"/>
+              <a:t>Production readiness checklist for observability</a:t>
+            </a:r>
+          </a:p>
+        </p:txBody>
+      </p:sp>
+      <p:sp>
+        <p:nvSpPr>
+          <p:cNvPr id="6" name="TextBox 5"/>
+          <p:cNvSpPr txBox="1"/>
+          <p:nvPr/>
+        </p:nvSpPr>
+        <p:spPr>
+          <a:xfrm>
+            <a:off x="3566160" y="3703320"/>
+            <a:ext cx="7315200" cy="1097280"/>
           </a:xfrm>
           <a:prstGeom prst="rect">
             <a:avLst/>
@@ -6822,286 +7327,14 @@
           </a:bodyPr>
           <a:lstStyle/>
           <a:p>
-            <a:pPr marL="292608" indent="-292608">
-              <a:lnSpc>
-                <a:spcPct val="120000"/>
-              </a:lnSpc>
-              <a:spcAft>
-                <a:spcPts val="1120"/>
-              </a:spcAft>
-              <a:buClr>
-                <a:srgbClr val="00D4AA"/>
-              </a:buClr>
-              <a:buFont typeface="Inter"/>
-              <a:buChar char="•"/>
-            </a:pPr>
-            <a:r>
-              <a:rPr sz="1600" b="0">
-                <a:solidFill>
-                  <a:srgbClr val="FFFFFF"/>
-                </a:solidFill>
-                <a:latin typeface="Inter"/>
-              </a:rPr>
-              <a:t>Exporter back-pressure: bounded queue, drop on overflow, export timeout ≤ 5 s</a:t>
-            </a:r>
-          </a:p>
-          <a:p>
-            <a:pPr marL="292608" indent="-292608">
-              <a:lnSpc>
-                <a:spcPct val="120000"/>
-              </a:lnSpc>
-              <a:spcAft>
-                <a:spcPts val="1120"/>
-              </a:spcAft>
-              <a:buClr>
-                <a:srgbClr val="00D4AA"/>
-              </a:buClr>
-              <a:buFont typeface="Inter"/>
-              <a:buChar char="•"/>
-            </a:pPr>
-            <a:r>
-              <a:rPr sz="1600" b="0">
-                <a:solidFill>
-                  <a:srgbClr val="FFFFFF"/>
-                </a:solidFill>
-                <a:latin typeface="Inter"/>
-              </a:rPr>
-              <a:t>Telemetry failure is a warning log and a metric, never an exception in the request path</a:t>
-            </a:r>
-          </a:p>
-          <a:p>
-            <a:pPr marL="292608" indent="-292608">
-              <a:lnSpc>
-                <a:spcPct val="120000"/>
-              </a:lnSpc>
-              <a:spcAft>
-                <a:spcPts val="1120"/>
-              </a:spcAft>
-              <a:buClr>
-                <a:srgbClr val="00D4AA"/>
-              </a:buClr>
-              <a:buFont typeface="Inter"/>
-              <a:buChar char="•"/>
-            </a:pPr>
-            <a:r>
-              <a:rPr sz="1600" b="0">
-                <a:solidFill>
-                  <a:srgbClr val="FFFFFF"/>
-                </a:solidFill>
-                <a:latin typeface="Inter"/>
-              </a:rPr>
-              <a:t>Flush on shutdown, with a deadline</a:t>
-            </a:r>
-          </a:p>
-        </p:txBody>
-      </p:sp>
-      <p:sp>
-        <p:nvSpPr>
-          <p:cNvPr id="6" name="Rounded Rectangle 5"/>
-          <p:cNvSpPr/>
-          <p:nvPr/>
-        </p:nvSpPr>
-        <p:spPr>
-          <a:xfrm>
-            <a:off x="4663440" y="1325880"/>
-            <a:ext cx="7086600" cy="4983480"/>
-          </a:xfrm>
-          <a:prstGeom prst="roundRect">
-            <a:avLst>
-              <a:gd name="adj" fmla="val 1027"/>
-            </a:avLst>
-          </a:prstGeom>
-          <a:solidFill>
-            <a:srgbClr val="0F1E35"/>
-          </a:solidFill>
-          <a:ln w="19050">
-            <a:solidFill>
-              <a:srgbClr val="1A2742"/>
-            </a:solidFill>
-          </a:ln>
-          <a:effectLst/>
-        </p:spPr>
-        <p:style>
-          <a:lnRef idx="1">
-            <a:schemeClr val="accent1"/>
-          </a:lnRef>
-          <a:fillRef idx="3">
-            <a:schemeClr val="accent1"/>
-          </a:fillRef>
-          <a:effectRef idx="2">
-            <a:schemeClr val="accent1"/>
-          </a:effectRef>
-          <a:fontRef idx="minor">
-            <a:schemeClr val="lt1"/>
-          </a:fontRef>
-        </p:style>
-        <p:txBody>
-          <a:bodyPr rtlCol="0" anchor="ctr"/>
-          <a:lstStyle/>
-          <a:p/>
-        </p:txBody>
-      </p:sp>
-      <p:sp>
-        <p:nvSpPr>
-          <p:cNvPr id="7" name="Rectangle 6"/>
-          <p:cNvSpPr/>
-          <p:nvPr/>
-        </p:nvSpPr>
-        <p:spPr>
-          <a:xfrm>
-            <a:off x="4663440" y="1325880"/>
-            <a:ext cx="54864" cy="4983480"/>
-          </a:xfrm>
-          <a:prstGeom prst="rect">
-            <a:avLst/>
-          </a:prstGeom>
-          <a:solidFill>
-            <a:srgbClr val="00D4AA"/>
-          </a:solidFill>
-          <a:ln>
-            <a:noFill/>
-          </a:ln>
-          <a:effectLst/>
-        </p:spPr>
-        <p:style>
-          <a:lnRef idx="1">
-            <a:schemeClr val="accent1"/>
-          </a:lnRef>
-          <a:fillRef idx="3">
-            <a:schemeClr val="accent1"/>
-          </a:fillRef>
-          <a:effectRef idx="2">
-            <a:schemeClr val="accent1"/>
-          </a:effectRef>
-          <a:fontRef idx="minor">
-            <a:schemeClr val="lt1"/>
-          </a:fontRef>
-        </p:style>
-        <p:txBody>
-          <a:bodyPr rtlCol="0" anchor="ctr"/>
-          <a:lstStyle/>
-          <a:p/>
-        </p:txBody>
-      </p:sp>
-      <p:sp>
-        <p:nvSpPr>
-          <p:cNvPr id="8" name="TextBox 7"/>
-          <p:cNvSpPr txBox="1"/>
-          <p:nvPr/>
-        </p:nvSpPr>
-        <p:spPr>
-          <a:xfrm>
-            <a:off x="4892040" y="1399032"/>
-            <a:ext cx="6720840" cy="320040"/>
-          </a:xfrm>
-          <a:prstGeom prst="rect">
-            <a:avLst/>
-          </a:prstGeom>
-          <a:noFill/>
-        </p:spPr>
-        <p:txBody>
-          <a:bodyPr wrap="square" lIns="45720" rIns="45720" tIns="27432" bIns="27432" anchor="t">
-            <a:spAutoFit/>
-          </a:bodyPr>
-          <a:lstStyle/>
-          <a:p>
-            <a:r>
-              <a:rPr sz="1000" b="0">
+            <a:r>
+              <a:rPr sz="1400" b="0">
                 <a:solidFill>
                   <a:srgbClr val="94A3B8"/>
                 </a:solidFill>
-                <a:latin typeface="JetBrains Mono"/>
-              </a:rPr>
-              <a:t>python</a:t>
-            </a:r>
-          </a:p>
-        </p:txBody>
-      </p:sp>
-      <p:sp>
-        <p:nvSpPr>
-          <p:cNvPr id="9" name="TextBox 8"/>
-          <p:cNvSpPr txBox="1"/>
-          <p:nvPr/>
-        </p:nvSpPr>
-        <p:spPr>
-          <a:xfrm>
-            <a:off x="4892040" y="1737360"/>
-            <a:ext cx="6720840" cy="4526280"/>
-          </a:xfrm>
-          <a:prstGeom prst="rect">
-            <a:avLst/>
-          </a:prstGeom>
-          <a:noFill/>
-        </p:spPr>
-        <p:txBody>
-          <a:bodyPr wrap="none" lIns="45720" rIns="45720" tIns="27432" bIns="27432" anchor="t">
-            <a:spAutoFit/>
-          </a:bodyPr>
-          <a:lstStyle/>
-          <a:p>
-            <a:r>
-              <a:rPr sz="1000">
-                <a:solidFill>
-                  <a:srgbClr val="94A3B8"/>
-                </a:solidFill>
-                <a:latin typeface="JetBrains Mono"/>
-              </a:rPr>
-              <a:t># telemetry/otel_setup.py, as shipped</a:t>
-            </a:r>
-          </a:p>
-          <a:p>
-            <a:r>
-              <a:rPr sz="1000">
-                <a:solidFill>
-                  <a:srgbClr val="FFFFFF"/>
-                </a:solidFill>
-                <a:latin typeface="JetBrains Mono"/>
-              </a:rPr>
-              <a:t>BatchSpanProcessor(SafeSpanExporter(exp, name=kind), max_queue_size=2048, max_export_batch_size=256,</a:t>
-            </a:r>
-          </a:p>
-          <a:p>
-            <a:r>
-              <a:rPr sz="1000">
-                <a:solidFill>
-                  <a:srgbClr val="FFFFFF"/>
-                </a:solidFill>
-                <a:latin typeface="JetBrains Mono"/>
-              </a:rPr>
-              <a:t>                   schedule_delay_millis=1000, export_timeout_millis=5000)</a:t>
-            </a:r>
-          </a:p>
-          <a:p>
-            <a:r>
-              <a:rPr sz="1000">
-                <a:solidFill>
-                  <a:srgbClr val="FFFFFF"/>
-                </a:solidFill>
-                <a:latin typeface="JetBrains Mono"/>
-              </a:rPr>
-              <a:t>OTLPSpanExporter(endpoint=settings.otel_endpoint, timeout=5)</a:t>
-            </a:r>
-          </a:p>
-          <a:p>
-            <a:r>
-              <a:rPr sz="1000">
-                <a:solidFill>
-                  <a:srgbClr val="FFFFFF"/>
-                </a:solidFill>
-                <a:latin typeface="JetBrains Mono"/>
-              </a:rPr>
-              <a:t>Langfuse(..., flush_at=50, flush_interval=2.0)          # telemetry/langfuse_setup.py</a:t>
-            </a:r>
-          </a:p>
-          <a:p>
-            <a:r>
-              <a:rPr sz="1000">
-                <a:solidFill>
-                  <a:srgbClr val="FFFFFF"/>
-                </a:solidFill>
-                <a:latin typeface="JetBrains Mono"/>
-              </a:rPr>
-              <a:t>shutdown_tracing(timeout_ms=5000)                        # on app exit</a:t>
+                <a:latin typeface="Inter"/>
+              </a:rPr>
+              <a:t>Next, the production readiness checklist: sampling, back-pressure, secrets, dashboards as code and alert ownership.</a:t>
             </a:r>
           </a:p>
         </p:txBody>
@@ -7174,8 +7407,77 @@
         </p:nvSpPr>
         <p:spPr>
           <a:xfrm>
-            <a:off x="457200" y="411480"/>
-            <a:ext cx="11247120" cy="868680"/>
+            <a:off x="6675120" y="320040"/>
+            <a:ext cx="5074920" cy="548640"/>
+          </a:xfrm>
+          <a:prstGeom prst="rect">
+            <a:avLst/>
+          </a:prstGeom>
+          <a:noFill/>
+        </p:spPr>
+        <p:txBody>
+          <a:bodyPr wrap="square" lIns="45720" rIns="45720" tIns="27432" bIns="27432" anchor="t">
+            <a:spAutoFit/>
+          </a:bodyPr>
+          <a:lstStyle/>
+          <a:p>
+            <a:pPr algn="r"/>
+            <a:r>
+              <a:rPr sz="1000" b="0">
+                <a:solidFill>
+                  <a:srgbClr val="94A3B8"/>
+                </a:solidFill>
+                <a:latin typeface="Inter"/>
+              </a:rPr>
+              <a:t>SECTION 13 · DEPLOYING THE STACK AND CI BUDGET GATES</a:t>
+            </a:r>
+          </a:p>
+        </p:txBody>
+      </p:sp>
+      <p:sp>
+        <p:nvSpPr>
+          <p:cNvPr id="4" name="TextBox 3"/>
+          <p:cNvSpPr txBox="1"/>
+          <p:nvPr/>
+        </p:nvSpPr>
+        <p:spPr>
+          <a:xfrm>
+            <a:off x="914400" y="1417320"/>
+            <a:ext cx="10332720" cy="457200"/>
+          </a:xfrm>
+          <a:prstGeom prst="rect">
+            <a:avLst/>
+          </a:prstGeom>
+          <a:noFill/>
+        </p:spPr>
+        <p:txBody>
+          <a:bodyPr wrap="square" lIns="45720" rIns="45720" tIns="27432" bIns="27432" anchor="t">
+            <a:spAutoFit/>
+          </a:bodyPr>
+          <a:lstStyle/>
+          <a:p>
+            <a:r>
+              <a:rPr sz="1200" b="1">
+                <a:solidFill>
+                  <a:srgbClr val="00D4AA"/>
+                </a:solidFill>
+                <a:latin typeface="Inter"/>
+              </a:rPr>
+              <a:t>LECTURE 13.4</a:t>
+            </a:r>
+          </a:p>
+        </p:txBody>
+      </p:sp>
+      <p:sp>
+        <p:nvSpPr>
+          <p:cNvPr id="5" name="TextBox 4"/>
+          <p:cNvSpPr txBox="1"/>
+          <p:nvPr/>
+        </p:nvSpPr>
+        <p:spPr>
+          <a:xfrm>
+            <a:off x="914400" y="1874519"/>
+            <a:ext cx="10332720" cy="1645920"/>
           </a:xfrm>
           <a:prstGeom prst="rect">
             <a:avLst/>
@@ -7194,27 +7496,27 @@
               </a:lnSpc>
             </a:pPr>
             <a:r>
-              <a:rPr sz="2600" b="1">
+              <a:rPr sz="3000" b="1">
                 <a:solidFill>
                   <a:srgbClr val="FFFFFF"/>
                 </a:solidFill>
                 <a:latin typeface="Inter"/>
               </a:rPr>
-              <a:t>Secrets and separation</a:t>
-            </a:r>
-          </a:p>
-        </p:txBody>
-      </p:sp>
-      <p:sp>
-        <p:nvSpPr>
-          <p:cNvPr id="4" name="Rectangle 3"/>
+              <a:t>Production readiness checklist for observability</a:t>
+            </a:r>
+          </a:p>
+        </p:txBody>
+      </p:sp>
+      <p:sp>
+        <p:nvSpPr>
+          <p:cNvPr id="6" name="Rectangle 5"/>
           <p:cNvSpPr/>
           <p:nvPr/>
         </p:nvSpPr>
         <p:spPr>
           <a:xfrm>
-            <a:off x="502920" y="1024128"/>
-            <a:ext cx="822960" cy="54864"/>
+            <a:off x="914400" y="3794760"/>
+            <a:ext cx="64008" cy="1143000"/>
           </a:xfrm>
           <a:prstGeom prst="rect">
             <a:avLst/>
@@ -7249,167 +7551,39 @@
       </p:sp>
       <p:sp>
         <p:nvSpPr>
-          <p:cNvPr id="5" name="TextBox 4"/>
-          <p:cNvSpPr txBox="1"/>
-          <p:nvPr/>
-        </p:nvSpPr>
-        <p:spPr>
-          <a:xfrm>
-            <a:off x="640080" y="1417320"/>
-            <a:ext cx="10881360" cy="4892040"/>
-          </a:xfrm>
-          <a:prstGeom prst="rect">
-            <a:avLst/>
-          </a:prstGeom>
-          <a:noFill/>
-        </p:spPr>
-        <p:txBody>
-          <a:bodyPr wrap="square" lIns="45720" rIns="45720" tIns="27432" bIns="27432" anchor="t">
-            <a:spAutoFit/>
-          </a:bodyPr>
-          <a:lstStyle/>
-          <a:p>
-            <a:pPr marL="292608" indent="-292608">
+          <p:cNvPr id="7" name="TextBox 6"/>
+          <p:cNvSpPr txBox="1"/>
+          <p:nvPr/>
+        </p:nvSpPr>
+        <p:spPr>
+          <a:xfrm>
+            <a:off x="1188720" y="3749039"/>
+            <a:ext cx="9692640" cy="1280160"/>
+          </a:xfrm>
+          <a:prstGeom prst="rect">
+            <a:avLst/>
+          </a:prstGeom>
+          <a:noFill/>
+        </p:spPr>
+        <p:txBody>
+          <a:bodyPr wrap="square" lIns="45720" rIns="45720" tIns="27432" bIns="27432" anchor="ctr">
+            <a:spAutoFit/>
+          </a:bodyPr>
+          <a:lstStyle/>
+          <a:p>
+            <a:pPr>
               <a:lnSpc>
-                <a:spcPct val="120000"/>
+                <a:spcPct val="130000"/>
               </a:lnSpc>
-              <a:spcAft>
-                <a:spcPts val="1260"/>
-              </a:spcAft>
-              <a:buClr>
-                <a:srgbClr val="00D4AA"/>
-              </a:buClr>
-              <a:buFont typeface="Inter"/>
-              <a:buChar char="•"/>
             </a:pPr>
             <a:r>
-              <a:rPr sz="1800" b="0">
-                <a:solidFill>
-                  <a:srgbClr val="FFFFFF"/>
-                </a:solidFill>
-                <a:latin typeface="Inter"/>
-              </a:rPr>
-              <a:t>No backend credentials in Atlas: the Collector holds them</a:t>
-            </a:r>
-          </a:p>
-          <a:p>
-            <a:pPr marL="292608" indent="-292608">
-              <a:lnSpc>
-                <a:spcPct val="120000"/>
-              </a:lnSpc>
-              <a:spcAft>
-                <a:spcPts val="1260"/>
-              </a:spcAft>
-              <a:buClr>
-                <a:srgbClr val="00D4AA"/>
-              </a:buClr>
-              <a:buFont typeface="Inter"/>
-              <a:buChar char="•"/>
-            </a:pPr>
-            <a:r>
-              <a:rPr sz="1800" b="0">
-                <a:solidFill>
-                  <a:srgbClr val="FFFFFF"/>
-                </a:solidFill>
-                <a:latin typeface="Inter"/>
-              </a:rPr>
-              <a:t>Project per environment: </a:t>
-            </a:r>
-            <a:r>
-              <a:rPr sz="1656" b="0">
-                <a:solidFill>
-                  <a:srgbClr val="00D4AA"/>
-                </a:solidFill>
-                <a:latin typeface="JetBrains Mono"/>
-              </a:rPr>
-              <a:t>atlas-dev</a:t>
-            </a:r>
-            <a:r>
-              <a:rPr sz="1800" b="0">
-                <a:solidFill>
-                  <a:srgbClr val="FFFFFF"/>
-                </a:solidFill>
-                <a:latin typeface="Inter"/>
-              </a:rPr>
-              <a:t>, </a:t>
-            </a:r>
-            <a:r>
-              <a:rPr sz="1656" b="0">
-                <a:solidFill>
-                  <a:srgbClr val="00D4AA"/>
-                </a:solidFill>
-                <a:latin typeface="JetBrains Mono"/>
-              </a:rPr>
-              <a:t>atlas-staging</a:t>
-            </a:r>
-            <a:r>
-              <a:rPr sz="1800" b="0">
-                <a:solidFill>
-                  <a:srgbClr val="FFFFFF"/>
-                </a:solidFill>
-                <a:latin typeface="Inter"/>
-              </a:rPr>
-              <a:t>, </a:t>
-            </a:r>
-            <a:r>
-              <a:rPr sz="1656" b="0">
-                <a:solidFill>
-                  <a:srgbClr val="00D4AA"/>
-                </a:solidFill>
-                <a:latin typeface="JetBrains Mono"/>
-              </a:rPr>
-              <a:t>atlas-prod</a:t>
-            </a:r>
-            <a:r>
-              <a:rPr sz="1800" b="0">
-                <a:solidFill>
-                  <a:srgbClr val="FFFFFF"/>
-                </a:solidFill>
-                <a:latin typeface="Inter"/>
-              </a:rPr>
-              <a:t>; keys scoped to each</a:t>
-            </a:r>
-          </a:p>
-          <a:p>
-            <a:pPr marL="292608" indent="-292608">
-              <a:lnSpc>
-                <a:spcPct val="120000"/>
-              </a:lnSpc>
-              <a:spcAft>
-                <a:spcPts val="1260"/>
-              </a:spcAft>
-              <a:buClr>
-                <a:srgbClr val="00D4AA"/>
-              </a:buClr>
-              <a:buFont typeface="Inter"/>
-              <a:buChar char="•"/>
-            </a:pPr>
-            <a:r>
-              <a:rPr sz="1800" b="0">
-                <a:solidFill>
-                  <a:srgbClr val="FFFFFF"/>
-                </a:solidFill>
-                <a:latin typeface="Inter"/>
-              </a:rPr>
-              <a:t>Masking tested: a unit test sends a fake email and employee ID through </a:t>
-            </a:r>
-            <a:r>
-              <a:rPr sz="1656" b="0">
-                <a:solidFill>
-                  <a:srgbClr val="00D4AA"/>
-                </a:solidFill>
-                <a:latin typeface="JetBrains Mono"/>
-              </a:rPr>
-              <a:t>pii.mask</a:t>
-            </a:r>
-            <a:r>
-              <a:rPr sz="1800" b="0">
-                <a:solidFill>
-                  <a:srgbClr val="FFFFFF"/>
-                </a:solidFill>
-                <a:latin typeface="Inter"/>
-              </a:rPr>
-              <a:t> and the Collector config</a:t>
+              <a:rPr sz="1600" b="0">
+                <a:solidFill>
+                  <a:srgbClr val="CBD5E1"/>
+                </a:solidFill>
+                <a:latin typeface="Inter"/>
+              </a:rPr>
+              <a:t>Walk the twelve-item production checklist and know what "done" means for each.</a:t>
             </a:r>
           </a:p>
         </p:txBody>
@@ -7508,7 +7682,7 @@
                 </a:solidFill>
                 <a:latin typeface="Inter"/>
               </a:rPr>
-              <a:t>Dashboards and alerts as code, with owners</a:t>
+              <a:t>Sampling and volume</a:t>
             </a:r>
           </a:p>
         </p:txBody>
@@ -7597,25 +7771,7 @@
                 </a:solidFill>
                 <a:latin typeface="Inter"/>
               </a:rPr>
-              <a:t>Dashboards in the repo: </a:t>
-            </a:r>
-            <a:r>
-              <a:rPr sz="1656" b="0">
-                <a:solidFill>
-                  <a:srgbClr val="00D4AA"/>
-                </a:solidFill>
-                <a:latin typeface="JetBrains Mono"/>
-              </a:rPr>
-              <a:t>deploy/grafana/dashboards/atlas-ops.json</a:t>
-            </a:r>
-            <a:r>
-              <a:rPr sz="1800" b="0">
-                <a:solidFill>
-                  <a:srgbClr val="FFFFFF"/>
-                </a:solidFill>
-                <a:latin typeface="Inter"/>
-              </a:rPr>
-              <a:t>, provisioned, not hand-built</a:t>
+              <a:t>Sampling policy written down: head rate in the SDK, tail rules in the Collector</a:t>
             </a:r>
           </a:p>
           <a:p>
@@ -7639,7 +7795,7 @@
                 </a:solidFill>
                 <a:latin typeface="Inter"/>
               </a:rPr>
-              <a:t>Alert rules in the repo, each with a runbook link (Lecture 9.5)</a:t>
+              <a:t>Volume estimated: spans per day × bytes per span; storage and cost projected for 90 days</a:t>
             </a:r>
           </a:p>
           <a:p>
@@ -7663,7 +7819,7 @@
                 </a:solidFill>
                 <a:latin typeface="Inter"/>
               </a:rPr>
-              <a:t>Every dashboard and every alert has a named owner; alerts without an owner are deleted</a:t>
+              <a:t>Retention set per environment (Lecture 10.3); ClickHouse disk alarmed</a:t>
             </a:r>
           </a:p>
         </p:txBody>
@@ -7762,7 +7918,7 @@
                 </a:solidFill>
                 <a:latin typeface="Inter"/>
               </a:rPr>
-              <a:t>What "done" looks like</a:t>
+              <a:t>Never block a request</a:t>
             </a:r>
           </a:p>
         </p:txBody>
@@ -7817,8 +7973,8 @@
         </p:nvSpPr>
         <p:spPr>
           <a:xfrm>
-            <a:off x="640080" y="1417320"/>
-            <a:ext cx="10881360" cy="4892040"/>
+            <a:off x="457200" y="1325880"/>
+            <a:ext cx="4023360" cy="4983480"/>
           </a:xfrm>
           <a:prstGeom prst="rect">
             <a:avLst/>
@@ -7836,7 +7992,7 @@
                 <a:spcPct val="120000"/>
               </a:lnSpc>
               <a:spcAft>
-                <a:spcPts val="1260"/>
+                <a:spcPts val="1120"/>
               </a:spcAft>
               <a:buClr>
                 <a:srgbClr val="00D4AA"/>
@@ -7845,31 +8001,13 @@
               <a:buChar char="•"/>
             </a:pPr>
             <a:r>
-              <a:rPr sz="1800" b="0">
+              <a:rPr sz="1600" b="0">
                 <a:solidFill>
                   <a:srgbClr val="FFFFFF"/>
                 </a:solidFill>
                 <a:latin typeface="Inter"/>
               </a:rPr>
-              <a:t>A one-page </a:t>
-            </a:r>
-            <a:r>
-              <a:rPr sz="1656" b="0">
-                <a:solidFill>
-                  <a:srgbClr val="00D4AA"/>
-                </a:solidFill>
-                <a:latin typeface="JetBrains Mono"/>
-              </a:rPr>
-              <a:t>OBSERVABILITY.md</a:t>
-            </a:r>
-            <a:r>
-              <a:rPr sz="1800" b="0">
-                <a:solidFill>
-                  <a:srgbClr val="FFFFFF"/>
-                </a:solidFill>
-                <a:latin typeface="Inter"/>
-              </a:rPr>
-              <a:t> in the repo: sampling policy, retention, projects, owners, how to run the stack</a:t>
+              <a:t>Exporter back-pressure: bounded queue, drop on overflow, export timeout ≤ 5 s</a:t>
             </a:r>
           </a:p>
           <a:p>
@@ -7878,7 +8016,7 @@
                 <a:spcPct val="120000"/>
               </a:lnSpc>
               <a:spcAft>
-                <a:spcPts val="1260"/>
+                <a:spcPts val="1120"/>
               </a:spcAft>
               <a:buClr>
                 <a:srgbClr val="00D4AA"/>
@@ -7887,13 +8025,13 @@
               <a:buChar char="•"/>
             </a:pPr>
             <a:r>
-              <a:rPr sz="1800" b="0">
+              <a:rPr sz="1600" b="0">
                 <a:solidFill>
                   <a:srgbClr val="FFFFFF"/>
                 </a:solidFill>
                 <a:latin typeface="Inter"/>
               </a:rPr>
-              <a:t>The chaos test from the next lecture passes: backend down, Atlas up</a:t>
+              <a:t>Telemetry failure is a warning log and a metric, never an exception in the request path</a:t>
             </a:r>
           </a:p>
           <a:p>
@@ -7902,7 +8040,7 @@
                 <a:spcPct val="120000"/>
               </a:lnSpc>
               <a:spcAft>
-                <a:spcPts val="1260"/>
+                <a:spcPts val="1120"/>
               </a:spcAft>
               <a:buClr>
                 <a:srgbClr val="00D4AA"/>
@@ -7911,37 +8049,224 @@
               <a:buChar char="•"/>
             </a:pPr>
             <a:r>
-              <a:rPr sz="1800" b="0">
+              <a:rPr sz="1600" b="0">
                 <a:solidFill>
                   <a:srgbClr val="FFFFFF"/>
                 </a:solidFill>
                 <a:latin typeface="Inter"/>
               </a:rPr>
-              <a:t>The budget gate is green and required for merge</a:t>
-            </a:r>
-          </a:p>
-          <a:p>
-            <a:pPr marL="292608" indent="-292608">
-              <a:lnSpc>
-                <a:spcPct val="120000"/>
-              </a:lnSpc>
-              <a:spcAft>
-                <a:spcPts val="1260"/>
-              </a:spcAft>
-              <a:buClr>
-                <a:srgbClr val="00D4AA"/>
-              </a:buClr>
-              <a:buFont typeface="Inter"/>
-              <a:buChar char="•"/>
-            </a:pPr>
-            <a:r>
-              <a:rPr sz="1800" b="0">
+              <a:t>Flush on shutdown, with a deadline</a:t>
+            </a:r>
+          </a:p>
+        </p:txBody>
+      </p:sp>
+      <p:sp>
+        <p:nvSpPr>
+          <p:cNvPr id="6" name="Rounded Rectangle 5"/>
+          <p:cNvSpPr/>
+          <p:nvPr/>
+        </p:nvSpPr>
+        <p:spPr>
+          <a:xfrm>
+            <a:off x="4663440" y="1325880"/>
+            <a:ext cx="7086600" cy="4983480"/>
+          </a:xfrm>
+          <a:prstGeom prst="roundRect">
+            <a:avLst>
+              <a:gd name="adj" fmla="val 1027"/>
+            </a:avLst>
+          </a:prstGeom>
+          <a:solidFill>
+            <a:srgbClr val="0F1E35"/>
+          </a:solidFill>
+          <a:ln w="19050">
+            <a:solidFill>
+              <a:srgbClr val="1A2742"/>
+            </a:solidFill>
+          </a:ln>
+          <a:effectLst/>
+        </p:spPr>
+        <p:style>
+          <a:lnRef idx="1">
+            <a:schemeClr val="accent1"/>
+          </a:lnRef>
+          <a:fillRef idx="3">
+            <a:schemeClr val="accent1"/>
+          </a:fillRef>
+          <a:effectRef idx="2">
+            <a:schemeClr val="accent1"/>
+          </a:effectRef>
+          <a:fontRef idx="minor">
+            <a:schemeClr val="lt1"/>
+          </a:fontRef>
+        </p:style>
+        <p:txBody>
+          <a:bodyPr rtlCol="0" anchor="ctr"/>
+          <a:lstStyle/>
+          <a:p/>
+        </p:txBody>
+      </p:sp>
+      <p:sp>
+        <p:nvSpPr>
+          <p:cNvPr id="7" name="Rectangle 6"/>
+          <p:cNvSpPr/>
+          <p:nvPr/>
+        </p:nvSpPr>
+        <p:spPr>
+          <a:xfrm>
+            <a:off x="4663440" y="1325880"/>
+            <a:ext cx="54864" cy="4983480"/>
+          </a:xfrm>
+          <a:prstGeom prst="rect">
+            <a:avLst/>
+          </a:prstGeom>
+          <a:solidFill>
+            <a:srgbClr val="00D4AA"/>
+          </a:solidFill>
+          <a:ln>
+            <a:noFill/>
+          </a:ln>
+          <a:effectLst/>
+        </p:spPr>
+        <p:style>
+          <a:lnRef idx="1">
+            <a:schemeClr val="accent1"/>
+          </a:lnRef>
+          <a:fillRef idx="3">
+            <a:schemeClr val="accent1"/>
+          </a:fillRef>
+          <a:effectRef idx="2">
+            <a:schemeClr val="accent1"/>
+          </a:effectRef>
+          <a:fontRef idx="minor">
+            <a:schemeClr val="lt1"/>
+          </a:fontRef>
+        </p:style>
+        <p:txBody>
+          <a:bodyPr rtlCol="0" anchor="ctr"/>
+          <a:lstStyle/>
+          <a:p/>
+        </p:txBody>
+      </p:sp>
+      <p:sp>
+        <p:nvSpPr>
+          <p:cNvPr id="8" name="TextBox 7"/>
+          <p:cNvSpPr txBox="1"/>
+          <p:nvPr/>
+        </p:nvSpPr>
+        <p:spPr>
+          <a:xfrm>
+            <a:off x="4892040" y="1399032"/>
+            <a:ext cx="6720840" cy="320040"/>
+          </a:xfrm>
+          <a:prstGeom prst="rect">
+            <a:avLst/>
+          </a:prstGeom>
+          <a:noFill/>
+        </p:spPr>
+        <p:txBody>
+          <a:bodyPr wrap="square" lIns="45720" rIns="45720" tIns="27432" bIns="27432" anchor="t">
+            <a:spAutoFit/>
+          </a:bodyPr>
+          <a:lstStyle/>
+          <a:p>
+            <a:r>
+              <a:rPr sz="1000" b="0">
+                <a:solidFill>
+                  <a:srgbClr val="94A3B8"/>
+                </a:solidFill>
+                <a:latin typeface="JetBrains Mono"/>
+              </a:rPr>
+              <a:t>python</a:t>
+            </a:r>
+          </a:p>
+        </p:txBody>
+      </p:sp>
+      <p:sp>
+        <p:nvSpPr>
+          <p:cNvPr id="9" name="TextBox 8"/>
+          <p:cNvSpPr txBox="1"/>
+          <p:nvPr/>
+        </p:nvSpPr>
+        <p:spPr>
+          <a:xfrm>
+            <a:off x="4892040" y="1737360"/>
+            <a:ext cx="6720840" cy="4526280"/>
+          </a:xfrm>
+          <a:prstGeom prst="rect">
+            <a:avLst/>
+          </a:prstGeom>
+          <a:noFill/>
+        </p:spPr>
+        <p:txBody>
+          <a:bodyPr wrap="none" lIns="45720" rIns="45720" tIns="27432" bIns="27432" anchor="t">
+            <a:spAutoFit/>
+          </a:bodyPr>
+          <a:lstStyle/>
+          <a:p>
+            <a:r>
+              <a:rPr sz="1000">
+                <a:solidFill>
+                  <a:srgbClr val="94A3B8"/>
+                </a:solidFill>
+                <a:latin typeface="JetBrains Mono"/>
+              </a:rPr>
+              <a:t># telemetry/otel_setup.py, as shipped</a:t>
+            </a:r>
+          </a:p>
+          <a:p>
+            <a:r>
+              <a:rPr sz="1000">
                 <a:solidFill>
                   <a:srgbClr val="FFFFFF"/>
                 </a:solidFill>
-                <a:latin typeface="Inter"/>
-              </a:rPr>
-              <a:t>A new engineer can find "why was this session expensive" in under ten minutes using only the README</a:t>
+                <a:latin typeface="JetBrains Mono"/>
+              </a:rPr>
+              <a:t>BatchSpanProcessor(SafeSpanExporter(exp, name=kind), max_queue_size=2048, max_export_batch_size=256,</a:t>
+            </a:r>
+          </a:p>
+          <a:p>
+            <a:r>
+              <a:rPr sz="1000">
+                <a:solidFill>
+                  <a:srgbClr val="FFFFFF"/>
+                </a:solidFill>
+                <a:latin typeface="JetBrains Mono"/>
+              </a:rPr>
+              <a:t>                   schedule_delay_millis=1000, export_timeout_millis=5000)</a:t>
+            </a:r>
+          </a:p>
+          <a:p>
+            <a:r>
+              <a:rPr sz="1000">
+                <a:solidFill>
+                  <a:srgbClr val="FFFFFF"/>
+                </a:solidFill>
+                <a:latin typeface="JetBrains Mono"/>
+              </a:rPr>
+              <a:t>OTLPSpanExporter(endpoint=settings.otel_endpoint, timeout=5)</a:t>
+            </a:r>
+          </a:p>
+          <a:p>
+            <a:r>
+              <a:rPr sz="1000">
+                <a:solidFill>
+                  <a:srgbClr val="FFFFFF"/>
+                </a:solidFill>
+                <a:latin typeface="JetBrains Mono"/>
+              </a:rPr>
+              <a:t>Langfuse(..., flush_at=50, flush_interval=2.0)          # telemetry/langfuse_setup.py</a:t>
+            </a:r>
+          </a:p>
+          <a:p>
+            <a:r>
+              <a:rPr sz="1000">
+                <a:solidFill>
+                  <a:srgbClr val="FFFFFF"/>
+                </a:solidFill>
+                <a:latin typeface="JetBrains Mono"/>
+              </a:rPr>
+              <a:t>shutdown_tracing(timeout_ms=5000)                        # on app exit</a:t>
             </a:r>
           </a:p>
         </p:txBody>
@@ -8014,130 +8339,260 @@
         </p:nvSpPr>
         <p:spPr>
           <a:xfrm>
-            <a:off x="2377440" y="2286000"/>
-            <a:ext cx="1097280" cy="1097280"/>
-          </a:xfrm>
-          <a:prstGeom prst="rect">
-            <a:avLst/>
-          </a:prstGeom>
-          <a:noFill/>
-        </p:spPr>
-        <p:txBody>
-          <a:bodyPr wrap="square" lIns="45720" rIns="45720" tIns="27432" bIns="27432" anchor="ctr">
-            <a:spAutoFit/>
-          </a:bodyPr>
-          <a:lstStyle/>
-          <a:p>
-            <a:r>
-              <a:rPr sz="5400" b="1">
+            <a:off x="457200" y="411480"/>
+            <a:ext cx="11247120" cy="868680"/>
+          </a:xfrm>
+          <a:prstGeom prst="rect">
+            <a:avLst/>
+          </a:prstGeom>
+          <a:noFill/>
+        </p:spPr>
+        <p:txBody>
+          <a:bodyPr wrap="square" lIns="45720" rIns="45720" tIns="27432" bIns="27432" anchor="t">
+            <a:spAutoFit/>
+          </a:bodyPr>
+          <a:lstStyle/>
+          <a:p>
+            <a:pPr>
+              <a:lnSpc>
+                <a:spcPct val="110000"/>
+              </a:lnSpc>
+            </a:pPr>
+            <a:r>
+              <a:rPr sz="2600" b="1">
+                <a:solidFill>
+                  <a:srgbClr val="FFFFFF"/>
+                </a:solidFill>
+                <a:latin typeface="Inter"/>
+              </a:rPr>
+              <a:t>Secrets and separation</a:t>
+            </a:r>
+          </a:p>
+        </p:txBody>
+      </p:sp>
+      <p:sp>
+        <p:nvSpPr>
+          <p:cNvPr id="4" name="Rectangle 3"/>
+          <p:cNvSpPr/>
+          <p:nvPr/>
+        </p:nvSpPr>
+        <p:spPr>
+          <a:xfrm>
+            <a:off x="502920" y="1024128"/>
+            <a:ext cx="822960" cy="54864"/>
+          </a:xfrm>
+          <a:prstGeom prst="rect">
+            <a:avLst/>
+          </a:prstGeom>
+          <a:solidFill>
+            <a:srgbClr val="00D4AA"/>
+          </a:solidFill>
+          <a:ln>
+            <a:noFill/>
+          </a:ln>
+          <a:effectLst/>
+        </p:spPr>
+        <p:style>
+          <a:lnRef idx="1">
+            <a:schemeClr val="accent1"/>
+          </a:lnRef>
+          <a:fillRef idx="3">
+            <a:schemeClr val="accent1"/>
+          </a:fillRef>
+          <a:effectRef idx="2">
+            <a:schemeClr val="accent1"/>
+          </a:effectRef>
+          <a:fontRef idx="minor">
+            <a:schemeClr val="lt1"/>
+          </a:fontRef>
+        </p:style>
+        <p:txBody>
+          <a:bodyPr rtlCol="0" anchor="ctr"/>
+          <a:lstStyle/>
+          <a:p/>
+        </p:txBody>
+      </p:sp>
+      <p:sp>
+        <p:nvSpPr>
+          <p:cNvPr id="5" name="TextBox 4"/>
+          <p:cNvSpPr txBox="1"/>
+          <p:nvPr/>
+        </p:nvSpPr>
+        <p:spPr>
+          <a:xfrm>
+            <a:off x="640080" y="1417320"/>
+            <a:ext cx="10881360" cy="4892040"/>
+          </a:xfrm>
+          <a:prstGeom prst="rect">
+            <a:avLst/>
+          </a:prstGeom>
+          <a:noFill/>
+        </p:spPr>
+        <p:txBody>
+          <a:bodyPr wrap="square" lIns="45720" rIns="45720" tIns="27432" bIns="27432" anchor="t">
+            <a:spAutoFit/>
+          </a:bodyPr>
+          <a:lstStyle/>
+          <a:p>
+            <a:pPr marL="292608" indent="-292608">
+              <a:lnSpc>
+                <a:spcPct val="120000"/>
+              </a:lnSpc>
+              <a:spcAft>
+                <a:spcPts val="1260"/>
+              </a:spcAft>
+              <a:buClr>
+                <a:srgbClr val="00D4AA"/>
+              </a:buClr>
+              <a:buFont typeface="Inter"/>
+              <a:buChar char="•"/>
+            </a:pPr>
+            <a:r>
+              <a:rPr sz="1800" b="0">
+                <a:solidFill>
+                  <a:srgbClr val="FFFFFF"/>
+                </a:solidFill>
+                <a:latin typeface="Inter"/>
+              </a:rPr>
+              <a:t>No backend credentials in Atlas: the Collector holds them</a:t>
+            </a:r>
+          </a:p>
+          <a:p>
+            <a:pPr marL="292608" indent="-292608">
+              <a:lnSpc>
+                <a:spcPct val="120000"/>
+              </a:lnSpc>
+              <a:spcAft>
+                <a:spcPts val="1260"/>
+              </a:spcAft>
+              <a:buClr>
+                <a:srgbClr val="00D4AA"/>
+              </a:buClr>
+              <a:buFont typeface="Inter"/>
+              <a:buChar char="•"/>
+            </a:pPr>
+            <a:r>
+              <a:rPr sz="1800" b="0">
+                <a:solidFill>
+                  <a:srgbClr val="FFFFFF"/>
+                </a:solidFill>
+                <a:latin typeface="Inter"/>
+              </a:rPr>
+              <a:t>Project per environment: </a:t>
+            </a:r>
+            <a:r>
+              <a:rPr sz="1656" b="0">
                 <a:solidFill>
                   <a:srgbClr val="00D4AA"/>
                 </a:solidFill>
-                <a:latin typeface="Inter"/>
-              </a:rPr>
-              <a:t>→</a:t>
-            </a:r>
-          </a:p>
-        </p:txBody>
-      </p:sp>
-      <p:sp>
-        <p:nvSpPr>
-          <p:cNvPr id="4" name="TextBox 3"/>
-          <p:cNvSpPr txBox="1"/>
-          <p:nvPr/>
-        </p:nvSpPr>
-        <p:spPr>
-          <a:xfrm>
-            <a:off x="3566160" y="2148840"/>
-            <a:ext cx="7315200" cy="457200"/>
-          </a:xfrm>
-          <a:prstGeom prst="rect">
-            <a:avLst/>
-          </a:prstGeom>
-          <a:noFill/>
-        </p:spPr>
-        <p:txBody>
-          <a:bodyPr wrap="square" lIns="45720" rIns="45720" tIns="27432" bIns="27432" anchor="t">
-            <a:spAutoFit/>
-          </a:bodyPr>
-          <a:lstStyle/>
-          <a:p>
-            <a:r>
-              <a:rPr sz="1400" b="0">
-                <a:solidFill>
-                  <a:srgbClr val="94A3B8"/>
-                </a:solidFill>
-                <a:latin typeface="Inter"/>
-              </a:rPr>
-              <a:t>Next up:</a:t>
-            </a:r>
-          </a:p>
-        </p:txBody>
-      </p:sp>
-      <p:sp>
-        <p:nvSpPr>
-          <p:cNvPr id="5" name="TextBox 4"/>
-          <p:cNvSpPr txBox="1"/>
-          <p:nvPr/>
-        </p:nvSpPr>
-        <p:spPr>
-          <a:xfrm>
-            <a:off x="3566160" y="2560320"/>
-            <a:ext cx="7315200" cy="1097280"/>
-          </a:xfrm>
-          <a:prstGeom prst="rect">
-            <a:avLst/>
-          </a:prstGeom>
-          <a:noFill/>
-        </p:spPr>
-        <p:txBody>
-          <a:bodyPr wrap="square" lIns="45720" rIns="45720" tIns="27432" bIns="27432" anchor="t">
-            <a:spAutoFit/>
-          </a:bodyPr>
-          <a:lstStyle/>
-          <a:p>
-            <a:r>
-              <a:rPr sz="2600" b="1">
+                <a:latin typeface="JetBrains Mono"/>
+              </a:rPr>
+              <a:t>atlas-dev</a:t>
+            </a:r>
+            <a:r>
+              <a:rPr sz="1800" b="0">
                 <a:solidFill>
                   <a:srgbClr val="FFFFFF"/>
                 </a:solidFill>
                 <a:latin typeface="Inter"/>
               </a:rPr>
-              <a:t>Chaos demo: kill the observability backend</a:t>
-            </a:r>
-          </a:p>
-        </p:txBody>
-      </p:sp>
-      <p:sp>
-        <p:nvSpPr>
-          <p:cNvPr id="6" name="TextBox 5"/>
-          <p:cNvSpPr txBox="1"/>
-          <p:nvPr/>
-        </p:nvSpPr>
-        <p:spPr>
-          <a:xfrm>
-            <a:off x="3566160" y="3703320"/>
-            <a:ext cx="7315200" cy="1097280"/>
-          </a:xfrm>
-          <a:prstGeom prst="rect">
-            <a:avLst/>
-          </a:prstGeom>
-          <a:noFill/>
-        </p:spPr>
-        <p:txBody>
-          <a:bodyPr wrap="square" lIns="45720" rIns="45720" tIns="27432" bIns="27432" anchor="t">
-            <a:spAutoFit/>
-          </a:bodyPr>
-          <a:lstStyle/>
-          <a:p>
-            <a:r>
-              <a:rPr sz="1400" b="0">
-                <a:solidFill>
-                  <a:srgbClr val="94A3B8"/>
-                </a:solidFill>
-                <a:latin typeface="Inter"/>
-              </a:rPr>
-              <a:t>Next, we prove item five the hard way: kill the observability backend while Atlas is serving traffic and…</a:t>
+              <a:t>, </a:t>
+            </a:r>
+            <a:r>
+              <a:rPr sz="1656" b="0">
+                <a:solidFill>
+                  <a:srgbClr val="00D4AA"/>
+                </a:solidFill>
+                <a:latin typeface="JetBrains Mono"/>
+              </a:rPr>
+              <a:t>atlas-staging</a:t>
+            </a:r>
+            <a:r>
+              <a:rPr sz="1800" b="0">
+                <a:solidFill>
+                  <a:srgbClr val="FFFFFF"/>
+                </a:solidFill>
+                <a:latin typeface="Inter"/>
+              </a:rPr>
+              <a:t>, </a:t>
+            </a:r>
+            <a:r>
+              <a:rPr sz="1656" b="0">
+                <a:solidFill>
+                  <a:srgbClr val="00D4AA"/>
+                </a:solidFill>
+                <a:latin typeface="JetBrains Mono"/>
+              </a:rPr>
+              <a:t>atlas-prod</a:t>
+            </a:r>
+            <a:r>
+              <a:rPr sz="1800" b="0">
+                <a:solidFill>
+                  <a:srgbClr val="FFFFFF"/>
+                </a:solidFill>
+                <a:latin typeface="Inter"/>
+              </a:rPr>
+              <a:t>; keys scoped to each</a:t>
+            </a:r>
+          </a:p>
+          <a:p>
+            <a:pPr marL="292608" indent="-292608">
+              <a:lnSpc>
+                <a:spcPct val="120000"/>
+              </a:lnSpc>
+              <a:spcAft>
+                <a:spcPts val="1260"/>
+              </a:spcAft>
+              <a:buClr>
+                <a:srgbClr val="00D4AA"/>
+              </a:buClr>
+              <a:buFont typeface="Inter"/>
+              <a:buChar char="•"/>
+            </a:pPr>
+            <a:r>
+              <a:rPr sz="1800" b="0">
+                <a:solidFill>
+                  <a:srgbClr val="FFFFFF"/>
+                </a:solidFill>
+                <a:latin typeface="Inter"/>
+              </a:rPr>
+              <a:t>Masking tested: </a:t>
+            </a:r>
+            <a:r>
+              <a:rPr sz="1656" b="0">
+                <a:solidFill>
+                  <a:srgbClr val="00D4AA"/>
+                </a:solidFill>
+                <a:latin typeface="JetBrains Mono"/>
+              </a:rPr>
+              <a:t>tests/unit/test_pii.py</a:t>
+            </a:r>
+            <a:r>
+              <a:rPr sz="1800" b="0">
+                <a:solidFill>
+                  <a:srgbClr val="FFFFFF"/>
+                </a:solidFill>
+                <a:latin typeface="Inter"/>
+              </a:rPr>
+              <a:t> and </a:t>
+            </a:r>
+            <a:r>
+              <a:rPr sz="1656" b="0">
+                <a:solidFill>
+                  <a:srgbClr val="00D4AA"/>
+                </a:solidFill>
+                <a:latin typeface="JetBrains Mono"/>
+              </a:rPr>
+              <a:t>test_no_raw_pii_reaches_any_span</a:t>
+            </a:r>
+            <a:r>
+              <a:rPr sz="1800" b="0">
+                <a:solidFill>
+                  <a:srgbClr val="FFFFFF"/>
+                </a:solidFill>
+                <a:latin typeface="Inter"/>
+              </a:rPr>
+              <a:t>; Collector rules checked from the data</a:t>
             </a:r>
           </a:p>
         </p:txBody>
@@ -8526,7 +8981,7 @@
                 </a:solidFill>
                 <a:latin typeface="Inter"/>
               </a:rPr>
-              <a:t>AI Agent Observability &amp; Cost Control · Section 13 · Lecture 13.5</a:t>
+              <a:t>AI Agent Observability &amp; Cost Control · Section 13 · Lecture 13.4</a:t>
             </a:r>
           </a:p>
         </p:txBody>
@@ -8539,77 +8994,8 @@
         </p:nvSpPr>
         <p:spPr>
           <a:xfrm>
-            <a:off x="6675120" y="320040"/>
-            <a:ext cx="5074920" cy="548640"/>
-          </a:xfrm>
-          <a:prstGeom prst="rect">
-            <a:avLst/>
-          </a:prstGeom>
-          <a:noFill/>
-        </p:spPr>
-        <p:txBody>
-          <a:bodyPr wrap="square" lIns="45720" rIns="45720" tIns="27432" bIns="27432" anchor="t">
-            <a:spAutoFit/>
-          </a:bodyPr>
-          <a:lstStyle/>
-          <a:p>
-            <a:pPr algn="r"/>
-            <a:r>
-              <a:rPr sz="1000" b="0">
-                <a:solidFill>
-                  <a:srgbClr val="94A3B8"/>
-                </a:solidFill>
-                <a:latin typeface="Inter"/>
-              </a:rPr>
-              <a:t>SECTION 13 · DEPLOYING THE STACK AND CI BUDGET GATES</a:t>
-            </a:r>
-          </a:p>
-        </p:txBody>
-      </p:sp>
-      <p:sp>
-        <p:nvSpPr>
-          <p:cNvPr id="4" name="TextBox 3"/>
-          <p:cNvSpPr txBox="1"/>
-          <p:nvPr/>
-        </p:nvSpPr>
-        <p:spPr>
-          <a:xfrm>
-            <a:off x="914400" y="1417320"/>
-            <a:ext cx="10332720" cy="457200"/>
-          </a:xfrm>
-          <a:prstGeom prst="rect">
-            <a:avLst/>
-          </a:prstGeom>
-          <a:noFill/>
-        </p:spPr>
-        <p:txBody>
-          <a:bodyPr wrap="square" lIns="45720" rIns="45720" tIns="27432" bIns="27432" anchor="t">
-            <a:spAutoFit/>
-          </a:bodyPr>
-          <a:lstStyle/>
-          <a:p>
-            <a:r>
-              <a:rPr sz="1200" b="1">
-                <a:solidFill>
-                  <a:srgbClr val="00D4AA"/>
-                </a:solidFill>
-                <a:latin typeface="Inter"/>
-              </a:rPr>
-              <a:t>LECTURE 13.5</a:t>
-            </a:r>
-          </a:p>
-        </p:txBody>
-      </p:sp>
-      <p:sp>
-        <p:nvSpPr>
-          <p:cNvPr id="5" name="TextBox 4"/>
-          <p:cNvSpPr txBox="1"/>
-          <p:nvPr/>
-        </p:nvSpPr>
-        <p:spPr>
-          <a:xfrm>
-            <a:off x="914400" y="1874519"/>
-            <a:ext cx="10332720" cy="1645920"/>
+            <a:off x="457200" y="411480"/>
+            <a:ext cx="11247120" cy="868680"/>
           </a:xfrm>
           <a:prstGeom prst="rect">
             <a:avLst/>
@@ -8628,27 +9014,27 @@
               </a:lnSpc>
             </a:pPr>
             <a:r>
-              <a:rPr sz="3000" b="1">
+              <a:rPr sz="2600" b="1">
                 <a:solidFill>
                   <a:srgbClr val="FFFFFF"/>
                 </a:solidFill>
                 <a:latin typeface="Inter"/>
               </a:rPr>
-              <a:t>Chaos demo: kill the observability backend</a:t>
-            </a:r>
-          </a:p>
-        </p:txBody>
-      </p:sp>
-      <p:sp>
-        <p:nvSpPr>
-          <p:cNvPr id="6" name="Rectangle 5"/>
+              <a:t>Dashboards and alerts as code, with owners</a:t>
+            </a:r>
+          </a:p>
+        </p:txBody>
+      </p:sp>
+      <p:sp>
+        <p:nvSpPr>
+          <p:cNvPr id="4" name="Rectangle 3"/>
           <p:cNvSpPr/>
           <p:nvPr/>
         </p:nvSpPr>
         <p:spPr>
           <a:xfrm>
-            <a:off x="914400" y="3794760"/>
-            <a:ext cx="64008" cy="1143000"/>
+            <a:off x="502920" y="1024128"/>
+            <a:ext cx="822960" cy="54864"/>
           </a:xfrm>
           <a:prstGeom prst="rect">
             <a:avLst/>
@@ -8683,39 +9069,113 @@
       </p:sp>
       <p:sp>
         <p:nvSpPr>
-          <p:cNvPr id="7" name="TextBox 6"/>
-          <p:cNvSpPr txBox="1"/>
-          <p:nvPr/>
-        </p:nvSpPr>
-        <p:spPr>
-          <a:xfrm>
-            <a:off x="1188720" y="3749039"/>
-            <a:ext cx="9692640" cy="1280160"/>
-          </a:xfrm>
-          <a:prstGeom prst="rect">
-            <a:avLst/>
-          </a:prstGeom>
-          <a:noFill/>
-        </p:spPr>
-        <p:txBody>
-          <a:bodyPr wrap="square" lIns="45720" rIns="45720" tIns="27432" bIns="27432" anchor="ctr">
-            <a:spAutoFit/>
-          </a:bodyPr>
-          <a:lstStyle/>
-          <a:p>
-            <a:pPr>
+          <p:cNvPr id="5" name="TextBox 4"/>
+          <p:cNvSpPr txBox="1"/>
+          <p:nvPr/>
+        </p:nvSpPr>
+        <p:spPr>
+          <a:xfrm>
+            <a:off x="640080" y="1417320"/>
+            <a:ext cx="10881360" cy="4892040"/>
+          </a:xfrm>
+          <a:prstGeom prst="rect">
+            <a:avLst/>
+          </a:prstGeom>
+          <a:noFill/>
+        </p:spPr>
+        <p:txBody>
+          <a:bodyPr wrap="square" lIns="45720" rIns="45720" tIns="27432" bIns="27432" anchor="t">
+            <a:spAutoFit/>
+          </a:bodyPr>
+          <a:lstStyle/>
+          <a:p>
+            <a:pPr marL="292608" indent="-292608">
               <a:lnSpc>
-                <a:spcPct val="130000"/>
+                <a:spcPct val="120000"/>
               </a:lnSpc>
+              <a:spcAft>
+                <a:spcPts val="1260"/>
+              </a:spcAft>
+              <a:buClr>
+                <a:srgbClr val="00D4AA"/>
+              </a:buClr>
+              <a:buFont typeface="Inter"/>
+              <a:buChar char="•"/>
             </a:pPr>
             <a:r>
-              <a:rPr sz="1600" b="0">
-                <a:solidFill>
-                  <a:srgbClr val="CBD5E1"/>
-                </a:solidFill>
-                <a:latin typeface="Inter"/>
-              </a:rPr>
-              <a:t>Show that Atlas keeps serving with the same p95 when Langfuse and the Collector are down.</a:t>
+              <a:rPr sz="1800" b="0">
+                <a:solidFill>
+                  <a:srgbClr val="FFFFFF"/>
+                </a:solidFill>
+                <a:latin typeface="Inter"/>
+              </a:rPr>
+              <a:t>Dashboards in the repo: </a:t>
+            </a:r>
+            <a:r>
+              <a:rPr sz="1656" b="0">
+                <a:solidFill>
+                  <a:srgbClr val="00D4AA"/>
+                </a:solidFill>
+                <a:latin typeface="JetBrains Mono"/>
+              </a:rPr>
+              <a:t>deploy/grafana/dashboards/atlas-ops.json</a:t>
+            </a:r>
+            <a:r>
+              <a:rPr sz="1800" b="0">
+                <a:solidFill>
+                  <a:srgbClr val="FFFFFF"/>
+                </a:solidFill>
+                <a:latin typeface="Inter"/>
+              </a:rPr>
+              <a:t>, provisioned, not hand-built</a:t>
+            </a:r>
+          </a:p>
+          <a:p>
+            <a:pPr marL="292608" indent="-292608">
+              <a:lnSpc>
+                <a:spcPct val="120000"/>
+              </a:lnSpc>
+              <a:spcAft>
+                <a:spcPts val="1260"/>
+              </a:spcAft>
+              <a:buClr>
+                <a:srgbClr val="00D4AA"/>
+              </a:buClr>
+              <a:buFont typeface="Inter"/>
+              <a:buChar char="•"/>
+            </a:pPr>
+            <a:r>
+              <a:rPr sz="1800" b="0">
+                <a:solidFill>
+                  <a:srgbClr val="FFFFFF"/>
+                </a:solidFill>
+                <a:latin typeface="Inter"/>
+              </a:rPr>
+              <a:t>Alert rules in the repo, each with a runbook link (Lecture 9.5)</a:t>
+            </a:r>
+          </a:p>
+          <a:p>
+            <a:pPr marL="292608" indent="-292608">
+              <a:lnSpc>
+                <a:spcPct val="120000"/>
+              </a:lnSpc>
+              <a:spcAft>
+                <a:spcPts val="1260"/>
+              </a:spcAft>
+              <a:buClr>
+                <a:srgbClr val="00D4AA"/>
+              </a:buClr>
+              <a:buFont typeface="Inter"/>
+              <a:buChar char="•"/>
+            </a:pPr>
+            <a:r>
+              <a:rPr sz="1800" b="0">
+                <a:solidFill>
+                  <a:srgbClr val="FFFFFF"/>
+                </a:solidFill>
+                <a:latin typeface="Inter"/>
+              </a:rPr>
+              <a:t>Every dashboard and every alert has a named owner; alerts without an owner are deleted</a:t>
             </a:r>
           </a:p>
         </p:txBody>
@@ -8775,7 +9235,7 @@
                 </a:solidFill>
                 <a:latin typeface="Inter"/>
               </a:rPr>
-              <a:t>AI Agent Observability &amp; Cost Control · Section 13 · Lecture 13.5</a:t>
+              <a:t>AI Agent Observability &amp; Cost Control · Section 13 · Lecture 13.4</a:t>
             </a:r>
           </a:p>
         </p:txBody>
@@ -8814,7 +9274,7 @@
                 </a:solidFill>
                 <a:latin typeface="Inter"/>
               </a:rPr>
-              <a:t>Why it worked</a:t>
+              <a:t>What "done" looks like</a:t>
             </a:r>
           </a:p>
         </p:txBody>
@@ -8897,13 +9357,22 @@
               <a:buChar char="•"/>
             </a:pPr>
             <a:r>
+              <a:rPr sz="1800" b="0">
+                <a:solidFill>
+                  <a:srgbClr val="FFFFFF"/>
+                </a:solidFill>
+                <a:latin typeface="Inter"/>
+              </a:rPr>
+              <a:t>A one-page </a:t>
+            </a:r>
+            <a:r>
               <a:rPr sz="1656" b="0">
                 <a:solidFill>
                   <a:srgbClr val="00D4AA"/>
                 </a:solidFill>
                 <a:latin typeface="JetBrains Mono"/>
               </a:rPr>
-              <a:t>BatchSpanProcessor</a:t>
+              <a:t>OBSERVABILITY.md</a:t>
             </a:r>
             <a:r>
               <a:rPr sz="1800" b="0">
@@ -8912,7 +9381,7 @@
                 </a:solidFill>
                 <a:latin typeface="Inter"/>
               </a:rPr>
-              <a:t>: export happens on a background thread, never in the request</a:t>
+              <a:t> in the repo: sampling policy, retention, projects, owners, how to run the stack</a:t>
             </a:r>
           </a:p>
           <a:p>
@@ -8936,25 +9405,7 @@
                 </a:solidFill>
                 <a:latin typeface="Inter"/>
               </a:rPr>
-              <a:t>Bounded queue: </a:t>
-            </a:r>
-            <a:r>
-              <a:rPr sz="1656" b="0">
-                <a:solidFill>
-                  <a:srgbClr val="00D4AA"/>
-                </a:solidFill>
-                <a:latin typeface="JetBrains Mono"/>
-              </a:rPr>
-              <a:t>max_queue_size=2048</a:t>
-            </a:r>
-            <a:r>
-              <a:rPr sz="1800" b="0">
-                <a:solidFill>
-                  <a:srgbClr val="FFFFFF"/>
-                </a:solidFill>
-                <a:latin typeface="Inter"/>
-              </a:rPr>
-              <a:t>; overflow drops, never blocks</a:t>
+              <a:t>The chaos test from the next lecture passes: backend down, Atlas up</a:t>
             </a:r>
           </a:p>
           <a:p>
@@ -8972,40 +9423,13 @@
               <a:buChar char="•"/>
             </a:pPr>
             <a:r>
-              <a:rPr sz="1656" b="0">
-                <a:solidFill>
-                  <a:srgbClr val="00D4AA"/>
-                </a:solidFill>
-                <a:latin typeface="JetBrains Mono"/>
-              </a:rPr>
-              <a:t>OTLPSpanExporter(timeout=5)</a:t>
-            </a:r>
-            <a:r>
               <a:rPr sz="1800" b="0">
                 <a:solidFill>
                   <a:srgbClr val="FFFFFF"/>
                 </a:solidFill>
                 <a:latin typeface="Inter"/>
               </a:rPr>
-              <a:t> and </a:t>
-            </a:r>
-            <a:r>
-              <a:rPr sz="1656" b="0">
-                <a:solidFill>
-                  <a:srgbClr val="00D4AA"/>
-                </a:solidFill>
-                <a:latin typeface="JetBrains Mono"/>
-              </a:rPr>
-              <a:t>export_timeout_millis=5000</a:t>
-            </a:r>
-            <a:r>
-              <a:rPr sz="1800" b="0">
-                <a:solidFill>
-                  <a:srgbClr val="FFFFFF"/>
-                </a:solidFill>
-                <a:latin typeface="Inter"/>
-              </a:rPr>
-              <a:t>: a dead endpoint costs the background thread 5 s, not the request</a:t>
+              <a:t>The budget gate is green and required for merge</a:t>
             </a:r>
           </a:p>
           <a:p>
@@ -9023,82 +9447,13 @@
               <a:buChar char="•"/>
             </a:pPr>
             <a:r>
-              <a:rPr sz="1656" b="0">
-                <a:solidFill>
-                  <a:srgbClr val="00D4AA"/>
-                </a:solidFill>
-                <a:latin typeface="JetBrains Mono"/>
-              </a:rPr>
-              <a:t>SafeSpanExporter</a:t>
-            </a:r>
-            <a:r>
               <a:rPr sz="1800" b="0">
                 <a:solidFill>
                   <a:srgbClr val="FFFFFF"/>
                 </a:solidFill>
                 <a:latin typeface="Inter"/>
               </a:rPr>
-              <a:t>: exceptions become a warning and a counter, never a raise</a:t>
-            </a:r>
-          </a:p>
-          <a:p>
-            <a:pPr marL="292608" indent="-292608">
-              <a:lnSpc>
-                <a:spcPct val="120000"/>
-              </a:lnSpc>
-              <a:spcAft>
-                <a:spcPts val="1260"/>
-              </a:spcAft>
-              <a:buClr>
-                <a:srgbClr val="00D4AA"/>
-              </a:buClr>
-              <a:buFont typeface="Inter"/>
-              <a:buChar char="•"/>
-            </a:pPr>
-            <a:r>
-              <a:rPr sz="1800" b="0">
-                <a:solidFill>
-                  <a:srgbClr val="FFFFFF"/>
-                </a:solidFill>
-                <a:latin typeface="Inter"/>
-              </a:rPr>
-              <a:t>Langfuse client: </a:t>
-            </a:r>
-            <a:r>
-              <a:rPr sz="1656" b="0">
-                <a:solidFill>
-                  <a:srgbClr val="00D4AA"/>
-                </a:solidFill>
-                <a:latin typeface="JetBrains Mono"/>
-              </a:rPr>
-              <a:t>flush_at=50</a:t>
-            </a:r>
-            <a:r>
-              <a:rPr sz="1800" b="0">
-                <a:solidFill>
-                  <a:srgbClr val="FFFFFF"/>
-                </a:solidFill>
-                <a:latin typeface="Inter"/>
-              </a:rPr>
-              <a:t>, </a:t>
-            </a:r>
-            <a:r>
-              <a:rPr sz="1656" b="0">
-                <a:solidFill>
-                  <a:srgbClr val="00D4AA"/>
-                </a:solidFill>
-                <a:latin typeface="JetBrains Mono"/>
-              </a:rPr>
-              <a:t>flush_interval=2.0</a:t>
-            </a:r>
-            <a:r>
-              <a:rPr sz="1800" b="0">
-                <a:solidFill>
-                  <a:srgbClr val="FFFFFF"/>
-                </a:solidFill>
-                <a:latin typeface="Inter"/>
-              </a:rPr>
-              <a:t>, same idea</a:t>
+              <a:t>A new engineer can find "why was this session expensive" in under ten minutes using only the README</a:t>
             </a:r>
           </a:p>
         </p:txBody>
@@ -9158,7 +9513,7 @@
                 </a:solidFill>
                 <a:latin typeface="Inter"/>
               </a:rPr>
-              <a:t>AI Agent Observability &amp; Cost Control · Section 13 · Lecture 13.5</a:t>
+              <a:t>AI Agent Observability &amp; Cost Control · Section 13 · Lecture 13.4</a:t>
             </a:r>
           </a:p>
         </p:txBody>
@@ -9171,8 +9526,8 @@
         </p:nvSpPr>
         <p:spPr>
           <a:xfrm>
-            <a:off x="457200" y="411480"/>
-            <a:ext cx="11247120" cy="868680"/>
+            <a:off x="1371600" y="822960"/>
+            <a:ext cx="9418320" cy="457200"/>
           </a:xfrm>
           <a:prstGeom prst="rect">
             <a:avLst/>
@@ -9185,11 +9540,42 @@
           </a:bodyPr>
           <a:lstStyle/>
           <a:p>
-            <a:pPr>
-              <a:lnSpc>
-                <a:spcPct val="110000"/>
-              </a:lnSpc>
-            </a:pPr>
+            <a:pPr algn="ctr"/>
+            <a:r>
+              <a:rPr sz="1200" b="1">
+                <a:solidFill>
+                  <a:srgbClr val="00D4AA"/>
+                </a:solidFill>
+                <a:latin typeface="Inter"/>
+              </a:rPr>
+              <a:t>RECAP</a:t>
+            </a:r>
+          </a:p>
+        </p:txBody>
+      </p:sp>
+      <p:sp>
+        <p:nvSpPr>
+          <p:cNvPr id="4" name="TextBox 3"/>
+          <p:cNvSpPr txBox="1"/>
+          <p:nvPr/>
+        </p:nvSpPr>
+        <p:spPr>
+          <a:xfrm>
+            <a:off x="1371600" y="1234440"/>
+            <a:ext cx="9418320" cy="822960"/>
+          </a:xfrm>
+          <a:prstGeom prst="rect">
+            <a:avLst/>
+          </a:prstGeom>
+          <a:noFill/>
+        </p:spPr>
+        <p:txBody>
+          <a:bodyPr wrap="square" lIns="45720" rIns="45720" tIns="27432" bIns="27432" anchor="t">
+            <a:spAutoFit/>
+          </a:bodyPr>
+          <a:lstStyle/>
+          <a:p>
+            <a:pPr algn="ctr"/>
             <a:r>
               <a:rPr sz="2600" b="1">
                 <a:solidFill>
@@ -9197,27 +9583,29 @@
                 </a:solidFill>
                 <a:latin typeface="Inter"/>
               </a:rPr>
-              <a:t>Two ways to turn a telemetry outage into a user outage</a:t>
-            </a:r>
-          </a:p>
-        </p:txBody>
-      </p:sp>
-      <p:sp>
-        <p:nvSpPr>
-          <p:cNvPr id="4" name="Rectangle 3"/>
+              <a:t>Key takeaways</a:t>
+            </a:r>
+          </a:p>
+        </p:txBody>
+      </p:sp>
+      <p:sp>
+        <p:nvSpPr>
+          <p:cNvPr id="5" name="Rounded Rectangle 4"/>
           <p:cNvSpPr/>
           <p:nvPr/>
         </p:nvSpPr>
         <p:spPr>
           <a:xfrm>
-            <a:off x="502920" y="1024128"/>
-            <a:ext cx="822960" cy="54864"/>
-          </a:xfrm>
-          <a:prstGeom prst="rect">
-            <a:avLst/>
+            <a:off x="2011680" y="2514600"/>
+            <a:ext cx="8138160" cy="777240"/>
+          </a:xfrm>
+          <a:prstGeom prst="roundRect">
+            <a:avLst>
+              <a:gd name="adj" fmla="val 6588"/>
+            </a:avLst>
           </a:prstGeom>
           <a:solidFill>
-            <a:srgbClr val="00D4AA"/>
+            <a:srgbClr val="1A2742"/>
           </a:solidFill>
           <a:ln>
             <a:noFill/>
@@ -9246,122 +9634,292 @@
       </p:sp>
       <p:sp>
         <p:nvSpPr>
-          <p:cNvPr id="5" name="TextBox 4"/>
-          <p:cNvSpPr txBox="1"/>
-          <p:nvPr/>
-        </p:nvSpPr>
-        <p:spPr>
-          <a:xfrm>
-            <a:off x="640080" y="1417320"/>
-            <a:ext cx="10881360" cy="4892040"/>
-          </a:xfrm>
-          <a:prstGeom prst="rect">
-            <a:avLst/>
-          </a:prstGeom>
-          <a:noFill/>
-        </p:spPr>
-        <p:txBody>
-          <a:bodyPr wrap="square" lIns="45720" rIns="45720" tIns="27432" bIns="27432" anchor="t">
-            <a:spAutoFit/>
-          </a:bodyPr>
-          <a:lstStyle/>
-          <a:p>
-            <a:pPr marL="292608" indent="-292608">
-              <a:lnSpc>
-                <a:spcPct val="120000"/>
-              </a:lnSpc>
-              <a:spcAft>
-                <a:spcPts val="1260"/>
-              </a:spcAft>
-              <a:buClr>
-                <a:srgbClr val="00D4AA"/>
-              </a:buClr>
-              <a:buFont typeface="Inter"/>
-              <a:buChar char="•"/>
-            </a:pPr>
-            <a:r>
-              <a:rPr sz="1656" b="0">
+          <p:cNvPr id="6" name="TextBox 5"/>
+          <p:cNvSpPr txBox="1"/>
+          <p:nvPr/>
+        </p:nvSpPr>
+        <p:spPr>
+          <a:xfrm>
+            <a:off x="2194560" y="2514600"/>
+            <a:ext cx="548640" cy="777240"/>
+          </a:xfrm>
+          <a:prstGeom prst="rect">
+            <a:avLst/>
+          </a:prstGeom>
+          <a:noFill/>
+        </p:spPr>
+        <p:txBody>
+          <a:bodyPr wrap="square" lIns="45720" rIns="45720" tIns="27432" bIns="27432" anchor="ctr">
+            <a:spAutoFit/>
+          </a:bodyPr>
+          <a:lstStyle/>
+          <a:p>
+            <a:r>
+              <a:rPr sz="2200" b="1">
                 <a:solidFill>
                   <a:srgbClr val="00D4AA"/>
                 </a:solidFill>
-                <a:latin typeface="JetBrains Mono"/>
-              </a:rPr>
-              <a:t>SimpleSpanProcessor</a:t>
-            </a:r>
-            <a:r>
-              <a:rPr sz="1800" b="0">
+                <a:latin typeface="Inter"/>
+              </a:rPr>
+              <a:t>✓</a:t>
+            </a:r>
+          </a:p>
+        </p:txBody>
+      </p:sp>
+      <p:sp>
+        <p:nvSpPr>
+          <p:cNvPr id="7" name="TextBox 6"/>
+          <p:cNvSpPr txBox="1"/>
+          <p:nvPr/>
+        </p:nvSpPr>
+        <p:spPr>
+          <a:xfrm>
+            <a:off x="2788920" y="2514600"/>
+            <a:ext cx="7223760" cy="777240"/>
+          </a:xfrm>
+          <a:prstGeom prst="rect">
+            <a:avLst/>
+          </a:prstGeom>
+          <a:noFill/>
+        </p:spPr>
+        <p:txBody>
+          <a:bodyPr wrap="square" lIns="45720" rIns="45720" tIns="27432" bIns="27432" anchor="ctr">
+            <a:spAutoFit/>
+          </a:bodyPr>
+          <a:lstStyle/>
+          <a:p>
+            <a:r>
+              <a:rPr sz="1800" b="1">
                 <a:solidFill>
                   <a:srgbClr val="FFFFFF"/>
                 </a:solidFill>
                 <a:latin typeface="Inter"/>
               </a:rPr>
-              <a:t> (</a:t>
-            </a:r>
-            <a:r>
-              <a:rPr sz="1656" b="0">
+              <a:t>Telemetry drops, never blocks</a:t>
+            </a:r>
+          </a:p>
+        </p:txBody>
+      </p:sp>
+      <p:sp>
+        <p:nvSpPr>
+          <p:cNvPr id="8" name="Rounded Rectangle 7"/>
+          <p:cNvSpPr/>
+          <p:nvPr/>
+        </p:nvSpPr>
+        <p:spPr>
+          <a:xfrm>
+            <a:off x="2011680" y="3474720"/>
+            <a:ext cx="8138160" cy="777240"/>
+          </a:xfrm>
+          <a:prstGeom prst="roundRect">
+            <a:avLst>
+              <a:gd name="adj" fmla="val 6588"/>
+            </a:avLst>
+          </a:prstGeom>
+          <a:solidFill>
+            <a:srgbClr val="1A2742"/>
+          </a:solidFill>
+          <a:ln>
+            <a:noFill/>
+          </a:ln>
+          <a:effectLst/>
+        </p:spPr>
+        <p:style>
+          <a:lnRef idx="1">
+            <a:schemeClr val="accent1"/>
+          </a:lnRef>
+          <a:fillRef idx="3">
+            <a:schemeClr val="accent1"/>
+          </a:fillRef>
+          <a:effectRef idx="2">
+            <a:schemeClr val="accent1"/>
+          </a:effectRef>
+          <a:fontRef idx="minor">
+            <a:schemeClr val="lt1"/>
+          </a:fontRef>
+        </p:style>
+        <p:txBody>
+          <a:bodyPr rtlCol="0" anchor="ctr"/>
+          <a:lstStyle/>
+          <a:p/>
+        </p:txBody>
+      </p:sp>
+      <p:sp>
+        <p:nvSpPr>
+          <p:cNvPr id="9" name="TextBox 8"/>
+          <p:cNvSpPr txBox="1"/>
+          <p:nvPr/>
+        </p:nvSpPr>
+        <p:spPr>
+          <a:xfrm>
+            <a:off x="2194560" y="3474720"/>
+            <a:ext cx="548640" cy="777240"/>
+          </a:xfrm>
+          <a:prstGeom prst="rect">
+            <a:avLst/>
+          </a:prstGeom>
+          <a:noFill/>
+        </p:spPr>
+        <p:txBody>
+          <a:bodyPr wrap="square" lIns="45720" rIns="45720" tIns="27432" bIns="27432" anchor="ctr">
+            <a:spAutoFit/>
+          </a:bodyPr>
+          <a:lstStyle/>
+          <a:p>
+            <a:r>
+              <a:rPr sz="2200" b="1">
                 <a:solidFill>
                   <a:srgbClr val="00D4AA"/>
                 </a:solidFill>
-                <a:latin typeface="JetBrains Mono"/>
-              </a:rPr>
-              <a:t>batch=False</a:t>
-            </a:r>
-            <a:r>
-              <a:rPr sz="1800" b="0">
+                <a:latin typeface="Inter"/>
+              </a:rPr>
+              <a:t>✓</a:t>
+            </a:r>
+          </a:p>
+        </p:txBody>
+      </p:sp>
+      <p:sp>
+        <p:nvSpPr>
+          <p:cNvPr id="10" name="TextBox 9"/>
+          <p:cNvSpPr txBox="1"/>
+          <p:nvPr/>
+        </p:nvSpPr>
+        <p:spPr>
+          <a:xfrm>
+            <a:off x="2788920" y="3474720"/>
+            <a:ext cx="7223760" cy="777240"/>
+          </a:xfrm>
+          <a:prstGeom prst="rect">
+            <a:avLst/>
+          </a:prstGeom>
+          <a:noFill/>
+        </p:spPr>
+        <p:txBody>
+          <a:bodyPr wrap="square" lIns="45720" rIns="45720" tIns="27432" bIns="27432" anchor="ctr">
+            <a:spAutoFit/>
+          </a:bodyPr>
+          <a:lstStyle/>
+          <a:p>
+            <a:r>
+              <a:rPr sz="1800" b="1">
                 <a:solidFill>
                   <a:srgbClr val="FFFFFF"/>
                 </a:solidFill>
                 <a:latin typeface="Inter"/>
               </a:rPr>
-              <a:t>): exports synchronously inside the request; a dead backend adds the full timeout to every response</a:t>
-            </a:r>
-          </a:p>
-          <a:p>
-            <a:pPr marL="292608" indent="-292608">
-              <a:lnSpc>
-                <a:spcPct val="120000"/>
-              </a:lnSpc>
-              <a:spcAft>
-                <a:spcPts val="1260"/>
-              </a:spcAft>
-              <a:buClr>
-                <a:srgbClr val="00D4AA"/>
-              </a:buClr>
-              <a:buFont typeface="Inter"/>
-              <a:buChar char="•"/>
-            </a:pPr>
-            <a:r>
-              <a:rPr sz="1800" b="0">
+              <a:t>Masking is tested, credentials in the Collector</a:t>
+            </a:r>
+          </a:p>
+        </p:txBody>
+      </p:sp>
+      <p:sp>
+        <p:nvSpPr>
+          <p:cNvPr id="11" name="Rounded Rectangle 10"/>
+          <p:cNvSpPr/>
+          <p:nvPr/>
+        </p:nvSpPr>
+        <p:spPr>
+          <a:xfrm>
+            <a:off x="2011680" y="4434840"/>
+            <a:ext cx="8138160" cy="777240"/>
+          </a:xfrm>
+          <a:prstGeom prst="roundRect">
+            <a:avLst>
+              <a:gd name="adj" fmla="val 6588"/>
+            </a:avLst>
+          </a:prstGeom>
+          <a:solidFill>
+            <a:srgbClr val="1A2742"/>
+          </a:solidFill>
+          <a:ln>
+            <a:noFill/>
+          </a:ln>
+          <a:effectLst/>
+        </p:spPr>
+        <p:style>
+          <a:lnRef idx="1">
+            <a:schemeClr val="accent1"/>
+          </a:lnRef>
+          <a:fillRef idx="3">
+            <a:schemeClr val="accent1"/>
+          </a:fillRef>
+          <a:effectRef idx="2">
+            <a:schemeClr val="accent1"/>
+          </a:effectRef>
+          <a:fontRef idx="minor">
+            <a:schemeClr val="lt1"/>
+          </a:fontRef>
+        </p:style>
+        <p:txBody>
+          <a:bodyPr rtlCol="0" anchor="ctr"/>
+          <a:lstStyle/>
+          <a:p/>
+        </p:txBody>
+      </p:sp>
+      <p:sp>
+        <p:nvSpPr>
+          <p:cNvPr id="12" name="TextBox 11"/>
+          <p:cNvSpPr txBox="1"/>
+          <p:nvPr/>
+        </p:nvSpPr>
+        <p:spPr>
+          <a:xfrm>
+            <a:off x="2194560" y="4434840"/>
+            <a:ext cx="548640" cy="777240"/>
+          </a:xfrm>
+          <a:prstGeom prst="rect">
+            <a:avLst/>
+          </a:prstGeom>
+          <a:noFill/>
+        </p:spPr>
+        <p:txBody>
+          <a:bodyPr wrap="square" lIns="45720" rIns="45720" tIns="27432" bIns="27432" anchor="ctr">
+            <a:spAutoFit/>
+          </a:bodyPr>
+          <a:lstStyle/>
+          <a:p>
+            <a:r>
+              <a:rPr sz="2200" b="1">
+                <a:solidFill>
+                  <a:srgbClr val="00D4AA"/>
+                </a:solidFill>
+                <a:latin typeface="Inter"/>
+              </a:rPr>
+              <a:t>✓</a:t>
+            </a:r>
+          </a:p>
+        </p:txBody>
+      </p:sp>
+      <p:sp>
+        <p:nvSpPr>
+          <p:cNvPr id="13" name="TextBox 12"/>
+          <p:cNvSpPr txBox="1"/>
+          <p:nvPr/>
+        </p:nvSpPr>
+        <p:spPr>
+          <a:xfrm>
+            <a:off x="2788920" y="4434840"/>
+            <a:ext cx="7223760" cy="777240"/>
+          </a:xfrm>
+          <a:prstGeom prst="rect">
+            <a:avLst/>
+          </a:prstGeom>
+          <a:noFill/>
+        </p:spPr>
+        <p:txBody>
+          <a:bodyPr wrap="square" lIns="45720" rIns="45720" tIns="27432" bIns="27432" anchor="ctr">
+            <a:spAutoFit/>
+          </a:bodyPr>
+          <a:lstStyle/>
+          <a:p>
+            <a:r>
+              <a:rPr sz="1800" b="1">
                 <a:solidFill>
                   <a:srgbClr val="FFFFFF"/>
                 </a:solidFill>
                 <a:latin typeface="Inter"/>
               </a:rPr>
-              <a:t>No timeout, or a 30 s default, on the exporter: the background thread hangs, the queue fills, and shutdown blocks</a:t>
-            </a:r>
-          </a:p>
-          <a:p>
-            <a:pPr marL="292608" indent="-292608">
-              <a:lnSpc>
-                <a:spcPct val="120000"/>
-              </a:lnSpc>
-              <a:spcAft>
-                <a:spcPts val="1260"/>
-              </a:spcAft>
-              <a:buClr>
-                <a:srgbClr val="00D4AA"/>
-              </a:buClr>
-              <a:buFont typeface="Inter"/>
-              <a:buChar char="•"/>
-            </a:pPr>
-            <a:r>
-              <a:rPr sz="1800" b="0">
-                <a:solidFill>
-                  <a:srgbClr val="FFFFFF"/>
-                </a:solidFill>
-                <a:latin typeface="Inter"/>
-              </a:rPr>
-              <a:t>Both are one-line mistakes that pass every unit test</a:t>
+              <a:t>Every alert and dashboard has an owner</a:t>
             </a:r>
           </a:p>
         </p:txBody>
@@ -9421,7 +9979,7 @@
                 </a:solidFill>
                 <a:latin typeface="Inter"/>
               </a:rPr>
-              <a:t>AI Agent Observability &amp; Cost Control · Section 13 · Lecture 13.5</a:t>
+              <a:t>AI Agent Observability &amp; Cost Control · Section 13 · Lecture 13.4</a:t>
             </a:r>
           </a:p>
         </p:txBody>
@@ -9523,7 +10081,7 @@
                 </a:solidFill>
                 <a:latin typeface="Inter"/>
               </a:rPr>
-              <a:t>Lab 7: Self-hosted stack end to end</a:t>
+              <a:t>Chaos demo: kill the observability backend</a:t>
             </a:r>
           </a:p>
         </p:txBody>
@@ -9557,7 +10115,7 @@
                 </a:solidFill>
                 <a:latin typeface="Inter"/>
               </a:rPr>
-              <a:t>Next, Lab 7: the whole self-hosted stack running end to end on your machine, with the budget gate…</a:t>
+              <a:t>Next, we prove item five the hard way: kill the observability backend while Atlas is serving traffic and…</a:t>
             </a:r>
           </a:p>
         </p:txBody>
@@ -9617,7 +10175,7 @@
                 </a:solidFill>
                 <a:latin typeface="Inter"/>
               </a:rPr>
-              <a:t>AI Agent Observability &amp; Cost Control · Section 13 · Lecture 13.6</a:t>
+              <a:t>AI Agent Observability &amp; Cost Control · Section 13 · Lecture 13.5</a:t>
             </a:r>
           </a:p>
         </p:txBody>
@@ -9686,7 +10244,7 @@
                 </a:solidFill>
                 <a:latin typeface="Inter"/>
               </a:rPr>
-              <a:t>LECTURE 13.6</a:t>
+              <a:t>LECTURE 13.5</a:t>
             </a:r>
           </a:p>
         </p:txBody>
@@ -9725,7 +10283,7 @@
                 </a:solidFill>
                 <a:latin typeface="Inter"/>
               </a:rPr>
-              <a:t>Lab 7: Self-hosted stack end to end</a:t>
+              <a:t>Chaos demo: kill the observability backend</a:t>
             </a:r>
           </a:p>
         </p:txBody>
@@ -9806,7 +10364,7 @@
                 </a:solidFill>
                 <a:latin typeface="Inter"/>
               </a:rPr>
-              <a:t>Run Langfuse, the Collector, Prometheus and Grafana locally and trace a replayed day through all of them.</a:t>
+              <a:t>Show that Atlas keeps serving at the same rate when its only span destination, the Collector, is down.</a:t>
             </a:r>
           </a:p>
         </p:txBody>
@@ -9866,7 +10424,7 @@
                 </a:solidFill>
                 <a:latin typeface="Inter"/>
               </a:rPr>
-              <a:t>AI Agent Observability &amp; Cost Control · Section 13 · Lecture 13.6</a:t>
+              <a:t>AI Agent Observability &amp; Cost Control · Section 13 · Lecture 13.5</a:t>
             </a:r>
           </a:p>
         </p:txBody>
@@ -9905,7 +10463,7 @@
                 </a:solidFill>
                 <a:latin typeface="Inter"/>
               </a:rPr>
-              <a:t>Lab 7 checklist (1/2)</a:t>
+              <a:t>Why it worked</a:t>
             </a:r>
           </a:p>
         </p:txBody>
@@ -9994,7 +10552,7 @@
                 </a:solidFill>
                 <a:latin typeface="JetBrains Mono"/>
               </a:rPr>
-              <a:t>make langfuse-up</a:t>
+              <a:t>BatchSpanProcessor</a:t>
             </a:r>
             <a:r>
               <a:rPr sz="1800" b="0">
@@ -10003,25 +10561,7 @@
                 </a:solidFill>
                 <a:latin typeface="Inter"/>
               </a:rPr>
-              <a:t> and </a:t>
-            </a:r>
-            <a:r>
-              <a:rPr sz="1656" b="0">
-                <a:solidFill>
-                  <a:srgbClr val="00D4AA"/>
-                </a:solidFill>
-                <a:latin typeface="JetBrains Mono"/>
-              </a:rPr>
-              <a:t>make stack</a:t>
-            </a:r>
-            <a:r>
-              <a:rPr sz="1800" b="0">
-                <a:solidFill>
-                  <a:srgbClr val="FFFFFF"/>
-                </a:solidFill>
-                <a:latin typeface="Inter"/>
-              </a:rPr>
-              <a:t>: Langfuse, Collector, Prometheus, Grafana all healthy</a:t>
+              <a:t>: export happens on a background thread, never in the request</a:t>
             </a:r>
           </a:p>
           <a:p>
@@ -10045,7 +10585,25 @@
                 </a:solidFill>
                 <a:latin typeface="Inter"/>
               </a:rPr>
-              <a:t>Atlas exporting to the Collector only; no Langfuse keys in Atlas's env</a:t>
+              <a:t>Bounded queue: </a:t>
+            </a:r>
+            <a:r>
+              <a:rPr sz="1656" b="0">
+                <a:solidFill>
+                  <a:srgbClr val="00D4AA"/>
+                </a:solidFill>
+                <a:latin typeface="JetBrains Mono"/>
+              </a:rPr>
+              <a:t>max_queue_size=2048</a:t>
+            </a:r>
+            <a:r>
+              <a:rPr sz="1800" b="0">
+                <a:solidFill>
+                  <a:srgbClr val="FFFFFF"/>
+                </a:solidFill>
+                <a:latin typeface="Inter"/>
+              </a:rPr>
+              <a:t>; overflow drops, never blocks</a:t>
             </a:r>
           </a:p>
           <a:p>
@@ -10069,7 +10627,7 @@
                 </a:solidFill>
                 <a:latin typeface="JetBrains Mono"/>
               </a:rPr>
-              <a:t>OFFLINE=1 make replay</a:t>
+              <a:t>OTLPSpanExporter(timeout=5)</a:t>
             </a:r>
             <a:r>
               <a:rPr sz="1800" b="0">
@@ -10078,7 +10636,25 @@
                 </a:solidFill>
                 <a:latin typeface="Inter"/>
               </a:rPr>
-              <a:t>: a day of traffic visible in Langfuse and on the Grafana Atlas Ops dashboard</a:t>
+              <a:t> and </a:t>
+            </a:r>
+            <a:r>
+              <a:rPr sz="1656" b="0">
+                <a:solidFill>
+                  <a:srgbClr val="00D4AA"/>
+                </a:solidFill>
+                <a:latin typeface="JetBrains Mono"/>
+              </a:rPr>
+              <a:t>export_timeout_millis=5000</a:t>
+            </a:r>
+            <a:r>
+              <a:rPr sz="1800" b="0">
+                <a:solidFill>
+                  <a:srgbClr val="FFFFFF"/>
+                </a:solidFill>
+                <a:latin typeface="Inter"/>
+              </a:rPr>
+              <a:t>: a dead endpoint costs the background thread 5 s, not the request</a:t>
             </a:r>
           </a:p>
           <a:p>
@@ -10096,13 +10672,22 @@
               <a:buChar char="•"/>
             </a:pPr>
             <a:r>
+              <a:rPr sz="1656" b="0">
+                <a:solidFill>
+                  <a:srgbClr val="00D4AA"/>
+                </a:solidFill>
+                <a:latin typeface="JetBrains Mono"/>
+              </a:rPr>
+              <a:t>SafeSpanExporter</a:t>
+            </a:r>
+            <a:r>
               <a:rPr sz="1800" b="0">
                 <a:solidFill>
                   <a:srgbClr val="FFFFFF"/>
                 </a:solidFill>
                 <a:latin typeface="Inter"/>
               </a:rPr>
-              <a:t>Proof of masking: a tool span in Langfuse shows a hash, not a payload</a:t>
+              <a:t>: exceptions become a warning and a counter, never a raise</a:t>
             </a:r>
           </a:p>
           <a:p>
@@ -10126,7 +10711,43 @@
                 </a:solidFill>
                 <a:latin typeface="Inter"/>
               </a:rPr>
-              <a:t>Proof of tail sampling: every error and every &gt;4 s trace present; normal traffic sampled</a:t>
+              <a:t>Langfuse client: </a:t>
+            </a:r>
+            <a:r>
+              <a:rPr sz="1656" b="0">
+                <a:solidFill>
+                  <a:srgbClr val="00D4AA"/>
+                </a:solidFill>
+                <a:latin typeface="JetBrains Mono"/>
+              </a:rPr>
+              <a:t>flush_at=50</a:t>
+            </a:r>
+            <a:r>
+              <a:rPr sz="1800" b="0">
+                <a:solidFill>
+                  <a:srgbClr val="FFFFFF"/>
+                </a:solidFill>
+                <a:latin typeface="Inter"/>
+              </a:rPr>
+              <a:t>, </a:t>
+            </a:r>
+            <a:r>
+              <a:rPr sz="1656" b="0">
+                <a:solidFill>
+                  <a:srgbClr val="00D4AA"/>
+                </a:solidFill>
+                <a:latin typeface="JetBrains Mono"/>
+              </a:rPr>
+              <a:t>flush_interval=2.0</a:t>
+            </a:r>
+            <a:r>
+              <a:rPr sz="1800" b="0">
+                <a:solidFill>
+                  <a:srgbClr val="FFFFFF"/>
+                </a:solidFill>
+                <a:latin typeface="Inter"/>
+              </a:rPr>
+              <a:t>, same idea</a:t>
             </a:r>
           </a:p>
         </p:txBody>
@@ -10186,7 +10807,7 @@
                 </a:solidFill>
                 <a:latin typeface="Inter"/>
               </a:rPr>
-              <a:t>AI Agent Observability &amp; Cost Control · Section 13 · Lecture 13.6</a:t>
+              <a:t>AI Agent Observability &amp; Cost Control · Section 13 · Lecture 13.5</a:t>
             </a:r>
           </a:p>
         </p:txBody>
@@ -10225,7 +10846,7 @@
                 </a:solidFill>
                 <a:latin typeface="Inter"/>
               </a:rPr>
-              <a:t>Lab 7 checklist (2/2)</a:t>
+              <a:t>Two ways to turn a telemetry outage into a user outage</a:t>
             </a:r>
           </a:p>
         </p:txBody>
@@ -10299,7 +10920,7 @@
                 <a:spcPct val="120000"/>
               </a:lnSpc>
               <a:spcAft>
-                <a:spcPts val="1539"/>
+                <a:spcPts val="1260"/>
               </a:spcAft>
               <a:buClr>
                 <a:srgbClr val="00D4AA"/>
@@ -10308,22 +10929,40 @@
               <a:buChar char="•"/>
             </a:pPr>
             <a:r>
-              <a:rPr sz="2024" b="0">
+              <a:rPr sz="1656" b="0">
                 <a:solidFill>
                   <a:srgbClr val="00D4AA"/>
                 </a:solidFill>
                 <a:latin typeface="JetBrains Mono"/>
               </a:rPr>
-              <a:t>make budget-check</a:t>
-            </a:r>
-            <a:r>
-              <a:rPr sz="2200" b="0">
+              <a:t>SimpleSpanProcessor</a:t>
+            </a:r>
+            <a:r>
+              <a:rPr sz="1800" b="0">
                 <a:solidFill>
                   <a:srgbClr val="FFFFFF"/>
                 </a:solidFill>
                 <a:latin typeface="Inter"/>
               </a:rPr>
-              <a:t> green locally; CI run green on a branch</a:t>
+              <a:t> (</a:t>
+            </a:r>
+            <a:r>
+              <a:rPr sz="1656" b="0">
+                <a:solidFill>
+                  <a:srgbClr val="00D4AA"/>
+                </a:solidFill>
+                <a:latin typeface="JetBrains Mono"/>
+              </a:rPr>
+              <a:t>batch=False</a:t>
+            </a:r>
+            <a:r>
+              <a:rPr sz="1800" b="0">
+                <a:solidFill>
+                  <a:srgbClr val="FFFFFF"/>
+                </a:solidFill>
+                <a:latin typeface="Inter"/>
+              </a:rPr>
+              <a:t>): exports synchronously inside the request; a dead backend adds the full timeout to every response</a:t>
             </a:r>
           </a:p>
           <a:p>
@@ -10332,7 +10971,7 @@
                 <a:spcPct val="120000"/>
               </a:lnSpc>
               <a:spcAft>
-                <a:spcPts val="1539"/>
+                <a:spcPts val="1260"/>
               </a:spcAft>
               <a:buClr>
                 <a:srgbClr val="00D4AA"/>
@@ -10341,49 +10980,37 @@
               <a:buChar char="•"/>
             </a:pPr>
             <a:r>
-              <a:rPr sz="2200" b="0">
+              <a:rPr sz="1800" b="0">
                 <a:solidFill>
                   <a:srgbClr val="FFFFFF"/>
                 </a:solidFill>
                 <a:latin typeface="Inter"/>
               </a:rPr>
-              <a:t>Chaos: stop Langfuse during a replay; Atlas p95 unchanged; </a:t>
-            </a:r>
-            <a:r>
-              <a:rPr sz="2024" b="0">
-                <a:solidFill>
-                  <a:srgbClr val="00D4AA"/>
-                </a:solidFill>
-                <a:latin typeface="JetBrains Mono"/>
-              </a:rPr>
-              <a:t>atlas_telemetry_export_failures_total</a:t>
-            </a:r>
-            <a:r>
-              <a:rPr sz="2200" b="0">
+              <a:t>No timeout, or a 30 s default, on the exporter: the background thread hangs, the queue fills, and shutdown blocks</a:t>
+            </a:r>
+          </a:p>
+          <a:p>
+            <a:pPr marL="292608" indent="-292608">
+              <a:lnSpc>
+                <a:spcPct val="120000"/>
+              </a:lnSpc>
+              <a:spcAft>
+                <a:spcPts val="1260"/>
+              </a:spcAft>
+              <a:buClr>
+                <a:srgbClr val="00D4AA"/>
+              </a:buClr>
+              <a:buFont typeface="Inter"/>
+              <a:buChar char="•"/>
+            </a:pPr>
+            <a:r>
+              <a:rPr sz="1800" b="0">
                 <a:solidFill>
                   <a:srgbClr val="FFFFFF"/>
                 </a:solidFill>
                 <a:latin typeface="Inter"/>
               </a:rPr>
-              <a:t> rises and </a:t>
-            </a:r>
-            <a:r>
-              <a:rPr sz="2024" b="0">
-                <a:solidFill>
-                  <a:srgbClr val="00D4AA"/>
-                </a:solidFill>
-                <a:latin typeface="JetBrains Mono"/>
-              </a:rPr>
-              <a:t>/healthz</a:t>
-            </a:r>
-            <a:r>
-              <a:rPr sz="2200" b="0">
-                <a:solidFill>
-                  <a:srgbClr val="FFFFFF"/>
-                </a:solidFill>
-                <a:latin typeface="Inter"/>
-              </a:rPr>
-              <a:t> shows the exporter unhealthy</a:t>
+              <a:t>Both are one-line mistakes that pass every unit test</a:t>
             </a:r>
           </a:p>
         </p:txBody>
@@ -10443,7 +11070,7 @@
                 </a:solidFill>
                 <a:latin typeface="Inter"/>
               </a:rPr>
-              <a:t>AI Agent Observability &amp; Cost Control · Section 13 · Lecture 13.6</a:t>
+              <a:t>AI Agent Observability &amp; Cost Control · Section 13 · Lecture 13.5</a:t>
             </a:r>
           </a:p>
         </p:txBody>
@@ -10456,8 +11083,8 @@
         </p:nvSpPr>
         <p:spPr>
           <a:xfrm>
-            <a:off x="457200" y="411480"/>
-            <a:ext cx="11247120" cy="868680"/>
+            <a:off x="1371600" y="822960"/>
+            <a:ext cx="9418320" cy="457200"/>
           </a:xfrm>
           <a:prstGeom prst="rect">
             <a:avLst/>
@@ -10470,11 +11097,42 @@
           </a:bodyPr>
           <a:lstStyle/>
           <a:p>
-            <a:pPr>
-              <a:lnSpc>
-                <a:spcPct val="110000"/>
-              </a:lnSpc>
-            </a:pPr>
+            <a:pPr algn="ctr"/>
+            <a:r>
+              <a:rPr sz="1200" b="1">
+                <a:solidFill>
+                  <a:srgbClr val="00D4AA"/>
+                </a:solidFill>
+                <a:latin typeface="Inter"/>
+              </a:rPr>
+              <a:t>RECAP</a:t>
+            </a:r>
+          </a:p>
+        </p:txBody>
+      </p:sp>
+      <p:sp>
+        <p:nvSpPr>
+          <p:cNvPr id="4" name="TextBox 3"/>
+          <p:cNvSpPr txBox="1"/>
+          <p:nvPr/>
+        </p:nvSpPr>
+        <p:spPr>
+          <a:xfrm>
+            <a:off x="1371600" y="1234440"/>
+            <a:ext cx="9418320" cy="822960"/>
+          </a:xfrm>
+          <a:prstGeom prst="rect">
+            <a:avLst/>
+          </a:prstGeom>
+          <a:noFill/>
+        </p:spPr>
+        <p:txBody>
+          <a:bodyPr wrap="square" lIns="45720" rIns="45720" tIns="27432" bIns="27432" anchor="t">
+            <a:spAutoFit/>
+          </a:bodyPr>
+          <a:lstStyle/>
+          <a:p>
+            <a:pPr algn="ctr"/>
             <a:r>
               <a:rPr sz="2600" b="1">
                 <a:solidFill>
@@ -10482,27 +11140,29 @@
                 </a:solidFill>
                 <a:latin typeface="Inter"/>
               </a:rPr>
-              <a:t>Deliverables</a:t>
-            </a:r>
-          </a:p>
-        </p:txBody>
-      </p:sp>
-      <p:sp>
-        <p:nvSpPr>
-          <p:cNvPr id="4" name="Rectangle 3"/>
+              <a:t>Key takeaways</a:t>
+            </a:r>
+          </a:p>
+        </p:txBody>
+      </p:sp>
+      <p:sp>
+        <p:nvSpPr>
+          <p:cNvPr id="5" name="Rounded Rectangle 4"/>
           <p:cNvSpPr/>
           <p:nvPr/>
         </p:nvSpPr>
         <p:spPr>
           <a:xfrm>
-            <a:off x="502920" y="1024128"/>
-            <a:ext cx="822960" cy="54864"/>
-          </a:xfrm>
-          <a:prstGeom prst="rect">
-            <a:avLst/>
+            <a:off x="2011680" y="2514600"/>
+            <a:ext cx="8138160" cy="777240"/>
+          </a:xfrm>
+          <a:prstGeom prst="roundRect">
+            <a:avLst>
+              <a:gd name="adj" fmla="val 6588"/>
+            </a:avLst>
           </a:prstGeom>
           <a:solidFill>
-            <a:srgbClr val="00D4AA"/>
+            <a:srgbClr val="1A2742"/>
           </a:solidFill>
           <a:ln>
             <a:noFill/>
@@ -10531,48 +11191,284 @@
       </p:sp>
       <p:sp>
         <p:nvSpPr>
-          <p:cNvPr id="5" name="TextBox 4"/>
-          <p:cNvSpPr txBox="1"/>
-          <p:nvPr/>
-        </p:nvSpPr>
-        <p:spPr>
-          <a:xfrm>
-            <a:off x="640080" y="1417320"/>
-            <a:ext cx="10881360" cy="4892040"/>
-          </a:xfrm>
-          <a:prstGeom prst="rect">
-            <a:avLst/>
-          </a:prstGeom>
-          <a:noFill/>
-        </p:spPr>
-        <p:txBody>
-          <a:bodyPr wrap="square" lIns="45720" rIns="45720" tIns="27432" bIns="27432" anchor="t">
-            <a:spAutoFit/>
-          </a:bodyPr>
-          <a:lstStyle/>
-          <a:p>
-            <a:pPr marL="292608" indent="-292608">
-              <a:lnSpc>
-                <a:spcPct val="120000"/>
-              </a:lnSpc>
-              <a:spcAft>
-                <a:spcPts val="1260"/>
-              </a:spcAft>
-              <a:buClr>
-                <a:srgbClr val="00D4AA"/>
-              </a:buClr>
-              <a:buFont typeface="Inter"/>
-              <a:buChar char="•"/>
-            </a:pPr>
-            <a:r>
-              <a:rPr sz="1800" b="0">
+          <p:cNvPr id="6" name="TextBox 5"/>
+          <p:cNvSpPr txBox="1"/>
+          <p:nvPr/>
+        </p:nvSpPr>
+        <p:spPr>
+          <a:xfrm>
+            <a:off x="2194560" y="2514600"/>
+            <a:ext cx="548640" cy="777240"/>
+          </a:xfrm>
+          <a:prstGeom prst="rect">
+            <a:avLst/>
+          </a:prstGeom>
+          <a:noFill/>
+        </p:spPr>
+        <p:txBody>
+          <a:bodyPr wrap="square" lIns="45720" rIns="45720" tIns="27432" bIns="27432" anchor="ctr">
+            <a:spAutoFit/>
+          </a:bodyPr>
+          <a:lstStyle/>
+          <a:p>
+            <a:r>
+              <a:rPr sz="2200" b="1">
+                <a:solidFill>
+                  <a:srgbClr val="00D4AA"/>
+                </a:solidFill>
+                <a:latin typeface="Inter"/>
+              </a:rPr>
+              <a:t>✓</a:t>
+            </a:r>
+          </a:p>
+        </p:txBody>
+      </p:sp>
+      <p:sp>
+        <p:nvSpPr>
+          <p:cNvPr id="7" name="TextBox 6"/>
+          <p:cNvSpPr txBox="1"/>
+          <p:nvPr/>
+        </p:nvSpPr>
+        <p:spPr>
+          <a:xfrm>
+            <a:off x="2788920" y="2514600"/>
+            <a:ext cx="7223760" cy="777240"/>
+          </a:xfrm>
+          <a:prstGeom prst="rect">
+            <a:avLst/>
+          </a:prstGeom>
+          <a:noFill/>
+        </p:spPr>
+        <p:txBody>
+          <a:bodyPr wrap="square" lIns="45720" rIns="45720" tIns="27432" bIns="27432" anchor="ctr">
+            <a:spAutoFit/>
+          </a:bodyPr>
+          <a:lstStyle/>
+          <a:p>
+            <a:r>
+              <a:rPr sz="1800" b="1">
                 <a:solidFill>
                   <a:srgbClr val="FFFFFF"/>
                 </a:solidFill>
                 <a:latin typeface="Inter"/>
               </a:rPr>
-              <a:t>Screenshot: </a:t>
-            </a:r>
+              <a:t>Batch processor, bounded queue, 5 s timeouts</a:t>
+            </a:r>
+          </a:p>
+        </p:txBody>
+      </p:sp>
+      <p:sp>
+        <p:nvSpPr>
+          <p:cNvPr id="8" name="Rounded Rectangle 7"/>
+          <p:cNvSpPr/>
+          <p:nvPr/>
+        </p:nvSpPr>
+        <p:spPr>
+          <a:xfrm>
+            <a:off x="2011680" y="3474720"/>
+            <a:ext cx="8138160" cy="777240"/>
+          </a:xfrm>
+          <a:prstGeom prst="roundRect">
+            <a:avLst>
+              <a:gd name="adj" fmla="val 6588"/>
+            </a:avLst>
+          </a:prstGeom>
+          <a:solidFill>
+            <a:srgbClr val="1A2742"/>
+          </a:solidFill>
+          <a:ln>
+            <a:noFill/>
+          </a:ln>
+          <a:effectLst/>
+        </p:spPr>
+        <p:style>
+          <a:lnRef idx="1">
+            <a:schemeClr val="accent1"/>
+          </a:lnRef>
+          <a:fillRef idx="3">
+            <a:schemeClr val="accent1"/>
+          </a:fillRef>
+          <a:effectRef idx="2">
+            <a:schemeClr val="accent1"/>
+          </a:effectRef>
+          <a:fontRef idx="minor">
+            <a:schemeClr val="lt1"/>
+          </a:fontRef>
+        </p:style>
+        <p:txBody>
+          <a:bodyPr rtlCol="0" anchor="ctr"/>
+          <a:lstStyle/>
+          <a:p/>
+        </p:txBody>
+      </p:sp>
+      <p:sp>
+        <p:nvSpPr>
+          <p:cNvPr id="9" name="TextBox 8"/>
+          <p:cNvSpPr txBox="1"/>
+          <p:nvPr/>
+        </p:nvSpPr>
+        <p:spPr>
+          <a:xfrm>
+            <a:off x="2194560" y="3474720"/>
+            <a:ext cx="548640" cy="777240"/>
+          </a:xfrm>
+          <a:prstGeom prst="rect">
+            <a:avLst/>
+          </a:prstGeom>
+          <a:noFill/>
+        </p:spPr>
+        <p:txBody>
+          <a:bodyPr wrap="square" lIns="45720" rIns="45720" tIns="27432" bIns="27432" anchor="ctr">
+            <a:spAutoFit/>
+          </a:bodyPr>
+          <a:lstStyle/>
+          <a:p>
+            <a:r>
+              <a:rPr sz="2200" b="1">
+                <a:solidFill>
+                  <a:srgbClr val="00D4AA"/>
+                </a:solidFill>
+                <a:latin typeface="Inter"/>
+              </a:rPr>
+              <a:t>✓</a:t>
+            </a:r>
+          </a:p>
+        </p:txBody>
+      </p:sp>
+      <p:sp>
+        <p:nvSpPr>
+          <p:cNvPr id="10" name="TextBox 9"/>
+          <p:cNvSpPr txBox="1"/>
+          <p:nvPr/>
+        </p:nvSpPr>
+        <p:spPr>
+          <a:xfrm>
+            <a:off x="2788920" y="3474720"/>
+            <a:ext cx="7223760" cy="777240"/>
+          </a:xfrm>
+          <a:prstGeom prst="rect">
+            <a:avLst/>
+          </a:prstGeom>
+          <a:noFill/>
+        </p:spPr>
+        <p:txBody>
+          <a:bodyPr wrap="square" lIns="45720" rIns="45720" tIns="27432" bIns="27432" anchor="ctr">
+            <a:spAutoFit/>
+          </a:bodyPr>
+          <a:lstStyle/>
+          <a:p>
+            <a:r>
+              <a:rPr sz="1800" b="1">
+                <a:solidFill>
+                  <a:srgbClr val="FFFFFF"/>
+                </a:solidFill>
+                <a:latin typeface="Inter"/>
+              </a:rPr>
+              <a:t>Failures: a log line, a counter, a health field</a:t>
+            </a:r>
+          </a:p>
+        </p:txBody>
+      </p:sp>
+      <p:sp>
+        <p:nvSpPr>
+          <p:cNvPr id="11" name="Rounded Rectangle 10"/>
+          <p:cNvSpPr/>
+          <p:nvPr/>
+        </p:nvSpPr>
+        <p:spPr>
+          <a:xfrm>
+            <a:off x="2011680" y="4434840"/>
+            <a:ext cx="8138160" cy="777240"/>
+          </a:xfrm>
+          <a:prstGeom prst="roundRect">
+            <a:avLst>
+              <a:gd name="adj" fmla="val 6588"/>
+            </a:avLst>
+          </a:prstGeom>
+          <a:solidFill>
+            <a:srgbClr val="1A2742"/>
+          </a:solidFill>
+          <a:ln>
+            <a:noFill/>
+          </a:ln>
+          <a:effectLst/>
+        </p:spPr>
+        <p:style>
+          <a:lnRef idx="1">
+            <a:schemeClr val="accent1"/>
+          </a:lnRef>
+          <a:fillRef idx="3">
+            <a:schemeClr val="accent1"/>
+          </a:fillRef>
+          <a:effectRef idx="2">
+            <a:schemeClr val="accent1"/>
+          </a:effectRef>
+          <a:fontRef idx="minor">
+            <a:schemeClr val="lt1"/>
+          </a:fontRef>
+        </p:style>
+        <p:txBody>
+          <a:bodyPr rtlCol="0" anchor="ctr"/>
+          <a:lstStyle/>
+          <a:p/>
+        </p:txBody>
+      </p:sp>
+      <p:sp>
+        <p:nvSpPr>
+          <p:cNvPr id="12" name="TextBox 11"/>
+          <p:cNvSpPr txBox="1"/>
+          <p:nvPr/>
+        </p:nvSpPr>
+        <p:spPr>
+          <a:xfrm>
+            <a:off x="2194560" y="4434840"/>
+            <a:ext cx="548640" cy="777240"/>
+          </a:xfrm>
+          <a:prstGeom prst="rect">
+            <a:avLst/>
+          </a:prstGeom>
+          <a:noFill/>
+        </p:spPr>
+        <p:txBody>
+          <a:bodyPr wrap="square" lIns="45720" rIns="45720" tIns="27432" bIns="27432" anchor="ctr">
+            <a:spAutoFit/>
+          </a:bodyPr>
+          <a:lstStyle/>
+          <a:p>
+            <a:r>
+              <a:rPr sz="2200" b="1">
+                <a:solidFill>
+                  <a:srgbClr val="00D4AA"/>
+                </a:solidFill>
+                <a:latin typeface="Inter"/>
+              </a:rPr>
+              <a:t>✓</a:t>
+            </a:r>
+          </a:p>
+        </p:txBody>
+      </p:sp>
+      <p:sp>
+        <p:nvSpPr>
+          <p:cNvPr id="13" name="TextBox 12"/>
+          <p:cNvSpPr txBox="1"/>
+          <p:nvPr/>
+        </p:nvSpPr>
+        <p:spPr>
+          <a:xfrm>
+            <a:off x="2788920" y="4434840"/>
+            <a:ext cx="7223760" cy="777240"/>
+          </a:xfrm>
+          <a:prstGeom prst="rect">
+            <a:avLst/>
+          </a:prstGeom>
+          <a:noFill/>
+        </p:spPr>
+        <p:txBody>
+          <a:bodyPr wrap="square" lIns="45720" rIns="45720" tIns="27432" bIns="27432" anchor="ctr">
+            <a:spAutoFit/>
+          </a:bodyPr>
+          <a:lstStyle/>
+          <a:p>
             <a:r>
               <a:rPr sz="1656" b="0">
                 <a:solidFill>
@@ -10580,121 +11476,16 @@
                 </a:solidFill>
                 <a:latin typeface="JetBrains Mono"/>
               </a:rPr>
-              <a:t>docker compose ps</a:t>
-            </a:r>
-            <a:r>
-              <a:rPr sz="1800" b="0">
+              <a:t>batch=False</a:t>
+            </a:r>
+            <a:r>
+              <a:rPr sz="1800" b="1">
                 <a:solidFill>
                   <a:srgbClr val="FFFFFF"/>
                 </a:solidFill>
                 <a:latin typeface="Inter"/>
               </a:rPr>
-              <a:t> with all services healthy</a:t>
-            </a:r>
-          </a:p>
-          <a:p>
-            <a:pPr marL="292608" indent="-292608">
-              <a:lnSpc>
-                <a:spcPct val="120000"/>
-              </a:lnSpc>
-              <a:spcAft>
-                <a:spcPts val="1260"/>
-              </a:spcAft>
-              <a:buClr>
-                <a:srgbClr val="00D4AA"/>
-              </a:buClr>
-              <a:buFont typeface="Inter"/>
-              <a:buChar char="•"/>
-            </a:pPr>
-            <a:r>
-              <a:rPr sz="1800" b="0">
-                <a:solidFill>
-                  <a:srgbClr val="FFFFFF"/>
-                </a:solidFill>
-                <a:latin typeface="Inter"/>
-              </a:rPr>
-              <a:t>Screenshot: Grafana Atlas Ops dashboard with replayed data</a:t>
-            </a:r>
-          </a:p>
-          <a:p>
-            <a:pPr marL="292608" indent="-292608">
-              <a:lnSpc>
-                <a:spcPct val="120000"/>
-              </a:lnSpc>
-              <a:spcAft>
-                <a:spcPts val="1260"/>
-              </a:spcAft>
-              <a:buClr>
-                <a:srgbClr val="00D4AA"/>
-              </a:buClr>
-              <a:buFont typeface="Inter"/>
-              <a:buChar char="•"/>
-            </a:pPr>
-            <a:r>
-              <a:rPr sz="1800" b="0">
-                <a:solidFill>
-                  <a:srgbClr val="FFFFFF"/>
-                </a:solidFill>
-                <a:latin typeface="Inter"/>
-              </a:rPr>
-              <a:t>Screenshot: a masked tool span in Langfuse</a:t>
-            </a:r>
-          </a:p>
-          <a:p>
-            <a:pPr marL="292608" indent="-292608">
-              <a:lnSpc>
-                <a:spcPct val="120000"/>
-              </a:lnSpc>
-              <a:spcAft>
-                <a:spcPts val="1260"/>
-              </a:spcAft>
-              <a:buClr>
-                <a:srgbClr val="00D4AA"/>
-              </a:buClr>
-              <a:buFont typeface="Inter"/>
-              <a:buChar char="•"/>
-            </a:pPr>
-            <a:r>
-              <a:rPr sz="1800" b="0">
-                <a:solidFill>
-                  <a:srgbClr val="FFFFFF"/>
-                </a:solidFill>
-                <a:latin typeface="Inter"/>
-              </a:rPr>
-              <a:t>Link or screenshot: green CI run including </a:t>
-            </a:r>
-            <a:r>
-              <a:rPr sz="1656" b="0">
-                <a:solidFill>
-                  <a:srgbClr val="00D4AA"/>
-                </a:solidFill>
-                <a:latin typeface="JetBrains Mono"/>
-              </a:rPr>
-              <a:t>budget-gate</a:t>
-            </a:r>
-          </a:p>
-          <a:p>
-            <a:pPr marL="292608" indent="-292608">
-              <a:lnSpc>
-                <a:spcPct val="120000"/>
-              </a:lnSpc>
-              <a:spcAft>
-                <a:spcPts val="1260"/>
-              </a:spcAft>
-              <a:buClr>
-                <a:srgbClr val="00D4AA"/>
-              </a:buClr>
-              <a:buFont typeface="Inter"/>
-              <a:buChar char="•"/>
-            </a:pPr>
-            <a:r>
-              <a:rPr sz="1800" b="0">
-                <a:solidFill>
-                  <a:srgbClr val="FFFFFF"/>
-                </a:solidFill>
-                <a:latin typeface="Inter"/>
-              </a:rPr>
-              <a:t>Three sentences: what you would change before running this for a real team</a:t>
+              <a:t> turns an outage into latency</a:t>
             </a:r>
           </a:p>
         </p:txBody>
@@ -10754,7 +11545,7 @@
                 </a:solidFill>
                 <a:latin typeface="Inter"/>
               </a:rPr>
-              <a:t>AI Agent Observability &amp; Cost Control · Section 13 · Lecture 13.6</a:t>
+              <a:t>AI Agent Observability &amp; Cost Control · Section 13 · Lecture 13.5</a:t>
             </a:r>
           </a:p>
         </p:txBody>
@@ -10767,8 +11558,42 @@
         </p:nvSpPr>
         <p:spPr>
           <a:xfrm>
-            <a:off x="457200" y="411480"/>
-            <a:ext cx="11247120" cy="868680"/>
+            <a:off x="2377440" y="2286000"/>
+            <a:ext cx="1097280" cy="1097280"/>
+          </a:xfrm>
+          <a:prstGeom prst="rect">
+            <a:avLst/>
+          </a:prstGeom>
+          <a:noFill/>
+        </p:spPr>
+        <p:txBody>
+          <a:bodyPr wrap="square" lIns="45720" rIns="45720" tIns="27432" bIns="27432" anchor="ctr">
+            <a:spAutoFit/>
+          </a:bodyPr>
+          <a:lstStyle/>
+          <a:p>
+            <a:r>
+              <a:rPr sz="5400" b="1">
+                <a:solidFill>
+                  <a:srgbClr val="00D4AA"/>
+                </a:solidFill>
+                <a:latin typeface="Inter"/>
+              </a:rPr>
+              <a:t>→</a:t>
+            </a:r>
+          </a:p>
+        </p:txBody>
+      </p:sp>
+      <p:sp>
+        <p:nvSpPr>
+          <p:cNvPr id="4" name="TextBox 3"/>
+          <p:cNvSpPr txBox="1"/>
+          <p:nvPr/>
+        </p:nvSpPr>
+        <p:spPr>
+          <a:xfrm>
+            <a:off x="3566160" y="2148840"/>
+            <a:ext cx="7315200" cy="457200"/>
           </a:xfrm>
           <a:prstGeom prst="rect">
             <a:avLst/>
@@ -10781,11 +11606,40 @@
           </a:bodyPr>
           <a:lstStyle/>
           <a:p>
-            <a:pPr>
-              <a:lnSpc>
-                <a:spcPct val="110000"/>
-              </a:lnSpc>
-            </a:pPr>
+            <a:r>
+              <a:rPr sz="1400" b="0">
+                <a:solidFill>
+                  <a:srgbClr val="94A3B8"/>
+                </a:solidFill>
+                <a:latin typeface="Inter"/>
+              </a:rPr>
+              <a:t>Next up:</a:t>
+            </a:r>
+          </a:p>
+        </p:txBody>
+      </p:sp>
+      <p:sp>
+        <p:nvSpPr>
+          <p:cNvPr id="5" name="TextBox 4"/>
+          <p:cNvSpPr txBox="1"/>
+          <p:nvPr/>
+        </p:nvSpPr>
+        <p:spPr>
+          <a:xfrm>
+            <a:off x="3566160" y="2560320"/>
+            <a:ext cx="7315200" cy="1097280"/>
+          </a:xfrm>
+          <a:prstGeom prst="rect">
+            <a:avLst/>
+          </a:prstGeom>
+          <a:noFill/>
+        </p:spPr>
+        <p:txBody>
+          <a:bodyPr wrap="square" lIns="45720" rIns="45720" tIns="27432" bIns="27432" anchor="t">
+            <a:spAutoFit/>
+          </a:bodyPr>
+          <a:lstStyle/>
+          <a:p>
             <a:r>
               <a:rPr sz="2600" b="1">
                 <a:solidFill>
@@ -10793,63 +11647,21 @@
                 </a:solidFill>
                 <a:latin typeface="Inter"/>
               </a:rPr>
-              <a:t>Where students get stuck</a:t>
-            </a:r>
-          </a:p>
-        </p:txBody>
-      </p:sp>
-      <p:sp>
-        <p:nvSpPr>
-          <p:cNvPr id="4" name="Rectangle 3"/>
-          <p:cNvSpPr/>
-          <p:nvPr/>
-        </p:nvSpPr>
-        <p:spPr>
-          <a:xfrm>
-            <a:off x="502920" y="1024128"/>
-            <a:ext cx="822960" cy="54864"/>
-          </a:xfrm>
-          <a:prstGeom prst="rect">
-            <a:avLst/>
-          </a:prstGeom>
-          <a:solidFill>
-            <a:srgbClr val="00D4AA"/>
-          </a:solidFill>
-          <a:ln>
-            <a:noFill/>
-          </a:ln>
-          <a:effectLst/>
-        </p:spPr>
-        <p:style>
-          <a:lnRef idx="1">
-            <a:schemeClr val="accent1"/>
-          </a:lnRef>
-          <a:fillRef idx="3">
-            <a:schemeClr val="accent1"/>
-          </a:fillRef>
-          <a:effectRef idx="2">
-            <a:schemeClr val="accent1"/>
-          </a:effectRef>
-          <a:fontRef idx="minor">
-            <a:schemeClr val="lt1"/>
-          </a:fontRef>
-        </p:style>
-        <p:txBody>
-          <a:bodyPr rtlCol="0" anchor="ctr"/>
-          <a:lstStyle/>
-          <a:p/>
-        </p:txBody>
-      </p:sp>
-      <p:sp>
-        <p:nvSpPr>
-          <p:cNvPr id="5" name="TextBox 4"/>
-          <p:cNvSpPr txBox="1"/>
-          <p:nvPr/>
-        </p:nvSpPr>
-        <p:spPr>
-          <a:xfrm>
-            <a:off x="640080" y="1417320"/>
-            <a:ext cx="10881360" cy="4892040"/>
+              <a:t>Lab 7: Self-hosted stack end to end</a:t>
+            </a:r>
+          </a:p>
+        </p:txBody>
+      </p:sp>
+      <p:sp>
+        <p:nvSpPr>
+          <p:cNvPr id="6" name="TextBox 5"/>
+          <p:cNvSpPr txBox="1"/>
+          <p:nvPr/>
+        </p:nvSpPr>
+        <p:spPr>
+          <a:xfrm>
+            <a:off x="3566160" y="3703320"/>
+            <a:ext cx="7315200" cy="1097280"/>
           </a:xfrm>
           <a:prstGeom prst="rect">
             <a:avLst/>
@@ -10862,144 +11674,14 @@
           </a:bodyPr>
           <a:lstStyle/>
           <a:p>
-            <a:pPr marL="292608" indent="-292608">
-              <a:lnSpc>
-                <a:spcPct val="120000"/>
-              </a:lnSpc>
-              <a:spcAft>
-                <a:spcPts val="1260"/>
-              </a:spcAft>
-              <a:buClr>
-                <a:srgbClr val="00D4AA"/>
-              </a:buClr>
-              <a:buFont typeface="Inter"/>
-              <a:buChar char="•"/>
-            </a:pPr>
-            <a:r>
-              <a:rPr sz="1800" b="0">
-                <a:solidFill>
-                  <a:srgbClr val="FFFFFF"/>
-                </a:solidFill>
-                <a:latin typeface="Inter"/>
-              </a:rPr>
-              <a:t>ClickHouse restarting: raise Docker memory to 6 GB or more</a:t>
-            </a:r>
-          </a:p>
-          <a:p>
-            <a:pPr marL="292608" indent="-292608">
-              <a:lnSpc>
-                <a:spcPct val="120000"/>
-              </a:lnSpc>
-              <a:spcAft>
-                <a:spcPts val="1260"/>
-              </a:spcAft>
-              <a:buClr>
-                <a:srgbClr val="00D4AA"/>
-              </a:buClr>
-              <a:buFont typeface="Inter"/>
-              <a:buChar char="•"/>
-            </a:pPr>
-            <a:r>
-              <a:rPr sz="1800" b="0">
-                <a:solidFill>
-                  <a:srgbClr val="FFFFFF"/>
-                </a:solidFill>
-                <a:latin typeface="Inter"/>
-              </a:rPr>
-              <a:t>Traces in Collector logs but not in Langfuse: check the OTLP endpoint path and the basic auth header</a:t>
-            </a:r>
-          </a:p>
-          <a:p>
-            <a:pPr marL="292608" indent="-292608">
-              <a:lnSpc>
-                <a:spcPct val="120000"/>
-              </a:lnSpc>
-              <a:spcAft>
-                <a:spcPts val="1260"/>
-              </a:spcAft>
-              <a:buClr>
-                <a:srgbClr val="00D4AA"/>
-              </a:buClr>
-              <a:buFont typeface="Inter"/>
-              <a:buChar char="•"/>
-            </a:pPr>
-            <a:r>
-              <a:rPr sz="1800" b="0">
-                <a:solidFill>
-                  <a:srgbClr val="FFFFFF"/>
-                </a:solidFill>
-                <a:latin typeface="Inter"/>
-              </a:rPr>
-              <a:t>Grafana dashboard empty: Prometheus target for Atlas </a:t>
-            </a:r>
-            <a:r>
-              <a:rPr sz="1656" b="0">
-                <a:solidFill>
-                  <a:srgbClr val="00D4AA"/>
-                </a:solidFill>
-                <a:latin typeface="JetBrains Mono"/>
-              </a:rPr>
-              <a:t>/metrics</a:t>
-            </a:r>
-            <a:r>
-              <a:rPr sz="1800" b="0">
-                <a:solidFill>
-                  <a:srgbClr val="FFFFFF"/>
-                </a:solidFill>
-                <a:latin typeface="Inter"/>
-              </a:rPr>
-              <a:t> not scraping; check </a:t>
-            </a:r>
-            <a:r>
-              <a:rPr sz="1656" b="0">
-                <a:solidFill>
-                  <a:srgbClr val="00D4AA"/>
-                </a:solidFill>
-                <a:latin typeface="JetBrains Mono"/>
-              </a:rPr>
-              <a:t>docker compose logs prometheus</a:t>
-            </a:r>
-          </a:p>
-          <a:p>
-            <a:pPr marL="292608" indent="-292608">
-              <a:lnSpc>
-                <a:spcPct val="120000"/>
-              </a:lnSpc>
-              <a:spcAft>
-                <a:spcPts val="1260"/>
-              </a:spcAft>
-              <a:buClr>
-                <a:srgbClr val="00D4AA"/>
-              </a:buClr>
-              <a:buFont typeface="Inter"/>
-              <a:buChar char="•"/>
-            </a:pPr>
-            <a:r>
-              <a:rPr sz="1800" b="0">
-                <a:solidFill>
-                  <a:srgbClr val="FFFFFF"/>
-                </a:solidFill>
-                <a:latin typeface="Inter"/>
-              </a:rPr>
-              <a:t>Budget gate fails on a fresh clone: check </a:t>
-            </a:r>
-            <a:r>
-              <a:rPr sz="1656" b="0">
-                <a:solidFill>
-                  <a:srgbClr val="00D4AA"/>
-                </a:solidFill>
-                <a:latin typeface="JetBrains Mono"/>
-              </a:rPr>
-              <a:t>OFFLINE=1</a:t>
-            </a:r>
-            <a:r>
-              <a:rPr sz="1800" b="0">
-                <a:solidFill>
-                  <a:srgbClr val="FFFFFF"/>
-                </a:solidFill>
-                <a:latin typeface="Inter"/>
-              </a:rPr>
-              <a:t> and the seed; the baseline must be deterministic</a:t>
+            <a:r>
+              <a:rPr sz="1400" b="0">
+                <a:solidFill>
+                  <a:srgbClr val="94A3B8"/>
+                </a:solidFill>
+                <a:latin typeface="Inter"/>
+              </a:rPr>
+              <a:t>Next, Lab 7: the whole self-hosted stack running end to end on your machine, with the budget gate…</a:t>
             </a:r>
           </a:p>
         </p:txBody>
@@ -11072,8 +11754,158 @@
         </p:nvSpPr>
         <p:spPr>
           <a:xfrm>
-            <a:off x="2377440" y="2286000"/>
-            <a:ext cx="1097280" cy="1097280"/>
+            <a:off x="6675120" y="320040"/>
+            <a:ext cx="5074920" cy="548640"/>
+          </a:xfrm>
+          <a:prstGeom prst="rect">
+            <a:avLst/>
+          </a:prstGeom>
+          <a:noFill/>
+        </p:spPr>
+        <p:txBody>
+          <a:bodyPr wrap="square" lIns="45720" rIns="45720" tIns="27432" bIns="27432" anchor="t">
+            <a:spAutoFit/>
+          </a:bodyPr>
+          <a:lstStyle/>
+          <a:p>
+            <a:pPr algn="r"/>
+            <a:r>
+              <a:rPr sz="1000" b="0">
+                <a:solidFill>
+                  <a:srgbClr val="94A3B8"/>
+                </a:solidFill>
+                <a:latin typeface="Inter"/>
+              </a:rPr>
+              <a:t>SECTION 13 · DEPLOYING THE STACK AND CI BUDGET GATES</a:t>
+            </a:r>
+          </a:p>
+        </p:txBody>
+      </p:sp>
+      <p:sp>
+        <p:nvSpPr>
+          <p:cNvPr id="4" name="TextBox 3"/>
+          <p:cNvSpPr txBox="1"/>
+          <p:nvPr/>
+        </p:nvSpPr>
+        <p:spPr>
+          <a:xfrm>
+            <a:off x="914400" y="1417320"/>
+            <a:ext cx="10332720" cy="457200"/>
+          </a:xfrm>
+          <a:prstGeom prst="rect">
+            <a:avLst/>
+          </a:prstGeom>
+          <a:noFill/>
+        </p:spPr>
+        <p:txBody>
+          <a:bodyPr wrap="square" lIns="45720" rIns="45720" tIns="27432" bIns="27432" anchor="t">
+            <a:spAutoFit/>
+          </a:bodyPr>
+          <a:lstStyle/>
+          <a:p>
+            <a:r>
+              <a:rPr sz="1200" b="1">
+                <a:solidFill>
+                  <a:srgbClr val="00D4AA"/>
+                </a:solidFill>
+                <a:latin typeface="Inter"/>
+              </a:rPr>
+              <a:t>LECTURE 13.6</a:t>
+            </a:r>
+          </a:p>
+        </p:txBody>
+      </p:sp>
+      <p:sp>
+        <p:nvSpPr>
+          <p:cNvPr id="5" name="TextBox 4"/>
+          <p:cNvSpPr txBox="1"/>
+          <p:nvPr/>
+        </p:nvSpPr>
+        <p:spPr>
+          <a:xfrm>
+            <a:off x="914400" y="1874519"/>
+            <a:ext cx="10332720" cy="1645920"/>
+          </a:xfrm>
+          <a:prstGeom prst="rect">
+            <a:avLst/>
+          </a:prstGeom>
+          <a:noFill/>
+        </p:spPr>
+        <p:txBody>
+          <a:bodyPr wrap="square" lIns="45720" rIns="45720" tIns="27432" bIns="27432" anchor="t">
+            <a:spAutoFit/>
+          </a:bodyPr>
+          <a:lstStyle/>
+          <a:p>
+            <a:pPr>
+              <a:lnSpc>
+                <a:spcPct val="110000"/>
+              </a:lnSpc>
+            </a:pPr>
+            <a:r>
+              <a:rPr sz="3000" b="1">
+                <a:solidFill>
+                  <a:srgbClr val="FFFFFF"/>
+                </a:solidFill>
+                <a:latin typeface="Inter"/>
+              </a:rPr>
+              <a:t>Lab 7: Self-hosted stack end to end</a:t>
+            </a:r>
+          </a:p>
+        </p:txBody>
+      </p:sp>
+      <p:sp>
+        <p:nvSpPr>
+          <p:cNvPr id="6" name="Rectangle 5"/>
+          <p:cNvSpPr/>
+          <p:nvPr/>
+        </p:nvSpPr>
+        <p:spPr>
+          <a:xfrm>
+            <a:off x="914400" y="3794760"/>
+            <a:ext cx="64008" cy="1143000"/>
+          </a:xfrm>
+          <a:prstGeom prst="rect">
+            <a:avLst/>
+          </a:prstGeom>
+          <a:solidFill>
+            <a:srgbClr val="00D4AA"/>
+          </a:solidFill>
+          <a:ln>
+            <a:noFill/>
+          </a:ln>
+          <a:effectLst/>
+        </p:spPr>
+        <p:style>
+          <a:lnRef idx="1">
+            <a:schemeClr val="accent1"/>
+          </a:lnRef>
+          <a:fillRef idx="3">
+            <a:schemeClr val="accent1"/>
+          </a:fillRef>
+          <a:effectRef idx="2">
+            <a:schemeClr val="accent1"/>
+          </a:effectRef>
+          <a:fontRef idx="minor">
+            <a:schemeClr val="lt1"/>
+          </a:fontRef>
+        </p:style>
+        <p:txBody>
+          <a:bodyPr rtlCol="0" anchor="ctr"/>
+          <a:lstStyle/>
+          <a:p/>
+        </p:txBody>
+      </p:sp>
+      <p:sp>
+        <p:nvSpPr>
+          <p:cNvPr id="7" name="TextBox 6"/>
+          <p:cNvSpPr txBox="1"/>
+          <p:nvPr/>
+        </p:nvSpPr>
+        <p:spPr>
+          <a:xfrm>
+            <a:off x="1188720" y="3749039"/>
+            <a:ext cx="9692640" cy="1280160"/>
           </a:xfrm>
           <a:prstGeom prst="rect">
             <a:avLst/>
@@ -11086,116 +11918,19 @@
           </a:bodyPr>
           <a:lstStyle/>
           <a:p>
-            <a:r>
-              <a:rPr sz="5400" b="1">
-                <a:solidFill>
-                  <a:srgbClr val="00D4AA"/>
-                </a:solidFill>
-                <a:latin typeface="Inter"/>
-              </a:rPr>
-              <a:t>→</a:t>
-            </a:r>
-          </a:p>
-        </p:txBody>
-      </p:sp>
-      <p:sp>
-        <p:nvSpPr>
-          <p:cNvPr id="4" name="TextBox 3"/>
-          <p:cNvSpPr txBox="1"/>
-          <p:nvPr/>
-        </p:nvSpPr>
-        <p:spPr>
-          <a:xfrm>
-            <a:off x="3566160" y="2148840"/>
-            <a:ext cx="7315200" cy="457200"/>
-          </a:xfrm>
-          <a:prstGeom prst="rect">
-            <a:avLst/>
-          </a:prstGeom>
-          <a:noFill/>
-        </p:spPr>
-        <p:txBody>
-          <a:bodyPr wrap="square" lIns="45720" rIns="45720" tIns="27432" bIns="27432" anchor="t">
-            <a:spAutoFit/>
-          </a:bodyPr>
-          <a:lstStyle/>
-          <a:p>
-            <a:r>
-              <a:rPr sz="1400" b="0">
-                <a:solidFill>
-                  <a:srgbClr val="94A3B8"/>
-                </a:solidFill>
-                <a:latin typeface="Inter"/>
-              </a:rPr>
-              <a:t>Next up:</a:t>
-            </a:r>
-          </a:p>
-        </p:txBody>
-      </p:sp>
-      <p:sp>
-        <p:nvSpPr>
-          <p:cNvPr id="5" name="TextBox 4"/>
-          <p:cNvSpPr txBox="1"/>
-          <p:nvPr/>
-        </p:nvSpPr>
-        <p:spPr>
-          <a:xfrm>
-            <a:off x="3566160" y="2560320"/>
-            <a:ext cx="7315200" cy="1097280"/>
-          </a:xfrm>
-          <a:prstGeom prst="rect">
-            <a:avLst/>
-          </a:prstGeom>
-          <a:noFill/>
-        </p:spPr>
-        <p:txBody>
-          <a:bodyPr wrap="square" lIns="45720" rIns="45720" tIns="27432" bIns="27432" anchor="t">
-            <a:spAutoFit/>
-          </a:bodyPr>
-          <a:lstStyle/>
-          <a:p>
-            <a:r>
-              <a:rPr sz="2600" b="1">
-                <a:solidFill>
-                  <a:srgbClr val="FFFFFF"/>
-                </a:solidFill>
-                <a:latin typeface="Inter"/>
-              </a:rPr>
-              <a:t>Capstone brief and acceptance criteria</a:t>
-            </a:r>
-          </a:p>
-        </p:txBody>
-      </p:sp>
-      <p:sp>
-        <p:nvSpPr>
-          <p:cNvPr id="6" name="TextBox 5"/>
-          <p:cNvSpPr txBox="1"/>
-          <p:nvPr/>
-        </p:nvSpPr>
-        <p:spPr>
-          <a:xfrm>
-            <a:off x="3566160" y="3703320"/>
-            <a:ext cx="7315200" cy="1097280"/>
-          </a:xfrm>
-          <a:prstGeom prst="rect">
-            <a:avLst/>
-          </a:prstGeom>
-          <a:noFill/>
-        </p:spPr>
-        <p:txBody>
-          <a:bodyPr wrap="square" lIns="45720" rIns="45720" tIns="27432" bIns="27432" anchor="t">
-            <a:spAutoFit/>
-          </a:bodyPr>
-          <a:lstStyle/>
-          <a:p>
-            <a:r>
-              <a:rPr sz="1400" b="0">
-                <a:solidFill>
-                  <a:srgbClr val="94A3B8"/>
-                </a:solidFill>
-                <a:latin typeface="Inter"/>
-              </a:rPr>
-              <a:t>That completes Section 13.</a:t>
+            <a:pPr>
+              <a:lnSpc>
+                <a:spcPct val="130000"/>
+              </a:lnSpc>
+            </a:pPr>
+            <a:r>
+              <a:rPr sz="1600" b="0">
+                <a:solidFill>
+                  <a:srgbClr val="CBD5E1"/>
+                </a:solidFill>
+                <a:latin typeface="Inter"/>
+              </a:rPr>
+              <a:t>Run Langfuse, the Collector, Prometheus and Grafana locally and trace a replayed day through all of them.</a:t>
             </a:r>
           </a:p>
         </p:txBody>
@@ -11417,6 +12152,2354 @@
                 <a:latin typeface="Inter"/>
               </a:rPr>
               <a:t>Verify against the current Langfuse self-host compose</a:t>
+            </a:r>
+          </a:p>
+        </p:txBody>
+      </p:sp>
+    </p:spTree>
+  </p:cSld>
+  <p:clrMapOvr>
+    <a:masterClrMapping/>
+  </p:clrMapOvr>
+</p:sld>
+</file>
+
+<file path=ppt/slides/slide30.xml><?xml version="1.0" encoding="utf-8"?>
+<p:sld xmlns:a="http://schemas.openxmlformats.org/drawingml/2006/main" xmlns:p="http://schemas.openxmlformats.org/presentationml/2006/main" xmlns:r="http://schemas.openxmlformats.org/officeDocument/2006/relationships">
+  <p:cSld>
+    <p:bg>
+      <p:bgPr>
+        <a:solidFill>
+          <a:srgbClr val="0A1628"/>
+        </a:solidFill>
+        <a:effectLst/>
+      </p:bgPr>
+    </p:bg>
+    <p:spTree>
+      <p:nvGrpSpPr>
+        <p:cNvPr id="1" name=""/>
+        <p:cNvGrpSpPr/>
+        <p:nvPr/>
+      </p:nvGrpSpPr>
+      <p:grpSpPr/>
+      <p:sp>
+        <p:nvSpPr>
+          <p:cNvPr id="2" name="TextBox 1"/>
+          <p:cNvSpPr txBox="1"/>
+          <p:nvPr/>
+        </p:nvSpPr>
+        <p:spPr>
+          <a:xfrm>
+            <a:off x="457200" y="6419088"/>
+            <a:ext cx="8686800" cy="320040"/>
+          </a:xfrm>
+          <a:prstGeom prst="rect">
+            <a:avLst/>
+          </a:prstGeom>
+          <a:noFill/>
+        </p:spPr>
+        <p:txBody>
+          <a:bodyPr wrap="square" lIns="45720" rIns="45720" tIns="27432" bIns="27432" anchor="t">
+            <a:spAutoFit/>
+          </a:bodyPr>
+          <a:lstStyle/>
+          <a:p>
+            <a:r>
+              <a:rPr sz="900" b="0">
+                <a:solidFill>
+                  <a:srgbClr val="64748B"/>
+                </a:solidFill>
+                <a:latin typeface="Inter"/>
+              </a:rPr>
+              <a:t>AI Agent Observability &amp; Cost Control · Section 13 · Lecture 13.6</a:t>
+            </a:r>
+          </a:p>
+        </p:txBody>
+      </p:sp>
+      <p:sp>
+        <p:nvSpPr>
+          <p:cNvPr id="3" name="TextBox 2"/>
+          <p:cNvSpPr txBox="1"/>
+          <p:nvPr/>
+        </p:nvSpPr>
+        <p:spPr>
+          <a:xfrm>
+            <a:off x="457200" y="411480"/>
+            <a:ext cx="11247120" cy="868680"/>
+          </a:xfrm>
+          <a:prstGeom prst="rect">
+            <a:avLst/>
+          </a:prstGeom>
+          <a:noFill/>
+        </p:spPr>
+        <p:txBody>
+          <a:bodyPr wrap="square" lIns="45720" rIns="45720" tIns="27432" bIns="27432" anchor="t">
+            <a:spAutoFit/>
+          </a:bodyPr>
+          <a:lstStyle/>
+          <a:p>
+            <a:pPr>
+              <a:lnSpc>
+                <a:spcPct val="110000"/>
+              </a:lnSpc>
+            </a:pPr>
+            <a:r>
+              <a:rPr sz="2600" b="1">
+                <a:solidFill>
+                  <a:srgbClr val="FFFFFF"/>
+                </a:solidFill>
+                <a:latin typeface="Inter"/>
+              </a:rPr>
+              <a:t>Lab 7 checklist (1/2)</a:t>
+            </a:r>
+          </a:p>
+        </p:txBody>
+      </p:sp>
+      <p:sp>
+        <p:nvSpPr>
+          <p:cNvPr id="4" name="Rectangle 3"/>
+          <p:cNvSpPr/>
+          <p:nvPr/>
+        </p:nvSpPr>
+        <p:spPr>
+          <a:xfrm>
+            <a:off x="502920" y="1024128"/>
+            <a:ext cx="822960" cy="54864"/>
+          </a:xfrm>
+          <a:prstGeom prst="rect">
+            <a:avLst/>
+          </a:prstGeom>
+          <a:solidFill>
+            <a:srgbClr val="00D4AA"/>
+          </a:solidFill>
+          <a:ln>
+            <a:noFill/>
+          </a:ln>
+          <a:effectLst/>
+        </p:spPr>
+        <p:style>
+          <a:lnRef idx="1">
+            <a:schemeClr val="accent1"/>
+          </a:lnRef>
+          <a:fillRef idx="3">
+            <a:schemeClr val="accent1"/>
+          </a:fillRef>
+          <a:effectRef idx="2">
+            <a:schemeClr val="accent1"/>
+          </a:effectRef>
+          <a:fontRef idx="minor">
+            <a:schemeClr val="lt1"/>
+          </a:fontRef>
+        </p:style>
+        <p:txBody>
+          <a:bodyPr rtlCol="0" anchor="ctr"/>
+          <a:lstStyle/>
+          <a:p/>
+        </p:txBody>
+      </p:sp>
+      <p:sp>
+        <p:nvSpPr>
+          <p:cNvPr id="5" name="TextBox 4"/>
+          <p:cNvSpPr txBox="1"/>
+          <p:nvPr/>
+        </p:nvSpPr>
+        <p:spPr>
+          <a:xfrm>
+            <a:off x="640080" y="1417320"/>
+            <a:ext cx="10881360" cy="4892040"/>
+          </a:xfrm>
+          <a:prstGeom prst="rect">
+            <a:avLst/>
+          </a:prstGeom>
+          <a:noFill/>
+        </p:spPr>
+        <p:txBody>
+          <a:bodyPr wrap="square" lIns="45720" rIns="45720" tIns="27432" bIns="27432" anchor="t">
+            <a:spAutoFit/>
+          </a:bodyPr>
+          <a:lstStyle/>
+          <a:p>
+            <a:pPr marL="292608" indent="-292608">
+              <a:lnSpc>
+                <a:spcPct val="120000"/>
+              </a:lnSpc>
+              <a:spcAft>
+                <a:spcPts val="1260"/>
+              </a:spcAft>
+              <a:buClr>
+                <a:srgbClr val="00D4AA"/>
+              </a:buClr>
+              <a:buFont typeface="Inter"/>
+              <a:buChar char="•"/>
+            </a:pPr>
+            <a:r>
+              <a:rPr sz="1656" b="0">
+                <a:solidFill>
+                  <a:srgbClr val="00D4AA"/>
+                </a:solidFill>
+                <a:latin typeface="JetBrains Mono"/>
+              </a:rPr>
+              <a:t>make langfuse-up</a:t>
+            </a:r>
+            <a:r>
+              <a:rPr sz="1800" b="0">
+                <a:solidFill>
+                  <a:srgbClr val="FFFFFF"/>
+                </a:solidFill>
+                <a:latin typeface="Inter"/>
+              </a:rPr>
+              <a:t> and </a:t>
+            </a:r>
+            <a:r>
+              <a:rPr sz="1656" b="0">
+                <a:solidFill>
+                  <a:srgbClr val="00D4AA"/>
+                </a:solidFill>
+                <a:latin typeface="JetBrains Mono"/>
+              </a:rPr>
+              <a:t>make stack</a:t>
+            </a:r>
+            <a:r>
+              <a:rPr sz="1800" b="0">
+                <a:solidFill>
+                  <a:srgbClr val="FFFFFF"/>
+                </a:solidFill>
+                <a:latin typeface="Inter"/>
+              </a:rPr>
+              <a:t>: Langfuse, Collector, Prometheus, Grafana all healthy</a:t>
+            </a:r>
+          </a:p>
+          <a:p>
+            <a:pPr marL="292608" indent="-292608">
+              <a:lnSpc>
+                <a:spcPct val="120000"/>
+              </a:lnSpc>
+              <a:spcAft>
+                <a:spcPts val="1260"/>
+              </a:spcAft>
+              <a:buClr>
+                <a:srgbClr val="00D4AA"/>
+              </a:buClr>
+              <a:buFont typeface="Inter"/>
+              <a:buChar char="•"/>
+            </a:pPr>
+            <a:r>
+              <a:rPr sz="1800" b="0">
+                <a:solidFill>
+                  <a:srgbClr val="FFFFFF"/>
+                </a:solidFill>
+                <a:latin typeface="Inter"/>
+              </a:rPr>
+              <a:t>Atlas exporting to the Collector only; no Langfuse keys in Atlas's env</a:t>
+            </a:r>
+          </a:p>
+          <a:p>
+            <a:pPr marL="292608" indent="-292608">
+              <a:lnSpc>
+                <a:spcPct val="120000"/>
+              </a:lnSpc>
+              <a:spcAft>
+                <a:spcPts val="1260"/>
+              </a:spcAft>
+              <a:buClr>
+                <a:srgbClr val="00D4AA"/>
+              </a:buClr>
+              <a:buFont typeface="Inter"/>
+              <a:buChar char="•"/>
+            </a:pPr>
+            <a:r>
+              <a:rPr sz="1656" b="0">
+                <a:solidFill>
+                  <a:srgbClr val="00D4AA"/>
+                </a:solidFill>
+                <a:latin typeface="JetBrains Mono"/>
+              </a:rPr>
+              <a:t>make swarm RPS=2 DURATION=600</a:t>
+            </a:r>
+            <a:r>
+              <a:rPr sz="1800" b="0">
+                <a:solidFill>
+                  <a:srgbClr val="FFFFFF"/>
+                </a:solidFill>
+                <a:latin typeface="Inter"/>
+              </a:rPr>
+              <a:t>: traffic visible in Langfuse or Phoenix and on the Grafana Atlas Ops dashboard</a:t>
+            </a:r>
+          </a:p>
+          <a:p>
+            <a:pPr marL="292608" indent="-292608">
+              <a:lnSpc>
+                <a:spcPct val="120000"/>
+              </a:lnSpc>
+              <a:spcAft>
+                <a:spcPts val="1260"/>
+              </a:spcAft>
+              <a:buClr>
+                <a:srgbClr val="00D4AA"/>
+              </a:buClr>
+              <a:buFont typeface="Inter"/>
+              <a:buChar char="•"/>
+            </a:pPr>
+            <a:r>
+              <a:rPr sz="1800" b="0">
+                <a:solidFill>
+                  <a:srgbClr val="FFFFFF"/>
+                </a:solidFill>
+                <a:latin typeface="Inter"/>
+              </a:rPr>
+              <a:t>Proof of masking: a tool span shows no </a:t>
+            </a:r>
+            <a:r>
+              <a:rPr sz="1656" b="0">
+                <a:solidFill>
+                  <a:srgbClr val="00D4AA"/>
+                </a:solidFill>
+                <a:latin typeface="JetBrains Mono"/>
+              </a:rPr>
+              <a:t>gen_ai.tool.call.result</a:t>
+            </a:r>
+            <a:r>
+              <a:rPr sz="1800" b="0">
+                <a:solidFill>
+                  <a:srgbClr val="FFFFFF"/>
+                </a:solidFill>
+                <a:latin typeface="Inter"/>
+              </a:rPr>
+              <a:t> and hashed arguments</a:t>
+            </a:r>
+          </a:p>
+          <a:p>
+            <a:pPr marL="292608" indent="-292608">
+              <a:lnSpc>
+                <a:spcPct val="120000"/>
+              </a:lnSpc>
+              <a:spcAft>
+                <a:spcPts val="1260"/>
+              </a:spcAft>
+              <a:buClr>
+                <a:srgbClr val="00D4AA"/>
+              </a:buClr>
+              <a:buFont typeface="Inter"/>
+              <a:buChar char="•"/>
+            </a:pPr>
+            <a:r>
+              <a:rPr sz="1800" b="0">
+                <a:solidFill>
+                  <a:srgbClr val="FFFFFF"/>
+                </a:solidFill>
+                <a:latin typeface="Inter"/>
+              </a:rPr>
+              <a:t>Proof of tail sampling: every error and every &gt;4 s trace present; normal traffic sampled</a:t>
+            </a:r>
+          </a:p>
+        </p:txBody>
+      </p:sp>
+    </p:spTree>
+  </p:cSld>
+  <p:clrMapOvr>
+    <a:masterClrMapping/>
+  </p:clrMapOvr>
+</p:sld>
+</file>
+
+<file path=ppt/slides/slide31.xml><?xml version="1.0" encoding="utf-8"?>
+<p:sld xmlns:a="http://schemas.openxmlformats.org/drawingml/2006/main" xmlns:p="http://schemas.openxmlformats.org/presentationml/2006/main" xmlns:r="http://schemas.openxmlformats.org/officeDocument/2006/relationships">
+  <p:cSld>
+    <p:bg>
+      <p:bgPr>
+        <a:solidFill>
+          <a:srgbClr val="0A1628"/>
+        </a:solidFill>
+        <a:effectLst/>
+      </p:bgPr>
+    </p:bg>
+    <p:spTree>
+      <p:nvGrpSpPr>
+        <p:cNvPr id="1" name=""/>
+        <p:cNvGrpSpPr/>
+        <p:nvPr/>
+      </p:nvGrpSpPr>
+      <p:grpSpPr/>
+      <p:sp>
+        <p:nvSpPr>
+          <p:cNvPr id="2" name="TextBox 1"/>
+          <p:cNvSpPr txBox="1"/>
+          <p:nvPr/>
+        </p:nvSpPr>
+        <p:spPr>
+          <a:xfrm>
+            <a:off x="457200" y="6419088"/>
+            <a:ext cx="8686800" cy="320040"/>
+          </a:xfrm>
+          <a:prstGeom prst="rect">
+            <a:avLst/>
+          </a:prstGeom>
+          <a:noFill/>
+        </p:spPr>
+        <p:txBody>
+          <a:bodyPr wrap="square" lIns="45720" rIns="45720" tIns="27432" bIns="27432" anchor="t">
+            <a:spAutoFit/>
+          </a:bodyPr>
+          <a:lstStyle/>
+          <a:p>
+            <a:r>
+              <a:rPr sz="900" b="0">
+                <a:solidFill>
+                  <a:srgbClr val="64748B"/>
+                </a:solidFill>
+                <a:latin typeface="Inter"/>
+              </a:rPr>
+              <a:t>AI Agent Observability &amp; Cost Control · Section 13 · Lecture 13.6</a:t>
+            </a:r>
+          </a:p>
+        </p:txBody>
+      </p:sp>
+      <p:sp>
+        <p:nvSpPr>
+          <p:cNvPr id="3" name="TextBox 2"/>
+          <p:cNvSpPr txBox="1"/>
+          <p:nvPr/>
+        </p:nvSpPr>
+        <p:spPr>
+          <a:xfrm>
+            <a:off x="457200" y="411480"/>
+            <a:ext cx="11247120" cy="868680"/>
+          </a:xfrm>
+          <a:prstGeom prst="rect">
+            <a:avLst/>
+          </a:prstGeom>
+          <a:noFill/>
+        </p:spPr>
+        <p:txBody>
+          <a:bodyPr wrap="square" lIns="45720" rIns="45720" tIns="27432" bIns="27432" anchor="t">
+            <a:spAutoFit/>
+          </a:bodyPr>
+          <a:lstStyle/>
+          <a:p>
+            <a:pPr>
+              <a:lnSpc>
+                <a:spcPct val="110000"/>
+              </a:lnSpc>
+            </a:pPr>
+            <a:r>
+              <a:rPr sz="2600" b="1">
+                <a:solidFill>
+                  <a:srgbClr val="FFFFFF"/>
+                </a:solidFill>
+                <a:latin typeface="Inter"/>
+              </a:rPr>
+              <a:t>Lab 7 checklist (2/2)</a:t>
+            </a:r>
+          </a:p>
+        </p:txBody>
+      </p:sp>
+      <p:sp>
+        <p:nvSpPr>
+          <p:cNvPr id="4" name="Rectangle 3"/>
+          <p:cNvSpPr/>
+          <p:nvPr/>
+        </p:nvSpPr>
+        <p:spPr>
+          <a:xfrm>
+            <a:off x="502920" y="1024128"/>
+            <a:ext cx="822960" cy="54864"/>
+          </a:xfrm>
+          <a:prstGeom prst="rect">
+            <a:avLst/>
+          </a:prstGeom>
+          <a:solidFill>
+            <a:srgbClr val="00D4AA"/>
+          </a:solidFill>
+          <a:ln>
+            <a:noFill/>
+          </a:ln>
+          <a:effectLst/>
+        </p:spPr>
+        <p:style>
+          <a:lnRef idx="1">
+            <a:schemeClr val="accent1"/>
+          </a:lnRef>
+          <a:fillRef idx="3">
+            <a:schemeClr val="accent1"/>
+          </a:fillRef>
+          <a:effectRef idx="2">
+            <a:schemeClr val="accent1"/>
+          </a:effectRef>
+          <a:fontRef idx="minor">
+            <a:schemeClr val="lt1"/>
+          </a:fontRef>
+        </p:style>
+        <p:txBody>
+          <a:bodyPr rtlCol="0" anchor="ctr"/>
+          <a:lstStyle/>
+          <a:p/>
+        </p:txBody>
+      </p:sp>
+      <p:sp>
+        <p:nvSpPr>
+          <p:cNvPr id="5" name="TextBox 4"/>
+          <p:cNvSpPr txBox="1"/>
+          <p:nvPr/>
+        </p:nvSpPr>
+        <p:spPr>
+          <a:xfrm>
+            <a:off x="640080" y="1417320"/>
+            <a:ext cx="10881360" cy="4892040"/>
+          </a:xfrm>
+          <a:prstGeom prst="rect">
+            <a:avLst/>
+          </a:prstGeom>
+          <a:noFill/>
+        </p:spPr>
+        <p:txBody>
+          <a:bodyPr wrap="square" lIns="45720" rIns="45720" tIns="27432" bIns="27432" anchor="t">
+            <a:spAutoFit/>
+          </a:bodyPr>
+          <a:lstStyle/>
+          <a:p>
+            <a:pPr marL="292608" indent="-292608">
+              <a:lnSpc>
+                <a:spcPct val="120000"/>
+              </a:lnSpc>
+              <a:spcAft>
+                <a:spcPts val="1539"/>
+              </a:spcAft>
+              <a:buClr>
+                <a:srgbClr val="00D4AA"/>
+              </a:buClr>
+              <a:buFont typeface="Inter"/>
+              <a:buChar char="•"/>
+            </a:pPr>
+            <a:r>
+              <a:rPr sz="2024" b="0">
+                <a:solidFill>
+                  <a:srgbClr val="00D4AA"/>
+                </a:solidFill>
+                <a:latin typeface="JetBrains Mono"/>
+              </a:rPr>
+              <a:t>make budget-check</a:t>
+            </a:r>
+            <a:r>
+              <a:rPr sz="2200" b="0">
+                <a:solidFill>
+                  <a:srgbClr val="FFFFFF"/>
+                </a:solidFill>
+                <a:latin typeface="Inter"/>
+              </a:rPr>
+              <a:t> green locally; CI run green on a branch</a:t>
+            </a:r>
+          </a:p>
+          <a:p>
+            <a:pPr marL="292608" indent="-292608">
+              <a:lnSpc>
+                <a:spcPct val="120000"/>
+              </a:lnSpc>
+              <a:spcAft>
+                <a:spcPts val="1539"/>
+              </a:spcAft>
+              <a:buClr>
+                <a:srgbClr val="00D4AA"/>
+              </a:buClr>
+              <a:buFont typeface="Inter"/>
+              <a:buChar char="•"/>
+            </a:pPr>
+            <a:r>
+              <a:rPr sz="2200" b="0">
+                <a:solidFill>
+                  <a:srgbClr val="FFFFFF"/>
+                </a:solidFill>
+                <a:latin typeface="Inter"/>
+              </a:rPr>
+              <a:t>Chaos: stop the Collector during a swarm; every response still 200; </a:t>
+            </a:r>
+            <a:r>
+              <a:rPr sz="2024" b="0">
+                <a:solidFill>
+                  <a:srgbClr val="00D4AA"/>
+                </a:solidFill>
+                <a:latin typeface="JetBrains Mono"/>
+              </a:rPr>
+              <a:t>atlas_telemetry_export_failures_total</a:t>
+            </a:r>
+            <a:r>
+              <a:rPr sz="2200" b="0">
+                <a:solidFill>
+                  <a:srgbClr val="FFFFFF"/>
+                </a:solidFill>
+                <a:latin typeface="Inter"/>
+              </a:rPr>
+              <a:t> rises and </a:t>
+            </a:r>
+            <a:r>
+              <a:rPr sz="2024" b="0">
+                <a:solidFill>
+                  <a:srgbClr val="00D4AA"/>
+                </a:solidFill>
+                <a:latin typeface="JetBrains Mono"/>
+              </a:rPr>
+              <a:t>/healthz</a:t>
+            </a:r>
+            <a:r>
+              <a:rPr sz="2200" b="0">
+                <a:solidFill>
+                  <a:srgbClr val="FFFFFF"/>
+                </a:solidFill>
+                <a:latin typeface="Inter"/>
+              </a:rPr>
+              <a:t> shows the failures</a:t>
+            </a:r>
+          </a:p>
+        </p:txBody>
+      </p:sp>
+    </p:spTree>
+  </p:cSld>
+  <p:clrMapOvr>
+    <a:masterClrMapping/>
+  </p:clrMapOvr>
+</p:sld>
+</file>
+
+<file path=ppt/slides/slide32.xml><?xml version="1.0" encoding="utf-8"?>
+<p:sld xmlns:a="http://schemas.openxmlformats.org/drawingml/2006/main" xmlns:p="http://schemas.openxmlformats.org/presentationml/2006/main" xmlns:r="http://schemas.openxmlformats.org/officeDocument/2006/relationships">
+  <p:cSld>
+    <p:bg>
+      <p:bgPr>
+        <a:solidFill>
+          <a:srgbClr val="0A1628"/>
+        </a:solidFill>
+        <a:effectLst/>
+      </p:bgPr>
+    </p:bg>
+    <p:spTree>
+      <p:nvGrpSpPr>
+        <p:cNvPr id="1" name=""/>
+        <p:cNvGrpSpPr/>
+        <p:nvPr/>
+      </p:nvGrpSpPr>
+      <p:grpSpPr/>
+      <p:sp>
+        <p:nvSpPr>
+          <p:cNvPr id="2" name="TextBox 1"/>
+          <p:cNvSpPr txBox="1"/>
+          <p:nvPr/>
+        </p:nvSpPr>
+        <p:spPr>
+          <a:xfrm>
+            <a:off x="457200" y="6419088"/>
+            <a:ext cx="8686800" cy="320040"/>
+          </a:xfrm>
+          <a:prstGeom prst="rect">
+            <a:avLst/>
+          </a:prstGeom>
+          <a:noFill/>
+        </p:spPr>
+        <p:txBody>
+          <a:bodyPr wrap="square" lIns="45720" rIns="45720" tIns="27432" bIns="27432" anchor="t">
+            <a:spAutoFit/>
+          </a:bodyPr>
+          <a:lstStyle/>
+          <a:p>
+            <a:r>
+              <a:rPr sz="900" b="0">
+                <a:solidFill>
+                  <a:srgbClr val="64748B"/>
+                </a:solidFill>
+                <a:latin typeface="Inter"/>
+              </a:rPr>
+              <a:t>AI Agent Observability &amp; Cost Control · Section 13 · Lecture 13.6</a:t>
+            </a:r>
+          </a:p>
+        </p:txBody>
+      </p:sp>
+      <p:sp>
+        <p:nvSpPr>
+          <p:cNvPr id="3" name="TextBox 2"/>
+          <p:cNvSpPr txBox="1"/>
+          <p:nvPr/>
+        </p:nvSpPr>
+        <p:spPr>
+          <a:xfrm>
+            <a:off x="457200" y="411480"/>
+            <a:ext cx="11247120" cy="868680"/>
+          </a:xfrm>
+          <a:prstGeom prst="rect">
+            <a:avLst/>
+          </a:prstGeom>
+          <a:noFill/>
+        </p:spPr>
+        <p:txBody>
+          <a:bodyPr wrap="square" lIns="45720" rIns="45720" tIns="27432" bIns="27432" anchor="t">
+            <a:spAutoFit/>
+          </a:bodyPr>
+          <a:lstStyle/>
+          <a:p>
+            <a:pPr>
+              <a:lnSpc>
+                <a:spcPct val="110000"/>
+              </a:lnSpc>
+            </a:pPr>
+            <a:r>
+              <a:rPr sz="2600" b="1">
+                <a:solidFill>
+                  <a:srgbClr val="FFFFFF"/>
+                </a:solidFill>
+                <a:latin typeface="Inter"/>
+              </a:rPr>
+              <a:t>Deliverables</a:t>
+            </a:r>
+          </a:p>
+        </p:txBody>
+      </p:sp>
+      <p:sp>
+        <p:nvSpPr>
+          <p:cNvPr id="4" name="Rectangle 3"/>
+          <p:cNvSpPr/>
+          <p:nvPr/>
+        </p:nvSpPr>
+        <p:spPr>
+          <a:xfrm>
+            <a:off x="502920" y="1024128"/>
+            <a:ext cx="822960" cy="54864"/>
+          </a:xfrm>
+          <a:prstGeom prst="rect">
+            <a:avLst/>
+          </a:prstGeom>
+          <a:solidFill>
+            <a:srgbClr val="00D4AA"/>
+          </a:solidFill>
+          <a:ln>
+            <a:noFill/>
+          </a:ln>
+          <a:effectLst/>
+        </p:spPr>
+        <p:style>
+          <a:lnRef idx="1">
+            <a:schemeClr val="accent1"/>
+          </a:lnRef>
+          <a:fillRef idx="3">
+            <a:schemeClr val="accent1"/>
+          </a:fillRef>
+          <a:effectRef idx="2">
+            <a:schemeClr val="accent1"/>
+          </a:effectRef>
+          <a:fontRef idx="minor">
+            <a:schemeClr val="lt1"/>
+          </a:fontRef>
+        </p:style>
+        <p:txBody>
+          <a:bodyPr rtlCol="0" anchor="ctr"/>
+          <a:lstStyle/>
+          <a:p/>
+        </p:txBody>
+      </p:sp>
+      <p:sp>
+        <p:nvSpPr>
+          <p:cNvPr id="5" name="TextBox 4"/>
+          <p:cNvSpPr txBox="1"/>
+          <p:nvPr/>
+        </p:nvSpPr>
+        <p:spPr>
+          <a:xfrm>
+            <a:off x="640080" y="1417320"/>
+            <a:ext cx="10881360" cy="4892040"/>
+          </a:xfrm>
+          <a:prstGeom prst="rect">
+            <a:avLst/>
+          </a:prstGeom>
+          <a:noFill/>
+        </p:spPr>
+        <p:txBody>
+          <a:bodyPr wrap="square" lIns="45720" rIns="45720" tIns="27432" bIns="27432" anchor="t">
+            <a:spAutoFit/>
+          </a:bodyPr>
+          <a:lstStyle/>
+          <a:p>
+            <a:pPr marL="292608" indent="-292608">
+              <a:lnSpc>
+                <a:spcPct val="120000"/>
+              </a:lnSpc>
+              <a:spcAft>
+                <a:spcPts val="1260"/>
+              </a:spcAft>
+              <a:buClr>
+                <a:srgbClr val="00D4AA"/>
+              </a:buClr>
+              <a:buFont typeface="Inter"/>
+              <a:buChar char="•"/>
+            </a:pPr>
+            <a:r>
+              <a:rPr sz="1800" b="0">
+                <a:solidFill>
+                  <a:srgbClr val="FFFFFF"/>
+                </a:solidFill>
+                <a:latin typeface="Inter"/>
+              </a:rPr>
+              <a:t>Screenshot: </a:t>
+            </a:r>
+            <a:r>
+              <a:rPr sz="1656" b="0">
+                <a:solidFill>
+                  <a:srgbClr val="00D4AA"/>
+                </a:solidFill>
+                <a:latin typeface="JetBrains Mono"/>
+              </a:rPr>
+              <a:t>docker compose ps</a:t>
+            </a:r>
+            <a:r>
+              <a:rPr sz="1800" b="0">
+                <a:solidFill>
+                  <a:srgbClr val="FFFFFF"/>
+                </a:solidFill>
+                <a:latin typeface="Inter"/>
+              </a:rPr>
+              <a:t> with all services healthy</a:t>
+            </a:r>
+          </a:p>
+          <a:p>
+            <a:pPr marL="292608" indent="-292608">
+              <a:lnSpc>
+                <a:spcPct val="120000"/>
+              </a:lnSpc>
+              <a:spcAft>
+                <a:spcPts val="1260"/>
+              </a:spcAft>
+              <a:buClr>
+                <a:srgbClr val="00D4AA"/>
+              </a:buClr>
+              <a:buFont typeface="Inter"/>
+              <a:buChar char="•"/>
+            </a:pPr>
+            <a:r>
+              <a:rPr sz="1800" b="0">
+                <a:solidFill>
+                  <a:srgbClr val="FFFFFF"/>
+                </a:solidFill>
+                <a:latin typeface="Inter"/>
+              </a:rPr>
+              <a:t>Screenshot: Grafana Atlas Ops dashboard with swarm traffic</a:t>
+            </a:r>
+          </a:p>
+          <a:p>
+            <a:pPr marL="292608" indent="-292608">
+              <a:lnSpc>
+                <a:spcPct val="120000"/>
+              </a:lnSpc>
+              <a:spcAft>
+                <a:spcPts val="1260"/>
+              </a:spcAft>
+              <a:buClr>
+                <a:srgbClr val="00D4AA"/>
+              </a:buClr>
+              <a:buFont typeface="Inter"/>
+              <a:buChar char="•"/>
+            </a:pPr>
+            <a:r>
+              <a:rPr sz="1800" b="0">
+                <a:solidFill>
+                  <a:srgbClr val="FFFFFF"/>
+                </a:solidFill>
+                <a:latin typeface="Inter"/>
+              </a:rPr>
+              <a:t>Screenshot: a redacted tool span in Langfuse or Phoenix</a:t>
+            </a:r>
+          </a:p>
+          <a:p>
+            <a:pPr marL="292608" indent="-292608">
+              <a:lnSpc>
+                <a:spcPct val="120000"/>
+              </a:lnSpc>
+              <a:spcAft>
+                <a:spcPts val="1260"/>
+              </a:spcAft>
+              <a:buClr>
+                <a:srgbClr val="00D4AA"/>
+              </a:buClr>
+              <a:buFont typeface="Inter"/>
+              <a:buChar char="•"/>
+            </a:pPr>
+            <a:r>
+              <a:rPr sz="1800" b="0">
+                <a:solidFill>
+                  <a:srgbClr val="FFFFFF"/>
+                </a:solidFill>
+                <a:latin typeface="Inter"/>
+              </a:rPr>
+              <a:t>Link or screenshot: green CI run including </a:t>
+            </a:r>
+            <a:r>
+              <a:rPr sz="1656" b="0">
+                <a:solidFill>
+                  <a:srgbClr val="00D4AA"/>
+                </a:solidFill>
+                <a:latin typeface="JetBrains Mono"/>
+              </a:rPr>
+              <a:t>budget-gate</a:t>
+            </a:r>
+          </a:p>
+          <a:p>
+            <a:pPr marL="292608" indent="-292608">
+              <a:lnSpc>
+                <a:spcPct val="120000"/>
+              </a:lnSpc>
+              <a:spcAft>
+                <a:spcPts val="1260"/>
+              </a:spcAft>
+              <a:buClr>
+                <a:srgbClr val="00D4AA"/>
+              </a:buClr>
+              <a:buFont typeface="Inter"/>
+              <a:buChar char="•"/>
+            </a:pPr>
+            <a:r>
+              <a:rPr sz="1800" b="0">
+                <a:solidFill>
+                  <a:srgbClr val="FFFFFF"/>
+                </a:solidFill>
+                <a:latin typeface="Inter"/>
+              </a:rPr>
+              <a:t>Three sentences: what you would change before running this for a real team</a:t>
+            </a:r>
+          </a:p>
+        </p:txBody>
+      </p:sp>
+    </p:spTree>
+  </p:cSld>
+  <p:clrMapOvr>
+    <a:masterClrMapping/>
+  </p:clrMapOvr>
+</p:sld>
+</file>
+
+<file path=ppt/slides/slide33.xml><?xml version="1.0" encoding="utf-8"?>
+<p:sld xmlns:a="http://schemas.openxmlformats.org/drawingml/2006/main" xmlns:p="http://schemas.openxmlformats.org/presentationml/2006/main" xmlns:r="http://schemas.openxmlformats.org/officeDocument/2006/relationships">
+  <p:cSld>
+    <p:bg>
+      <p:bgPr>
+        <a:solidFill>
+          <a:srgbClr val="0A1628"/>
+        </a:solidFill>
+        <a:effectLst/>
+      </p:bgPr>
+    </p:bg>
+    <p:spTree>
+      <p:nvGrpSpPr>
+        <p:cNvPr id="1" name=""/>
+        <p:cNvGrpSpPr/>
+        <p:nvPr/>
+      </p:nvGrpSpPr>
+      <p:grpSpPr/>
+      <p:sp>
+        <p:nvSpPr>
+          <p:cNvPr id="2" name="TextBox 1"/>
+          <p:cNvSpPr txBox="1"/>
+          <p:nvPr/>
+        </p:nvSpPr>
+        <p:spPr>
+          <a:xfrm>
+            <a:off x="457200" y="6419088"/>
+            <a:ext cx="8686800" cy="320040"/>
+          </a:xfrm>
+          <a:prstGeom prst="rect">
+            <a:avLst/>
+          </a:prstGeom>
+          <a:noFill/>
+        </p:spPr>
+        <p:txBody>
+          <a:bodyPr wrap="square" lIns="45720" rIns="45720" tIns="27432" bIns="27432" anchor="t">
+            <a:spAutoFit/>
+          </a:bodyPr>
+          <a:lstStyle/>
+          <a:p>
+            <a:r>
+              <a:rPr sz="900" b="0">
+                <a:solidFill>
+                  <a:srgbClr val="64748B"/>
+                </a:solidFill>
+                <a:latin typeface="Inter"/>
+              </a:rPr>
+              <a:t>AI Agent Observability &amp; Cost Control · Section 13 · Lecture 13.6</a:t>
+            </a:r>
+          </a:p>
+        </p:txBody>
+      </p:sp>
+      <p:sp>
+        <p:nvSpPr>
+          <p:cNvPr id="3" name="TextBox 2"/>
+          <p:cNvSpPr txBox="1"/>
+          <p:nvPr/>
+        </p:nvSpPr>
+        <p:spPr>
+          <a:xfrm>
+            <a:off x="457200" y="411480"/>
+            <a:ext cx="11247120" cy="868680"/>
+          </a:xfrm>
+          <a:prstGeom prst="rect">
+            <a:avLst/>
+          </a:prstGeom>
+          <a:noFill/>
+        </p:spPr>
+        <p:txBody>
+          <a:bodyPr wrap="square" lIns="45720" rIns="45720" tIns="27432" bIns="27432" anchor="t">
+            <a:spAutoFit/>
+          </a:bodyPr>
+          <a:lstStyle/>
+          <a:p>
+            <a:pPr>
+              <a:lnSpc>
+                <a:spcPct val="110000"/>
+              </a:lnSpc>
+            </a:pPr>
+            <a:r>
+              <a:rPr sz="2600" b="1">
+                <a:solidFill>
+                  <a:srgbClr val="FFFFFF"/>
+                </a:solidFill>
+                <a:latin typeface="Inter"/>
+              </a:rPr>
+              <a:t>Where students get stuck</a:t>
+            </a:r>
+          </a:p>
+        </p:txBody>
+      </p:sp>
+      <p:sp>
+        <p:nvSpPr>
+          <p:cNvPr id="4" name="Rectangle 3"/>
+          <p:cNvSpPr/>
+          <p:nvPr/>
+        </p:nvSpPr>
+        <p:spPr>
+          <a:xfrm>
+            <a:off x="502920" y="1024128"/>
+            <a:ext cx="822960" cy="54864"/>
+          </a:xfrm>
+          <a:prstGeom prst="rect">
+            <a:avLst/>
+          </a:prstGeom>
+          <a:solidFill>
+            <a:srgbClr val="00D4AA"/>
+          </a:solidFill>
+          <a:ln>
+            <a:noFill/>
+          </a:ln>
+          <a:effectLst/>
+        </p:spPr>
+        <p:style>
+          <a:lnRef idx="1">
+            <a:schemeClr val="accent1"/>
+          </a:lnRef>
+          <a:fillRef idx="3">
+            <a:schemeClr val="accent1"/>
+          </a:fillRef>
+          <a:effectRef idx="2">
+            <a:schemeClr val="accent1"/>
+          </a:effectRef>
+          <a:fontRef idx="minor">
+            <a:schemeClr val="lt1"/>
+          </a:fontRef>
+        </p:style>
+        <p:txBody>
+          <a:bodyPr rtlCol="0" anchor="ctr"/>
+          <a:lstStyle/>
+          <a:p/>
+        </p:txBody>
+      </p:sp>
+      <p:sp>
+        <p:nvSpPr>
+          <p:cNvPr id="5" name="TextBox 4"/>
+          <p:cNvSpPr txBox="1"/>
+          <p:nvPr/>
+        </p:nvSpPr>
+        <p:spPr>
+          <a:xfrm>
+            <a:off x="640080" y="1417320"/>
+            <a:ext cx="10881360" cy="4892040"/>
+          </a:xfrm>
+          <a:prstGeom prst="rect">
+            <a:avLst/>
+          </a:prstGeom>
+          <a:noFill/>
+        </p:spPr>
+        <p:txBody>
+          <a:bodyPr wrap="square" lIns="45720" rIns="45720" tIns="27432" bIns="27432" anchor="t">
+            <a:spAutoFit/>
+          </a:bodyPr>
+          <a:lstStyle/>
+          <a:p>
+            <a:pPr marL="292608" indent="-292608">
+              <a:lnSpc>
+                <a:spcPct val="120000"/>
+              </a:lnSpc>
+              <a:spcAft>
+                <a:spcPts val="1260"/>
+              </a:spcAft>
+              <a:buClr>
+                <a:srgbClr val="00D4AA"/>
+              </a:buClr>
+              <a:buFont typeface="Inter"/>
+              <a:buChar char="•"/>
+            </a:pPr>
+            <a:r>
+              <a:rPr sz="1800" b="0">
+                <a:solidFill>
+                  <a:srgbClr val="FFFFFF"/>
+                </a:solidFill>
+                <a:latin typeface="Inter"/>
+              </a:rPr>
+              <a:t>ClickHouse restarting: raise Docker memory to 6 GB or more</a:t>
+            </a:r>
+          </a:p>
+          <a:p>
+            <a:pPr marL="292608" indent="-292608">
+              <a:lnSpc>
+                <a:spcPct val="120000"/>
+              </a:lnSpc>
+              <a:spcAft>
+                <a:spcPts val="1260"/>
+              </a:spcAft>
+              <a:buClr>
+                <a:srgbClr val="00D4AA"/>
+              </a:buClr>
+              <a:buFont typeface="Inter"/>
+              <a:buChar char="•"/>
+            </a:pPr>
+            <a:r>
+              <a:rPr sz="1800" b="0">
+                <a:solidFill>
+                  <a:srgbClr val="FFFFFF"/>
+                </a:solidFill>
+                <a:latin typeface="Inter"/>
+              </a:rPr>
+              <a:t>Traces in Collector logs but not in Langfuse: check the OTLP endpoint path and the basic auth header</a:t>
+            </a:r>
+          </a:p>
+          <a:p>
+            <a:pPr marL="292608" indent="-292608">
+              <a:lnSpc>
+                <a:spcPct val="120000"/>
+              </a:lnSpc>
+              <a:spcAft>
+                <a:spcPts val="1260"/>
+              </a:spcAft>
+              <a:buClr>
+                <a:srgbClr val="00D4AA"/>
+              </a:buClr>
+              <a:buFont typeface="Inter"/>
+              <a:buChar char="•"/>
+            </a:pPr>
+            <a:r>
+              <a:rPr sz="1800" b="0">
+                <a:solidFill>
+                  <a:srgbClr val="FFFFFF"/>
+                </a:solidFill>
+                <a:latin typeface="Inter"/>
+              </a:rPr>
+              <a:t>Grafana dashboard empty: no traffic yet (replay never reaches Prometheus), or the </a:t>
+            </a:r>
+            <a:r>
+              <a:rPr sz="1656" b="0">
+                <a:solidFill>
+                  <a:srgbClr val="00D4AA"/>
+                </a:solidFill>
+                <a:latin typeface="JetBrains Mono"/>
+              </a:rPr>
+              <a:t>atlas:8000</a:t>
+            </a:r>
+            <a:r>
+              <a:rPr sz="1800" b="0">
+                <a:solidFill>
+                  <a:srgbClr val="FFFFFF"/>
+                </a:solidFill>
+                <a:latin typeface="Inter"/>
+              </a:rPr>
+              <a:t> target is down; check Prometheus on </a:t>
+            </a:r>
+            <a:r>
+              <a:rPr sz="1656" b="0">
+                <a:solidFill>
+                  <a:srgbClr val="00D4AA"/>
+                </a:solidFill>
+                <a:latin typeface="JetBrains Mono"/>
+              </a:rPr>
+              <a:t>localhost:9091</a:t>
+            </a:r>
+            <a:r>
+              <a:rPr sz="1800" b="0">
+                <a:solidFill>
+                  <a:srgbClr val="FFFFFF"/>
+                </a:solidFill>
+                <a:latin typeface="Inter"/>
+              </a:rPr>
+              <a:t> → Status → Targets</a:t>
+            </a:r>
+          </a:p>
+          <a:p>
+            <a:pPr marL="292608" indent="-292608">
+              <a:lnSpc>
+                <a:spcPct val="120000"/>
+              </a:lnSpc>
+              <a:spcAft>
+                <a:spcPts val="1260"/>
+              </a:spcAft>
+              <a:buClr>
+                <a:srgbClr val="00D4AA"/>
+              </a:buClr>
+              <a:buFont typeface="Inter"/>
+              <a:buChar char="•"/>
+            </a:pPr>
+            <a:r>
+              <a:rPr sz="1800" b="0">
+                <a:solidFill>
+                  <a:srgbClr val="FFFFFF"/>
+                </a:solidFill>
+                <a:latin typeface="Inter"/>
+              </a:rPr>
+              <a:t>Budget gate fails on a fresh clone: check </a:t>
+            </a:r>
+            <a:r>
+              <a:rPr sz="1656" b="0">
+                <a:solidFill>
+                  <a:srgbClr val="00D4AA"/>
+                </a:solidFill>
+                <a:latin typeface="JetBrains Mono"/>
+              </a:rPr>
+              <a:t>OFFLINE=1</a:t>
+            </a:r>
+            <a:r>
+              <a:rPr sz="1800" b="0">
+                <a:solidFill>
+                  <a:srgbClr val="FFFFFF"/>
+                </a:solidFill>
+                <a:latin typeface="Inter"/>
+              </a:rPr>
+              <a:t> and the seed; the baseline must be deterministic</a:t>
+            </a:r>
+          </a:p>
+        </p:txBody>
+      </p:sp>
+    </p:spTree>
+  </p:cSld>
+  <p:clrMapOvr>
+    <a:masterClrMapping/>
+  </p:clrMapOvr>
+</p:sld>
+</file>
+
+<file path=ppt/slides/slide34.xml><?xml version="1.0" encoding="utf-8"?>
+<p:sld xmlns:a="http://schemas.openxmlformats.org/drawingml/2006/main" xmlns:p="http://schemas.openxmlformats.org/presentationml/2006/main" xmlns:r="http://schemas.openxmlformats.org/officeDocument/2006/relationships">
+  <p:cSld>
+    <p:bg>
+      <p:bgPr>
+        <a:solidFill>
+          <a:srgbClr val="0A1628"/>
+        </a:solidFill>
+        <a:effectLst/>
+      </p:bgPr>
+    </p:bg>
+    <p:spTree>
+      <p:nvGrpSpPr>
+        <p:cNvPr id="1" name=""/>
+        <p:cNvGrpSpPr/>
+        <p:nvPr/>
+      </p:nvGrpSpPr>
+      <p:grpSpPr/>
+      <p:sp>
+        <p:nvSpPr>
+          <p:cNvPr id="2" name="TextBox 1"/>
+          <p:cNvSpPr txBox="1"/>
+          <p:nvPr/>
+        </p:nvSpPr>
+        <p:spPr>
+          <a:xfrm>
+            <a:off x="457200" y="6419088"/>
+            <a:ext cx="8686800" cy="320040"/>
+          </a:xfrm>
+          <a:prstGeom prst="rect">
+            <a:avLst/>
+          </a:prstGeom>
+          <a:noFill/>
+        </p:spPr>
+        <p:txBody>
+          <a:bodyPr wrap="square" lIns="45720" rIns="45720" tIns="27432" bIns="27432" anchor="t">
+            <a:spAutoFit/>
+          </a:bodyPr>
+          <a:lstStyle/>
+          <a:p>
+            <a:r>
+              <a:rPr sz="900" b="0">
+                <a:solidFill>
+                  <a:srgbClr val="64748B"/>
+                </a:solidFill>
+                <a:latin typeface="Inter"/>
+              </a:rPr>
+              <a:t>AI Agent Observability &amp; Cost Control · Section 13 · Lecture 13.6</a:t>
+            </a:r>
+          </a:p>
+        </p:txBody>
+      </p:sp>
+      <p:sp>
+        <p:nvSpPr>
+          <p:cNvPr id="3" name="TextBox 2"/>
+          <p:cNvSpPr txBox="1"/>
+          <p:nvPr/>
+        </p:nvSpPr>
+        <p:spPr>
+          <a:xfrm>
+            <a:off x="1371600" y="822960"/>
+            <a:ext cx="9418320" cy="457200"/>
+          </a:xfrm>
+          <a:prstGeom prst="rect">
+            <a:avLst/>
+          </a:prstGeom>
+          <a:noFill/>
+        </p:spPr>
+        <p:txBody>
+          <a:bodyPr wrap="square" lIns="45720" rIns="45720" tIns="27432" bIns="27432" anchor="t">
+            <a:spAutoFit/>
+          </a:bodyPr>
+          <a:lstStyle/>
+          <a:p>
+            <a:pPr algn="ctr"/>
+            <a:r>
+              <a:rPr sz="1200" b="1">
+                <a:solidFill>
+                  <a:srgbClr val="00D4AA"/>
+                </a:solidFill>
+                <a:latin typeface="Inter"/>
+              </a:rPr>
+              <a:t>RECAP</a:t>
+            </a:r>
+          </a:p>
+        </p:txBody>
+      </p:sp>
+      <p:sp>
+        <p:nvSpPr>
+          <p:cNvPr id="4" name="TextBox 3"/>
+          <p:cNvSpPr txBox="1"/>
+          <p:nvPr/>
+        </p:nvSpPr>
+        <p:spPr>
+          <a:xfrm>
+            <a:off x="1371600" y="1234440"/>
+            <a:ext cx="9418320" cy="822960"/>
+          </a:xfrm>
+          <a:prstGeom prst="rect">
+            <a:avLst/>
+          </a:prstGeom>
+          <a:noFill/>
+        </p:spPr>
+        <p:txBody>
+          <a:bodyPr wrap="square" lIns="45720" rIns="45720" tIns="27432" bIns="27432" anchor="t">
+            <a:spAutoFit/>
+          </a:bodyPr>
+          <a:lstStyle/>
+          <a:p>
+            <a:pPr algn="ctr"/>
+            <a:r>
+              <a:rPr sz="2600" b="1">
+                <a:solidFill>
+                  <a:srgbClr val="FFFFFF"/>
+                </a:solidFill>
+                <a:latin typeface="Inter"/>
+              </a:rPr>
+              <a:t>Key takeaways</a:t>
+            </a:r>
+          </a:p>
+        </p:txBody>
+      </p:sp>
+      <p:sp>
+        <p:nvSpPr>
+          <p:cNvPr id="5" name="Rounded Rectangle 4"/>
+          <p:cNvSpPr/>
+          <p:nvPr/>
+        </p:nvSpPr>
+        <p:spPr>
+          <a:xfrm>
+            <a:off x="2011680" y="2514600"/>
+            <a:ext cx="8138160" cy="777240"/>
+          </a:xfrm>
+          <a:prstGeom prst="roundRect">
+            <a:avLst>
+              <a:gd name="adj" fmla="val 6588"/>
+            </a:avLst>
+          </a:prstGeom>
+          <a:solidFill>
+            <a:srgbClr val="1A2742"/>
+          </a:solidFill>
+          <a:ln>
+            <a:noFill/>
+          </a:ln>
+          <a:effectLst/>
+        </p:spPr>
+        <p:style>
+          <a:lnRef idx="1">
+            <a:schemeClr val="accent1"/>
+          </a:lnRef>
+          <a:fillRef idx="3">
+            <a:schemeClr val="accent1"/>
+          </a:fillRef>
+          <a:effectRef idx="2">
+            <a:schemeClr val="accent1"/>
+          </a:effectRef>
+          <a:fontRef idx="minor">
+            <a:schemeClr val="lt1"/>
+          </a:fontRef>
+        </p:style>
+        <p:txBody>
+          <a:bodyPr rtlCol="0" anchor="ctr"/>
+          <a:lstStyle/>
+          <a:p/>
+        </p:txBody>
+      </p:sp>
+      <p:sp>
+        <p:nvSpPr>
+          <p:cNvPr id="6" name="TextBox 5"/>
+          <p:cNvSpPr txBox="1"/>
+          <p:nvPr/>
+        </p:nvSpPr>
+        <p:spPr>
+          <a:xfrm>
+            <a:off x="2194560" y="2514600"/>
+            <a:ext cx="548640" cy="777240"/>
+          </a:xfrm>
+          <a:prstGeom prst="rect">
+            <a:avLst/>
+          </a:prstGeom>
+          <a:noFill/>
+        </p:spPr>
+        <p:txBody>
+          <a:bodyPr wrap="square" lIns="45720" rIns="45720" tIns="27432" bIns="27432" anchor="ctr">
+            <a:spAutoFit/>
+          </a:bodyPr>
+          <a:lstStyle/>
+          <a:p>
+            <a:r>
+              <a:rPr sz="2200" b="1">
+                <a:solidFill>
+                  <a:srgbClr val="00D4AA"/>
+                </a:solidFill>
+                <a:latin typeface="Inter"/>
+              </a:rPr>
+              <a:t>✓</a:t>
+            </a:r>
+          </a:p>
+        </p:txBody>
+      </p:sp>
+      <p:sp>
+        <p:nvSpPr>
+          <p:cNvPr id="7" name="TextBox 6"/>
+          <p:cNvSpPr txBox="1"/>
+          <p:nvPr/>
+        </p:nvSpPr>
+        <p:spPr>
+          <a:xfrm>
+            <a:off x="2788920" y="2514600"/>
+            <a:ext cx="7223760" cy="777240"/>
+          </a:xfrm>
+          <a:prstGeom prst="rect">
+            <a:avLst/>
+          </a:prstGeom>
+          <a:noFill/>
+        </p:spPr>
+        <p:txBody>
+          <a:bodyPr wrap="square" lIns="45720" rIns="45720" tIns="27432" bIns="27432" anchor="ctr">
+            <a:spAutoFit/>
+          </a:bodyPr>
+          <a:lstStyle/>
+          <a:p>
+            <a:r>
+              <a:rPr sz="1800" b="1">
+                <a:solidFill>
+                  <a:srgbClr val="FFFFFF"/>
+                </a:solidFill>
+                <a:latin typeface="Inter"/>
+              </a:rPr>
+              <a:t>The whole stack, running on your machine</a:t>
+            </a:r>
+          </a:p>
+        </p:txBody>
+      </p:sp>
+      <p:sp>
+        <p:nvSpPr>
+          <p:cNvPr id="8" name="Rounded Rectangle 7"/>
+          <p:cNvSpPr/>
+          <p:nvPr/>
+        </p:nvSpPr>
+        <p:spPr>
+          <a:xfrm>
+            <a:off x="2011680" y="3474720"/>
+            <a:ext cx="8138160" cy="777240"/>
+          </a:xfrm>
+          <a:prstGeom prst="roundRect">
+            <a:avLst>
+              <a:gd name="adj" fmla="val 6588"/>
+            </a:avLst>
+          </a:prstGeom>
+          <a:solidFill>
+            <a:srgbClr val="1A2742"/>
+          </a:solidFill>
+          <a:ln>
+            <a:noFill/>
+          </a:ln>
+          <a:effectLst/>
+        </p:spPr>
+        <p:style>
+          <a:lnRef idx="1">
+            <a:schemeClr val="accent1"/>
+          </a:lnRef>
+          <a:fillRef idx="3">
+            <a:schemeClr val="accent1"/>
+          </a:fillRef>
+          <a:effectRef idx="2">
+            <a:schemeClr val="accent1"/>
+          </a:effectRef>
+          <a:fontRef idx="minor">
+            <a:schemeClr val="lt1"/>
+          </a:fontRef>
+        </p:style>
+        <p:txBody>
+          <a:bodyPr rtlCol="0" anchor="ctr"/>
+          <a:lstStyle/>
+          <a:p/>
+        </p:txBody>
+      </p:sp>
+      <p:sp>
+        <p:nvSpPr>
+          <p:cNvPr id="9" name="TextBox 8"/>
+          <p:cNvSpPr txBox="1"/>
+          <p:nvPr/>
+        </p:nvSpPr>
+        <p:spPr>
+          <a:xfrm>
+            <a:off x="2194560" y="3474720"/>
+            <a:ext cx="548640" cy="777240"/>
+          </a:xfrm>
+          <a:prstGeom prst="rect">
+            <a:avLst/>
+          </a:prstGeom>
+          <a:noFill/>
+        </p:spPr>
+        <p:txBody>
+          <a:bodyPr wrap="square" lIns="45720" rIns="45720" tIns="27432" bIns="27432" anchor="ctr">
+            <a:spAutoFit/>
+          </a:bodyPr>
+          <a:lstStyle/>
+          <a:p>
+            <a:r>
+              <a:rPr sz="2200" b="1">
+                <a:solidFill>
+                  <a:srgbClr val="00D4AA"/>
+                </a:solidFill>
+                <a:latin typeface="Inter"/>
+              </a:rPr>
+              <a:t>✓</a:t>
+            </a:r>
+          </a:p>
+        </p:txBody>
+      </p:sp>
+      <p:sp>
+        <p:nvSpPr>
+          <p:cNvPr id="10" name="TextBox 9"/>
+          <p:cNvSpPr txBox="1"/>
+          <p:nvPr/>
+        </p:nvSpPr>
+        <p:spPr>
+          <a:xfrm>
+            <a:off x="2788920" y="3474720"/>
+            <a:ext cx="7223760" cy="777240"/>
+          </a:xfrm>
+          <a:prstGeom prst="rect">
+            <a:avLst/>
+          </a:prstGeom>
+          <a:noFill/>
+        </p:spPr>
+        <p:txBody>
+          <a:bodyPr wrap="square" lIns="45720" rIns="45720" tIns="27432" bIns="27432" anchor="ctr">
+            <a:spAutoFit/>
+          </a:bodyPr>
+          <a:lstStyle/>
+          <a:p>
+            <a:r>
+              <a:rPr sz="1800" b="1">
+                <a:solidFill>
+                  <a:srgbClr val="FFFFFF"/>
+                </a:solidFill>
+                <a:latin typeface="Inter"/>
+              </a:rPr>
+              <a:t>Masking and sampling proven from data</a:t>
+            </a:r>
+          </a:p>
+        </p:txBody>
+      </p:sp>
+      <p:sp>
+        <p:nvSpPr>
+          <p:cNvPr id="11" name="Rounded Rectangle 10"/>
+          <p:cNvSpPr/>
+          <p:nvPr/>
+        </p:nvSpPr>
+        <p:spPr>
+          <a:xfrm>
+            <a:off x="2011680" y="4434840"/>
+            <a:ext cx="8138160" cy="777240"/>
+          </a:xfrm>
+          <a:prstGeom prst="roundRect">
+            <a:avLst>
+              <a:gd name="adj" fmla="val 6588"/>
+            </a:avLst>
+          </a:prstGeom>
+          <a:solidFill>
+            <a:srgbClr val="1A2742"/>
+          </a:solidFill>
+          <a:ln>
+            <a:noFill/>
+          </a:ln>
+          <a:effectLst/>
+        </p:spPr>
+        <p:style>
+          <a:lnRef idx="1">
+            <a:schemeClr val="accent1"/>
+          </a:lnRef>
+          <a:fillRef idx="3">
+            <a:schemeClr val="accent1"/>
+          </a:fillRef>
+          <a:effectRef idx="2">
+            <a:schemeClr val="accent1"/>
+          </a:effectRef>
+          <a:fontRef idx="minor">
+            <a:schemeClr val="lt1"/>
+          </a:fontRef>
+        </p:style>
+        <p:txBody>
+          <a:bodyPr rtlCol="0" anchor="ctr"/>
+          <a:lstStyle/>
+          <a:p/>
+        </p:txBody>
+      </p:sp>
+      <p:sp>
+        <p:nvSpPr>
+          <p:cNvPr id="12" name="TextBox 11"/>
+          <p:cNvSpPr txBox="1"/>
+          <p:nvPr/>
+        </p:nvSpPr>
+        <p:spPr>
+          <a:xfrm>
+            <a:off x="2194560" y="4434840"/>
+            <a:ext cx="548640" cy="777240"/>
+          </a:xfrm>
+          <a:prstGeom prst="rect">
+            <a:avLst/>
+          </a:prstGeom>
+          <a:noFill/>
+        </p:spPr>
+        <p:txBody>
+          <a:bodyPr wrap="square" lIns="45720" rIns="45720" tIns="27432" bIns="27432" anchor="ctr">
+            <a:spAutoFit/>
+          </a:bodyPr>
+          <a:lstStyle/>
+          <a:p>
+            <a:r>
+              <a:rPr sz="2200" b="1">
+                <a:solidFill>
+                  <a:srgbClr val="00D4AA"/>
+                </a:solidFill>
+                <a:latin typeface="Inter"/>
+              </a:rPr>
+              <a:t>✓</a:t>
+            </a:r>
+          </a:p>
+        </p:txBody>
+      </p:sp>
+      <p:sp>
+        <p:nvSpPr>
+          <p:cNvPr id="13" name="TextBox 12"/>
+          <p:cNvSpPr txBox="1"/>
+          <p:nvPr/>
+        </p:nvSpPr>
+        <p:spPr>
+          <a:xfrm>
+            <a:off x="2788920" y="4434840"/>
+            <a:ext cx="7223760" cy="777240"/>
+          </a:xfrm>
+          <a:prstGeom prst="rect">
+            <a:avLst/>
+          </a:prstGeom>
+          <a:noFill/>
+        </p:spPr>
+        <p:txBody>
+          <a:bodyPr wrap="square" lIns="45720" rIns="45720" tIns="27432" bIns="27432" anchor="ctr">
+            <a:spAutoFit/>
+          </a:bodyPr>
+          <a:lstStyle/>
+          <a:p>
+            <a:r>
+              <a:rPr sz="1800" b="1">
+                <a:solidFill>
+                  <a:srgbClr val="FFFFFF"/>
+                </a:solidFill>
+                <a:latin typeface="Inter"/>
+              </a:rPr>
+              <a:t>Gate green in CI; chaos repeated</a:t>
+            </a:r>
+          </a:p>
+        </p:txBody>
+      </p:sp>
+    </p:spTree>
+  </p:cSld>
+  <p:clrMapOvr>
+    <a:masterClrMapping/>
+  </p:clrMapOvr>
+</p:sld>
+</file>
+
+<file path=ppt/slides/slide35.xml><?xml version="1.0" encoding="utf-8"?>
+<p:sld xmlns:a="http://schemas.openxmlformats.org/drawingml/2006/main" xmlns:p="http://schemas.openxmlformats.org/presentationml/2006/main" xmlns:r="http://schemas.openxmlformats.org/officeDocument/2006/relationships">
+  <p:cSld>
+    <p:bg>
+      <p:bgPr>
+        <a:solidFill>
+          <a:srgbClr val="0A1628"/>
+        </a:solidFill>
+        <a:effectLst/>
+      </p:bgPr>
+    </p:bg>
+    <p:spTree>
+      <p:nvGrpSpPr>
+        <p:cNvPr id="1" name=""/>
+        <p:cNvGrpSpPr/>
+        <p:nvPr/>
+      </p:nvGrpSpPr>
+      <p:grpSpPr/>
+      <p:sp>
+        <p:nvSpPr>
+          <p:cNvPr id="2" name="TextBox 1"/>
+          <p:cNvSpPr txBox="1"/>
+          <p:nvPr/>
+        </p:nvSpPr>
+        <p:spPr>
+          <a:xfrm>
+            <a:off x="457200" y="6419088"/>
+            <a:ext cx="8686800" cy="320040"/>
+          </a:xfrm>
+          <a:prstGeom prst="rect">
+            <a:avLst/>
+          </a:prstGeom>
+          <a:noFill/>
+        </p:spPr>
+        <p:txBody>
+          <a:bodyPr wrap="square" lIns="45720" rIns="45720" tIns="27432" bIns="27432" anchor="t">
+            <a:spAutoFit/>
+          </a:bodyPr>
+          <a:lstStyle/>
+          <a:p>
+            <a:r>
+              <a:rPr sz="900" b="0">
+                <a:solidFill>
+                  <a:srgbClr val="64748B"/>
+                </a:solidFill>
+                <a:latin typeface="Inter"/>
+              </a:rPr>
+              <a:t>AI Agent Observability &amp; Cost Control · Section 13 · Lecture 13.6</a:t>
+            </a:r>
+          </a:p>
+        </p:txBody>
+      </p:sp>
+      <p:sp>
+        <p:nvSpPr>
+          <p:cNvPr id="3" name="TextBox 2"/>
+          <p:cNvSpPr txBox="1"/>
+          <p:nvPr/>
+        </p:nvSpPr>
+        <p:spPr>
+          <a:xfrm>
+            <a:off x="1371600" y="822960"/>
+            <a:ext cx="9418320" cy="457200"/>
+          </a:xfrm>
+          <a:prstGeom prst="rect">
+            <a:avLst/>
+          </a:prstGeom>
+          <a:noFill/>
+        </p:spPr>
+        <p:txBody>
+          <a:bodyPr wrap="square" lIns="45720" rIns="45720" tIns="27432" bIns="27432" anchor="t">
+            <a:spAutoFit/>
+          </a:bodyPr>
+          <a:lstStyle/>
+          <a:p>
+            <a:pPr algn="ctr"/>
+            <a:r>
+              <a:rPr sz="1200" b="1">
+                <a:solidFill>
+                  <a:srgbClr val="00D4AA"/>
+                </a:solidFill>
+                <a:latin typeface="Inter"/>
+              </a:rPr>
+              <a:t>SECTION COMPLETE</a:t>
+            </a:r>
+          </a:p>
+        </p:txBody>
+      </p:sp>
+      <p:sp>
+        <p:nvSpPr>
+          <p:cNvPr id="4" name="TextBox 3"/>
+          <p:cNvSpPr txBox="1"/>
+          <p:nvPr/>
+        </p:nvSpPr>
+        <p:spPr>
+          <a:xfrm>
+            <a:off x="1371600" y="1234440"/>
+            <a:ext cx="9418320" cy="822960"/>
+          </a:xfrm>
+          <a:prstGeom prst="rect">
+            <a:avLst/>
+          </a:prstGeom>
+          <a:noFill/>
+        </p:spPr>
+        <p:txBody>
+          <a:bodyPr wrap="square" lIns="45720" rIns="45720" tIns="27432" bIns="27432" anchor="t">
+            <a:spAutoFit/>
+          </a:bodyPr>
+          <a:lstStyle/>
+          <a:p>
+            <a:pPr algn="ctr"/>
+            <a:r>
+              <a:rPr sz="2600" b="1">
+                <a:solidFill>
+                  <a:srgbClr val="FFFFFF"/>
+                </a:solidFill>
+                <a:latin typeface="Inter"/>
+              </a:rPr>
+              <a:t>You can now</a:t>
+            </a:r>
+          </a:p>
+        </p:txBody>
+      </p:sp>
+      <p:sp>
+        <p:nvSpPr>
+          <p:cNvPr id="5" name="Rounded Rectangle 4"/>
+          <p:cNvSpPr/>
+          <p:nvPr/>
+        </p:nvSpPr>
+        <p:spPr>
+          <a:xfrm>
+            <a:off x="2011680" y="2514600"/>
+            <a:ext cx="8138160" cy="777240"/>
+          </a:xfrm>
+          <a:prstGeom prst="roundRect">
+            <a:avLst>
+              <a:gd name="adj" fmla="val 6588"/>
+            </a:avLst>
+          </a:prstGeom>
+          <a:solidFill>
+            <a:srgbClr val="1A2742"/>
+          </a:solidFill>
+          <a:ln>
+            <a:noFill/>
+          </a:ln>
+          <a:effectLst/>
+        </p:spPr>
+        <p:style>
+          <a:lnRef idx="1">
+            <a:schemeClr val="accent1"/>
+          </a:lnRef>
+          <a:fillRef idx="3">
+            <a:schemeClr val="accent1"/>
+          </a:fillRef>
+          <a:effectRef idx="2">
+            <a:schemeClr val="accent1"/>
+          </a:effectRef>
+          <a:fontRef idx="minor">
+            <a:schemeClr val="lt1"/>
+          </a:fontRef>
+        </p:style>
+        <p:txBody>
+          <a:bodyPr rtlCol="0" anchor="ctr"/>
+          <a:lstStyle/>
+          <a:p/>
+        </p:txBody>
+      </p:sp>
+      <p:sp>
+        <p:nvSpPr>
+          <p:cNvPr id="6" name="TextBox 5"/>
+          <p:cNvSpPr txBox="1"/>
+          <p:nvPr/>
+        </p:nvSpPr>
+        <p:spPr>
+          <a:xfrm>
+            <a:off x="2194560" y="2514600"/>
+            <a:ext cx="548640" cy="777240"/>
+          </a:xfrm>
+          <a:prstGeom prst="rect">
+            <a:avLst/>
+          </a:prstGeom>
+          <a:noFill/>
+        </p:spPr>
+        <p:txBody>
+          <a:bodyPr wrap="square" lIns="45720" rIns="45720" tIns="27432" bIns="27432" anchor="ctr">
+            <a:spAutoFit/>
+          </a:bodyPr>
+          <a:lstStyle/>
+          <a:p>
+            <a:r>
+              <a:rPr sz="2200" b="1">
+                <a:solidFill>
+                  <a:srgbClr val="00D4AA"/>
+                </a:solidFill>
+                <a:latin typeface="Inter"/>
+              </a:rPr>
+              <a:t>✓</a:t>
+            </a:r>
+          </a:p>
+        </p:txBody>
+      </p:sp>
+      <p:sp>
+        <p:nvSpPr>
+          <p:cNvPr id="7" name="TextBox 6"/>
+          <p:cNvSpPr txBox="1"/>
+          <p:nvPr/>
+        </p:nvSpPr>
+        <p:spPr>
+          <a:xfrm>
+            <a:off x="2788920" y="2514600"/>
+            <a:ext cx="7223760" cy="777240"/>
+          </a:xfrm>
+          <a:prstGeom prst="rect">
+            <a:avLst/>
+          </a:prstGeom>
+          <a:noFill/>
+        </p:spPr>
+        <p:txBody>
+          <a:bodyPr wrap="square" lIns="45720" rIns="45720" tIns="27432" bIns="27432" anchor="ctr">
+            <a:spAutoFit/>
+          </a:bodyPr>
+          <a:lstStyle/>
+          <a:p>
+            <a:r>
+              <a:rPr sz="1800" b="1">
+                <a:solidFill>
+                  <a:srgbClr val="FFFFFF"/>
+                </a:solidFill>
+                <a:latin typeface="Inter"/>
+              </a:rPr>
+              <a:t>Self-host Langfuse behind an OTel Collector</a:t>
+            </a:r>
+          </a:p>
+        </p:txBody>
+      </p:sp>
+      <p:sp>
+        <p:nvSpPr>
+          <p:cNvPr id="8" name="Rounded Rectangle 7"/>
+          <p:cNvSpPr/>
+          <p:nvPr/>
+        </p:nvSpPr>
+        <p:spPr>
+          <a:xfrm>
+            <a:off x="2011680" y="3474720"/>
+            <a:ext cx="8138160" cy="777240"/>
+          </a:xfrm>
+          <a:prstGeom prst="roundRect">
+            <a:avLst>
+              <a:gd name="adj" fmla="val 6588"/>
+            </a:avLst>
+          </a:prstGeom>
+          <a:solidFill>
+            <a:srgbClr val="1A2742"/>
+          </a:solidFill>
+          <a:ln>
+            <a:noFill/>
+          </a:ln>
+          <a:effectLst/>
+        </p:spPr>
+        <p:style>
+          <a:lnRef idx="1">
+            <a:schemeClr val="accent1"/>
+          </a:lnRef>
+          <a:fillRef idx="3">
+            <a:schemeClr val="accent1"/>
+          </a:fillRef>
+          <a:effectRef idx="2">
+            <a:schemeClr val="accent1"/>
+          </a:effectRef>
+          <a:fontRef idx="minor">
+            <a:schemeClr val="lt1"/>
+          </a:fontRef>
+        </p:style>
+        <p:txBody>
+          <a:bodyPr rtlCol="0" anchor="ctr"/>
+          <a:lstStyle/>
+          <a:p/>
+        </p:txBody>
+      </p:sp>
+      <p:sp>
+        <p:nvSpPr>
+          <p:cNvPr id="9" name="TextBox 8"/>
+          <p:cNvSpPr txBox="1"/>
+          <p:nvPr/>
+        </p:nvSpPr>
+        <p:spPr>
+          <a:xfrm>
+            <a:off x="2194560" y="3474720"/>
+            <a:ext cx="548640" cy="777240"/>
+          </a:xfrm>
+          <a:prstGeom prst="rect">
+            <a:avLst/>
+          </a:prstGeom>
+          <a:noFill/>
+        </p:spPr>
+        <p:txBody>
+          <a:bodyPr wrap="square" lIns="45720" rIns="45720" tIns="27432" bIns="27432" anchor="ctr">
+            <a:spAutoFit/>
+          </a:bodyPr>
+          <a:lstStyle/>
+          <a:p>
+            <a:r>
+              <a:rPr sz="2200" b="1">
+                <a:solidFill>
+                  <a:srgbClr val="00D4AA"/>
+                </a:solidFill>
+                <a:latin typeface="Inter"/>
+              </a:rPr>
+              <a:t>✓</a:t>
+            </a:r>
+          </a:p>
+        </p:txBody>
+      </p:sp>
+      <p:sp>
+        <p:nvSpPr>
+          <p:cNvPr id="10" name="TextBox 9"/>
+          <p:cNvSpPr txBox="1"/>
+          <p:nvPr/>
+        </p:nvSpPr>
+        <p:spPr>
+          <a:xfrm>
+            <a:off x="2788920" y="3474720"/>
+            <a:ext cx="7223760" cy="777240"/>
+          </a:xfrm>
+          <a:prstGeom prst="rect">
+            <a:avLst/>
+          </a:prstGeom>
+          <a:noFill/>
+        </p:spPr>
+        <p:txBody>
+          <a:bodyPr wrap="square" lIns="45720" rIns="45720" tIns="27432" bIns="27432" anchor="ctr">
+            <a:spAutoFit/>
+          </a:bodyPr>
+          <a:lstStyle/>
+          <a:p>
+            <a:r>
+              <a:rPr sz="1800" b="1">
+                <a:solidFill>
+                  <a:srgbClr val="FFFFFF"/>
+                </a:solidFill>
+                <a:latin typeface="Inter"/>
+              </a:rPr>
+              <a:t>Gate pull requests on cost, latency and tokens</a:t>
+            </a:r>
+          </a:p>
+        </p:txBody>
+      </p:sp>
+      <p:sp>
+        <p:nvSpPr>
+          <p:cNvPr id="11" name="Rounded Rectangle 10"/>
+          <p:cNvSpPr/>
+          <p:nvPr/>
+        </p:nvSpPr>
+        <p:spPr>
+          <a:xfrm>
+            <a:off x="2011680" y="4434840"/>
+            <a:ext cx="8138160" cy="777240"/>
+          </a:xfrm>
+          <a:prstGeom prst="roundRect">
+            <a:avLst>
+              <a:gd name="adj" fmla="val 6588"/>
+            </a:avLst>
+          </a:prstGeom>
+          <a:solidFill>
+            <a:srgbClr val="1A2742"/>
+          </a:solidFill>
+          <a:ln>
+            <a:noFill/>
+          </a:ln>
+          <a:effectLst/>
+        </p:spPr>
+        <p:style>
+          <a:lnRef idx="1">
+            <a:schemeClr val="accent1"/>
+          </a:lnRef>
+          <a:fillRef idx="3">
+            <a:schemeClr val="accent1"/>
+          </a:fillRef>
+          <a:effectRef idx="2">
+            <a:schemeClr val="accent1"/>
+          </a:effectRef>
+          <a:fontRef idx="minor">
+            <a:schemeClr val="lt1"/>
+          </a:fontRef>
+        </p:style>
+        <p:txBody>
+          <a:bodyPr rtlCol="0" anchor="ctr"/>
+          <a:lstStyle/>
+          <a:p/>
+        </p:txBody>
+      </p:sp>
+      <p:sp>
+        <p:nvSpPr>
+          <p:cNvPr id="12" name="TextBox 11"/>
+          <p:cNvSpPr txBox="1"/>
+          <p:nvPr/>
+        </p:nvSpPr>
+        <p:spPr>
+          <a:xfrm>
+            <a:off x="2194560" y="4434840"/>
+            <a:ext cx="548640" cy="777240"/>
+          </a:xfrm>
+          <a:prstGeom prst="rect">
+            <a:avLst/>
+          </a:prstGeom>
+          <a:noFill/>
+        </p:spPr>
+        <p:txBody>
+          <a:bodyPr wrap="square" lIns="45720" rIns="45720" tIns="27432" bIns="27432" anchor="ctr">
+            <a:spAutoFit/>
+          </a:bodyPr>
+          <a:lstStyle/>
+          <a:p>
+            <a:r>
+              <a:rPr sz="2200" b="1">
+                <a:solidFill>
+                  <a:srgbClr val="00D4AA"/>
+                </a:solidFill>
+                <a:latin typeface="Inter"/>
+              </a:rPr>
+              <a:t>✓</a:t>
+            </a:r>
+          </a:p>
+        </p:txBody>
+      </p:sp>
+      <p:sp>
+        <p:nvSpPr>
+          <p:cNvPr id="13" name="TextBox 12"/>
+          <p:cNvSpPr txBox="1"/>
+          <p:nvPr/>
+        </p:nvSpPr>
+        <p:spPr>
+          <a:xfrm>
+            <a:off x="2788920" y="4434840"/>
+            <a:ext cx="7223760" cy="777240"/>
+          </a:xfrm>
+          <a:prstGeom prst="rect">
+            <a:avLst/>
+          </a:prstGeom>
+          <a:noFill/>
+        </p:spPr>
+        <p:txBody>
+          <a:bodyPr wrap="square" lIns="45720" rIns="45720" tIns="27432" bIns="27432" anchor="ctr">
+            <a:spAutoFit/>
+          </a:bodyPr>
+          <a:lstStyle/>
+          <a:p>
+            <a:r>
+              <a:rPr sz="1800" b="1">
+                <a:solidFill>
+                  <a:srgbClr val="FFFFFF"/>
+                </a:solidFill>
+                <a:latin typeface="Inter"/>
+              </a:rPr>
+              <a:t>Prove telemetry failures never reach users</a:t>
+            </a:r>
+          </a:p>
+        </p:txBody>
+      </p:sp>
+    </p:spTree>
+  </p:cSld>
+  <p:clrMapOvr>
+    <a:masterClrMapping/>
+  </p:clrMapOvr>
+</p:sld>
+</file>
+
+<file path=ppt/slides/slide36.xml><?xml version="1.0" encoding="utf-8"?>
+<p:sld xmlns:a="http://schemas.openxmlformats.org/drawingml/2006/main" xmlns:p="http://schemas.openxmlformats.org/presentationml/2006/main" xmlns:r="http://schemas.openxmlformats.org/officeDocument/2006/relationships">
+  <p:cSld>
+    <p:bg>
+      <p:bgPr>
+        <a:solidFill>
+          <a:srgbClr val="0A1628"/>
+        </a:solidFill>
+        <a:effectLst/>
+      </p:bgPr>
+    </p:bg>
+    <p:spTree>
+      <p:nvGrpSpPr>
+        <p:cNvPr id="1" name=""/>
+        <p:cNvGrpSpPr/>
+        <p:nvPr/>
+      </p:nvGrpSpPr>
+      <p:grpSpPr/>
+      <p:sp>
+        <p:nvSpPr>
+          <p:cNvPr id="2" name="TextBox 1"/>
+          <p:cNvSpPr txBox="1"/>
+          <p:nvPr/>
+        </p:nvSpPr>
+        <p:spPr>
+          <a:xfrm>
+            <a:off x="457200" y="6419088"/>
+            <a:ext cx="8686800" cy="320040"/>
+          </a:xfrm>
+          <a:prstGeom prst="rect">
+            <a:avLst/>
+          </a:prstGeom>
+          <a:noFill/>
+        </p:spPr>
+        <p:txBody>
+          <a:bodyPr wrap="square" lIns="45720" rIns="45720" tIns="27432" bIns="27432" anchor="t">
+            <a:spAutoFit/>
+          </a:bodyPr>
+          <a:lstStyle/>
+          <a:p>
+            <a:r>
+              <a:rPr sz="900" b="0">
+                <a:solidFill>
+                  <a:srgbClr val="64748B"/>
+                </a:solidFill>
+                <a:latin typeface="Inter"/>
+              </a:rPr>
+              <a:t>AI Agent Observability &amp; Cost Control · Section 13 · Lecture 13.6</a:t>
+            </a:r>
+          </a:p>
+        </p:txBody>
+      </p:sp>
+      <p:sp>
+        <p:nvSpPr>
+          <p:cNvPr id="3" name="TextBox 2"/>
+          <p:cNvSpPr txBox="1"/>
+          <p:nvPr/>
+        </p:nvSpPr>
+        <p:spPr>
+          <a:xfrm>
+            <a:off x="2377440" y="2286000"/>
+            <a:ext cx="1097280" cy="1097280"/>
+          </a:xfrm>
+          <a:prstGeom prst="rect">
+            <a:avLst/>
+          </a:prstGeom>
+          <a:noFill/>
+        </p:spPr>
+        <p:txBody>
+          <a:bodyPr wrap="square" lIns="45720" rIns="45720" tIns="27432" bIns="27432" anchor="ctr">
+            <a:spAutoFit/>
+          </a:bodyPr>
+          <a:lstStyle/>
+          <a:p>
+            <a:r>
+              <a:rPr sz="5400" b="1">
+                <a:solidFill>
+                  <a:srgbClr val="00D4AA"/>
+                </a:solidFill>
+                <a:latin typeface="Inter"/>
+              </a:rPr>
+              <a:t>→</a:t>
+            </a:r>
+          </a:p>
+        </p:txBody>
+      </p:sp>
+      <p:sp>
+        <p:nvSpPr>
+          <p:cNvPr id="4" name="TextBox 3"/>
+          <p:cNvSpPr txBox="1"/>
+          <p:nvPr/>
+        </p:nvSpPr>
+        <p:spPr>
+          <a:xfrm>
+            <a:off x="3566160" y="2148840"/>
+            <a:ext cx="7315200" cy="457200"/>
+          </a:xfrm>
+          <a:prstGeom prst="rect">
+            <a:avLst/>
+          </a:prstGeom>
+          <a:noFill/>
+        </p:spPr>
+        <p:txBody>
+          <a:bodyPr wrap="square" lIns="45720" rIns="45720" tIns="27432" bIns="27432" anchor="t">
+            <a:spAutoFit/>
+          </a:bodyPr>
+          <a:lstStyle/>
+          <a:p>
+            <a:r>
+              <a:rPr sz="1400" b="0">
+                <a:solidFill>
+                  <a:srgbClr val="94A3B8"/>
+                </a:solidFill>
+                <a:latin typeface="Inter"/>
+              </a:rPr>
+              <a:t>Next up:</a:t>
+            </a:r>
+          </a:p>
+        </p:txBody>
+      </p:sp>
+      <p:sp>
+        <p:nvSpPr>
+          <p:cNvPr id="5" name="TextBox 4"/>
+          <p:cNvSpPr txBox="1"/>
+          <p:nvPr/>
+        </p:nvSpPr>
+        <p:spPr>
+          <a:xfrm>
+            <a:off x="3566160" y="2560320"/>
+            <a:ext cx="7315200" cy="1097280"/>
+          </a:xfrm>
+          <a:prstGeom prst="rect">
+            <a:avLst/>
+          </a:prstGeom>
+          <a:noFill/>
+        </p:spPr>
+        <p:txBody>
+          <a:bodyPr wrap="square" lIns="45720" rIns="45720" tIns="27432" bIns="27432" anchor="t">
+            <a:spAutoFit/>
+          </a:bodyPr>
+          <a:lstStyle/>
+          <a:p>
+            <a:r>
+              <a:rPr sz="2600" b="1">
+                <a:solidFill>
+                  <a:srgbClr val="FFFFFF"/>
+                </a:solidFill>
+                <a:latin typeface="Inter"/>
+              </a:rPr>
+              <a:t>Capstone brief and acceptance criteria</a:t>
+            </a:r>
+          </a:p>
+        </p:txBody>
+      </p:sp>
+      <p:sp>
+        <p:nvSpPr>
+          <p:cNvPr id="6" name="TextBox 5"/>
+          <p:cNvSpPr txBox="1"/>
+          <p:nvPr/>
+        </p:nvSpPr>
+        <p:spPr>
+          <a:xfrm>
+            <a:off x="3566160" y="3703320"/>
+            <a:ext cx="7315200" cy="1097280"/>
+          </a:xfrm>
+          <a:prstGeom prst="rect">
+            <a:avLst/>
+          </a:prstGeom>
+          <a:noFill/>
+        </p:spPr>
+        <p:txBody>
+          <a:bodyPr wrap="square" lIns="45720" rIns="45720" tIns="27432" bIns="27432" anchor="t">
+            <a:spAutoFit/>
+          </a:bodyPr>
+          <a:lstStyle/>
+          <a:p>
+            <a:r>
+              <a:rPr sz="1400" b="0">
+                <a:solidFill>
+                  <a:srgbClr val="94A3B8"/>
+                </a:solidFill>
+                <a:latin typeface="Inter"/>
+              </a:rPr>
+              <a:t>That completes Section 13.</a:t>
             </a:r>
           </a:p>
         </p:txBody>
@@ -12447,8 +15530,122 @@
         </p:nvSpPr>
         <p:spPr>
           <a:xfrm>
-            <a:off x="2377440" y="2286000"/>
-            <a:ext cx="1097280" cy="1097280"/>
+            <a:off x="1371600" y="822960"/>
+            <a:ext cx="9418320" cy="457200"/>
+          </a:xfrm>
+          <a:prstGeom prst="rect">
+            <a:avLst/>
+          </a:prstGeom>
+          <a:noFill/>
+        </p:spPr>
+        <p:txBody>
+          <a:bodyPr wrap="square" lIns="45720" rIns="45720" tIns="27432" bIns="27432" anchor="t">
+            <a:spAutoFit/>
+          </a:bodyPr>
+          <a:lstStyle/>
+          <a:p>
+            <a:pPr algn="ctr"/>
+            <a:r>
+              <a:rPr sz="1200" b="1">
+                <a:solidFill>
+                  <a:srgbClr val="00D4AA"/>
+                </a:solidFill>
+                <a:latin typeface="Inter"/>
+              </a:rPr>
+              <a:t>RECAP</a:t>
+            </a:r>
+          </a:p>
+        </p:txBody>
+      </p:sp>
+      <p:sp>
+        <p:nvSpPr>
+          <p:cNvPr id="4" name="TextBox 3"/>
+          <p:cNvSpPr txBox="1"/>
+          <p:nvPr/>
+        </p:nvSpPr>
+        <p:spPr>
+          <a:xfrm>
+            <a:off x="1371600" y="1234440"/>
+            <a:ext cx="9418320" cy="822960"/>
+          </a:xfrm>
+          <a:prstGeom prst="rect">
+            <a:avLst/>
+          </a:prstGeom>
+          <a:noFill/>
+        </p:spPr>
+        <p:txBody>
+          <a:bodyPr wrap="square" lIns="45720" rIns="45720" tIns="27432" bIns="27432" anchor="t">
+            <a:spAutoFit/>
+          </a:bodyPr>
+          <a:lstStyle/>
+          <a:p>
+            <a:pPr algn="ctr"/>
+            <a:r>
+              <a:rPr sz="2600" b="1">
+                <a:solidFill>
+                  <a:srgbClr val="FFFFFF"/>
+                </a:solidFill>
+                <a:latin typeface="Inter"/>
+              </a:rPr>
+              <a:t>Key takeaways</a:t>
+            </a:r>
+          </a:p>
+        </p:txBody>
+      </p:sp>
+      <p:sp>
+        <p:nvSpPr>
+          <p:cNvPr id="5" name="Rounded Rectangle 4"/>
+          <p:cNvSpPr/>
+          <p:nvPr/>
+        </p:nvSpPr>
+        <p:spPr>
+          <a:xfrm>
+            <a:off x="2011680" y="2514600"/>
+            <a:ext cx="8138160" cy="777240"/>
+          </a:xfrm>
+          <a:prstGeom prst="roundRect">
+            <a:avLst>
+              <a:gd name="adj" fmla="val 6588"/>
+            </a:avLst>
+          </a:prstGeom>
+          <a:solidFill>
+            <a:srgbClr val="1A2742"/>
+          </a:solidFill>
+          <a:ln>
+            <a:noFill/>
+          </a:ln>
+          <a:effectLst/>
+        </p:spPr>
+        <p:style>
+          <a:lnRef idx="1">
+            <a:schemeClr val="accent1"/>
+          </a:lnRef>
+          <a:fillRef idx="3">
+            <a:schemeClr val="accent1"/>
+          </a:fillRef>
+          <a:effectRef idx="2">
+            <a:schemeClr val="accent1"/>
+          </a:effectRef>
+          <a:fontRef idx="minor">
+            <a:schemeClr val="lt1"/>
+          </a:fontRef>
+        </p:style>
+        <p:txBody>
+          <a:bodyPr rtlCol="0" anchor="ctr"/>
+          <a:lstStyle/>
+          <a:p/>
+        </p:txBody>
+      </p:sp>
+      <p:sp>
+        <p:nvSpPr>
+          <p:cNvPr id="6" name="TextBox 5"/>
+          <p:cNvSpPr txBox="1"/>
+          <p:nvPr/>
+        </p:nvSpPr>
+        <p:spPr>
+          <a:xfrm>
+            <a:off x="2194560" y="2514600"/>
+            <a:ext cx="548640" cy="777240"/>
           </a:xfrm>
           <a:prstGeom prst="rect">
             <a:avLst/>
@@ -12462,115 +15659,280 @@
           <a:lstStyle/>
           <a:p>
             <a:r>
-              <a:rPr sz="5400" b="1">
+              <a:rPr sz="2200" b="1">
                 <a:solidFill>
                   <a:srgbClr val="00D4AA"/>
                 </a:solidFill>
                 <a:latin typeface="Inter"/>
               </a:rPr>
-              <a:t>→</a:t>
-            </a:r>
-          </a:p>
-        </p:txBody>
-      </p:sp>
-      <p:sp>
-        <p:nvSpPr>
-          <p:cNvPr id="4" name="TextBox 3"/>
-          <p:cNvSpPr txBox="1"/>
-          <p:nvPr/>
-        </p:nvSpPr>
-        <p:spPr>
-          <a:xfrm>
-            <a:off x="3566160" y="2148840"/>
-            <a:ext cx="7315200" cy="457200"/>
-          </a:xfrm>
-          <a:prstGeom prst="rect">
-            <a:avLst/>
-          </a:prstGeom>
-          <a:noFill/>
-        </p:spPr>
-        <p:txBody>
-          <a:bodyPr wrap="square" lIns="45720" rIns="45720" tIns="27432" bIns="27432" anchor="t">
-            <a:spAutoFit/>
-          </a:bodyPr>
-          <a:lstStyle/>
-          <a:p>
-            <a:r>
-              <a:rPr sz="1400" b="0">
-                <a:solidFill>
-                  <a:srgbClr val="94A3B8"/>
-                </a:solidFill>
-                <a:latin typeface="Inter"/>
-              </a:rPr>
-              <a:t>Next up:</a:t>
-            </a:r>
-          </a:p>
-        </p:txBody>
-      </p:sp>
-      <p:sp>
-        <p:nvSpPr>
-          <p:cNvPr id="5" name="TextBox 4"/>
-          <p:cNvSpPr txBox="1"/>
-          <p:nvPr/>
-        </p:nvSpPr>
-        <p:spPr>
-          <a:xfrm>
-            <a:off x="3566160" y="2560320"/>
-            <a:ext cx="7315200" cy="1097280"/>
-          </a:xfrm>
-          <a:prstGeom prst="rect">
-            <a:avLst/>
-          </a:prstGeom>
-          <a:noFill/>
-        </p:spPr>
-        <p:txBody>
-          <a:bodyPr wrap="square" lIns="45720" rIns="45720" tIns="27432" bIns="27432" anchor="t">
-            <a:spAutoFit/>
-          </a:bodyPr>
-          <a:lstStyle/>
-          <a:p>
-            <a:r>
-              <a:rPr sz="2600" b="1">
+              <a:t>✓</a:t>
+            </a:r>
+          </a:p>
+        </p:txBody>
+      </p:sp>
+      <p:sp>
+        <p:nvSpPr>
+          <p:cNvPr id="7" name="TextBox 6"/>
+          <p:cNvSpPr txBox="1"/>
+          <p:nvPr/>
+        </p:nvSpPr>
+        <p:spPr>
+          <a:xfrm>
+            <a:off x="2788920" y="2514600"/>
+            <a:ext cx="7223760" cy="777240"/>
+          </a:xfrm>
+          <a:prstGeom prst="rect">
+            <a:avLst/>
+          </a:prstGeom>
+          <a:noFill/>
+        </p:spPr>
+        <p:txBody>
+          <a:bodyPr wrap="square" lIns="45720" rIns="45720" tIns="27432" bIns="27432" anchor="ctr">
+            <a:spAutoFit/>
+          </a:bodyPr>
+          <a:lstStyle/>
+          <a:p>
+            <a:r>
+              <a:rPr sz="1800" b="1">
                 <a:solidFill>
                   <a:srgbClr val="FFFFFF"/>
                 </a:solidFill>
                 <a:latin typeface="Inter"/>
               </a:rPr>
-              <a:t>OTel Collector as the traffic cop</a:t>
-            </a:r>
-          </a:p>
-        </p:txBody>
-      </p:sp>
-      <p:sp>
-        <p:nvSpPr>
-          <p:cNvPr id="6" name="TextBox 5"/>
-          <p:cNvSpPr txBox="1"/>
-          <p:nvPr/>
-        </p:nvSpPr>
-        <p:spPr>
-          <a:xfrm>
-            <a:off x="3566160" y="3703320"/>
-            <a:ext cx="7315200" cy="1097280"/>
-          </a:xfrm>
-          <a:prstGeom prst="rect">
-            <a:avLst/>
-          </a:prstGeom>
-          <a:noFill/>
-        </p:spPr>
-        <p:txBody>
-          <a:bodyPr wrap="square" lIns="45720" rIns="45720" tIns="27432" bIns="27432" anchor="t">
-            <a:spAutoFit/>
-          </a:bodyPr>
-          <a:lstStyle/>
-          <a:p>
-            <a:r>
-              <a:rPr sz="1400" b="0">
-                <a:solidFill>
-                  <a:srgbClr val="94A3B8"/>
-                </a:solidFill>
-                <a:latin typeface="Inter"/>
-              </a:rPr>
-              <a:t>Next, the OpenTelemetry Collector: receivers, processors and exporters that mask, sample and fan out to two backends at…</a:t>
+              <a:t>Six containers, one Compose file</a:t>
+            </a:r>
+          </a:p>
+        </p:txBody>
+      </p:sp>
+      <p:sp>
+        <p:nvSpPr>
+          <p:cNvPr id="8" name="Rounded Rectangle 7"/>
+          <p:cNvSpPr/>
+          <p:nvPr/>
+        </p:nvSpPr>
+        <p:spPr>
+          <a:xfrm>
+            <a:off x="2011680" y="3474720"/>
+            <a:ext cx="8138160" cy="777240"/>
+          </a:xfrm>
+          <a:prstGeom prst="roundRect">
+            <a:avLst>
+              <a:gd name="adj" fmla="val 6588"/>
+            </a:avLst>
+          </a:prstGeom>
+          <a:solidFill>
+            <a:srgbClr val="1A2742"/>
+          </a:solidFill>
+          <a:ln>
+            <a:noFill/>
+          </a:ln>
+          <a:effectLst/>
+        </p:spPr>
+        <p:style>
+          <a:lnRef idx="1">
+            <a:schemeClr val="accent1"/>
+          </a:lnRef>
+          <a:fillRef idx="3">
+            <a:schemeClr val="accent1"/>
+          </a:fillRef>
+          <a:effectRef idx="2">
+            <a:schemeClr val="accent1"/>
+          </a:effectRef>
+          <a:fontRef idx="minor">
+            <a:schemeClr val="lt1"/>
+          </a:fontRef>
+        </p:style>
+        <p:txBody>
+          <a:bodyPr rtlCol="0" anchor="ctr"/>
+          <a:lstStyle/>
+          <a:p/>
+        </p:txBody>
+      </p:sp>
+      <p:sp>
+        <p:nvSpPr>
+          <p:cNvPr id="9" name="TextBox 8"/>
+          <p:cNvSpPr txBox="1"/>
+          <p:nvPr/>
+        </p:nvSpPr>
+        <p:spPr>
+          <a:xfrm>
+            <a:off x="2194560" y="3474720"/>
+            <a:ext cx="548640" cy="777240"/>
+          </a:xfrm>
+          <a:prstGeom prst="rect">
+            <a:avLst/>
+          </a:prstGeom>
+          <a:noFill/>
+        </p:spPr>
+        <p:txBody>
+          <a:bodyPr wrap="square" lIns="45720" rIns="45720" tIns="27432" bIns="27432" anchor="ctr">
+            <a:spAutoFit/>
+          </a:bodyPr>
+          <a:lstStyle/>
+          <a:p>
+            <a:r>
+              <a:rPr sz="2200" b="1">
+                <a:solidFill>
+                  <a:srgbClr val="00D4AA"/>
+                </a:solidFill>
+                <a:latin typeface="Inter"/>
+              </a:rPr>
+              <a:t>✓</a:t>
+            </a:r>
+          </a:p>
+        </p:txBody>
+      </p:sp>
+      <p:sp>
+        <p:nvSpPr>
+          <p:cNvPr id="10" name="TextBox 9"/>
+          <p:cNvSpPr txBox="1"/>
+          <p:nvPr/>
+        </p:nvSpPr>
+        <p:spPr>
+          <a:xfrm>
+            <a:off x="2788920" y="3474720"/>
+            <a:ext cx="7223760" cy="777240"/>
+          </a:xfrm>
+          <a:prstGeom prst="rect">
+            <a:avLst/>
+          </a:prstGeom>
+          <a:noFill/>
+        </p:spPr>
+        <p:txBody>
+          <a:bodyPr wrap="square" lIns="45720" rIns="45720" tIns="27432" bIns="27432" anchor="ctr">
+            <a:spAutoFit/>
+          </a:bodyPr>
+          <a:lstStyle/>
+          <a:p>
+            <a:r>
+              <a:rPr sz="1800" b="1">
+                <a:solidFill>
+                  <a:srgbClr val="FFFFFF"/>
+                </a:solidFill>
+                <a:latin typeface="Inter"/>
+              </a:rPr>
+              <a:t>Atlas changes only </a:t>
+            </a:r>
+            <a:r>
+              <a:rPr sz="1656" b="0">
+                <a:solidFill>
+                  <a:srgbClr val="00D4AA"/>
+                </a:solidFill>
+                <a:latin typeface="JetBrains Mono"/>
+              </a:rPr>
+              <a:t>LANGFUSE_BASE_URL</a:t>
+            </a:r>
+          </a:p>
+        </p:txBody>
+      </p:sp>
+      <p:sp>
+        <p:nvSpPr>
+          <p:cNvPr id="11" name="Rounded Rectangle 10"/>
+          <p:cNvSpPr/>
+          <p:nvPr/>
+        </p:nvSpPr>
+        <p:spPr>
+          <a:xfrm>
+            <a:off x="2011680" y="4434840"/>
+            <a:ext cx="8138160" cy="777240"/>
+          </a:xfrm>
+          <a:prstGeom prst="roundRect">
+            <a:avLst>
+              <a:gd name="adj" fmla="val 6588"/>
+            </a:avLst>
+          </a:prstGeom>
+          <a:solidFill>
+            <a:srgbClr val="1A2742"/>
+          </a:solidFill>
+          <a:ln>
+            <a:noFill/>
+          </a:ln>
+          <a:effectLst/>
+        </p:spPr>
+        <p:style>
+          <a:lnRef idx="1">
+            <a:schemeClr val="accent1"/>
+          </a:lnRef>
+          <a:fillRef idx="3">
+            <a:schemeClr val="accent1"/>
+          </a:fillRef>
+          <a:effectRef idx="2">
+            <a:schemeClr val="accent1"/>
+          </a:effectRef>
+          <a:fontRef idx="minor">
+            <a:schemeClr val="lt1"/>
+          </a:fontRef>
+        </p:style>
+        <p:txBody>
+          <a:bodyPr rtlCol="0" anchor="ctr"/>
+          <a:lstStyle/>
+          <a:p/>
+        </p:txBody>
+      </p:sp>
+      <p:sp>
+        <p:nvSpPr>
+          <p:cNvPr id="12" name="TextBox 11"/>
+          <p:cNvSpPr txBox="1"/>
+          <p:nvPr/>
+        </p:nvSpPr>
+        <p:spPr>
+          <a:xfrm>
+            <a:off x="2194560" y="4434840"/>
+            <a:ext cx="548640" cy="777240"/>
+          </a:xfrm>
+          <a:prstGeom prst="rect">
+            <a:avLst/>
+          </a:prstGeom>
+          <a:noFill/>
+        </p:spPr>
+        <p:txBody>
+          <a:bodyPr wrap="square" lIns="45720" rIns="45720" tIns="27432" bIns="27432" anchor="ctr">
+            <a:spAutoFit/>
+          </a:bodyPr>
+          <a:lstStyle/>
+          <a:p>
+            <a:r>
+              <a:rPr sz="2200" b="1">
+                <a:solidFill>
+                  <a:srgbClr val="00D4AA"/>
+                </a:solidFill>
+                <a:latin typeface="Inter"/>
+              </a:rPr>
+              <a:t>✓</a:t>
+            </a:r>
+          </a:p>
+        </p:txBody>
+      </p:sp>
+      <p:sp>
+        <p:nvSpPr>
+          <p:cNvPr id="13" name="TextBox 12"/>
+          <p:cNvSpPr txBox="1"/>
+          <p:nvPr/>
+        </p:nvSpPr>
+        <p:spPr>
+          <a:xfrm>
+            <a:off x="2788920" y="4434840"/>
+            <a:ext cx="7223760" cy="777240"/>
+          </a:xfrm>
+          <a:prstGeom prst="rect">
+            <a:avLst/>
+          </a:prstGeom>
+          <a:noFill/>
+        </p:spPr>
+        <p:txBody>
+          <a:bodyPr wrap="square" lIns="45720" rIns="45720" tIns="27432" bIns="27432" anchor="ctr">
+            <a:spAutoFit/>
+          </a:bodyPr>
+          <a:lstStyle/>
+          <a:p>
+            <a:r>
+              <a:rPr sz="1800" b="1">
+                <a:solidFill>
+                  <a:srgbClr val="FFFFFF"/>
+                </a:solidFill>
+                <a:latin typeface="Inter"/>
+              </a:rPr>
+              <a:t>Secrets, backups, upgrades, TLS before production</a:t>
             </a:r>
           </a:p>
         </p:txBody>
@@ -12630,7 +15992,7 @@
                 </a:solidFill>
                 <a:latin typeface="Inter"/>
               </a:rPr>
-              <a:t>AI Agent Observability &amp; Cost Control · Section 13 · Lecture 13.2</a:t>
+              <a:t>AI Agent Observability &amp; Cost Control · Section 13 · Lecture 13.1</a:t>
             </a:r>
           </a:p>
         </p:txBody>
@@ -12643,8 +16005,42 @@
         </p:nvSpPr>
         <p:spPr>
           <a:xfrm>
-            <a:off x="6675120" y="320040"/>
-            <a:ext cx="5074920" cy="548640"/>
+            <a:off x="2377440" y="2286000"/>
+            <a:ext cx="1097280" cy="1097280"/>
+          </a:xfrm>
+          <a:prstGeom prst="rect">
+            <a:avLst/>
+          </a:prstGeom>
+          <a:noFill/>
+        </p:spPr>
+        <p:txBody>
+          <a:bodyPr wrap="square" lIns="45720" rIns="45720" tIns="27432" bIns="27432" anchor="ctr">
+            <a:spAutoFit/>
+          </a:bodyPr>
+          <a:lstStyle/>
+          <a:p>
+            <a:r>
+              <a:rPr sz="5400" b="1">
+                <a:solidFill>
+                  <a:srgbClr val="00D4AA"/>
+                </a:solidFill>
+                <a:latin typeface="Inter"/>
+              </a:rPr>
+              <a:t>→</a:t>
+            </a:r>
+          </a:p>
+        </p:txBody>
+      </p:sp>
+      <p:sp>
+        <p:nvSpPr>
+          <p:cNvPr id="4" name="TextBox 3"/>
+          <p:cNvSpPr txBox="1"/>
+          <p:nvPr/>
+        </p:nvSpPr>
+        <p:spPr>
+          <a:xfrm>
+            <a:off x="3566160" y="2148840"/>
+            <a:ext cx="7315200" cy="457200"/>
           </a:xfrm>
           <a:prstGeom prst="rect">
             <a:avLst/>
@@ -12657,29 +16053,28 @@
           </a:bodyPr>
           <a:lstStyle/>
           <a:p>
-            <a:pPr algn="r"/>
-            <a:r>
-              <a:rPr sz="1000" b="0">
+            <a:r>
+              <a:rPr sz="1400" b="0">
                 <a:solidFill>
                   <a:srgbClr val="94A3B8"/>
                 </a:solidFill>
                 <a:latin typeface="Inter"/>
               </a:rPr>
-              <a:t>SECTION 13 · DEPLOYING THE STACK AND CI BUDGET GATES</a:t>
-            </a:r>
-          </a:p>
-        </p:txBody>
-      </p:sp>
-      <p:sp>
-        <p:nvSpPr>
-          <p:cNvPr id="4" name="TextBox 3"/>
-          <p:cNvSpPr txBox="1"/>
-          <p:nvPr/>
-        </p:nvSpPr>
-        <p:spPr>
-          <a:xfrm>
-            <a:off x="914400" y="1417320"/>
-            <a:ext cx="10332720" cy="457200"/>
+              <a:t>Next up:</a:t>
+            </a:r>
+          </a:p>
+        </p:txBody>
+      </p:sp>
+      <p:sp>
+        <p:nvSpPr>
+          <p:cNvPr id="5" name="TextBox 4"/>
+          <p:cNvSpPr txBox="1"/>
+          <p:nvPr/>
+        </p:nvSpPr>
+        <p:spPr>
+          <a:xfrm>
+            <a:off x="3566160" y="2560320"/>
+            <a:ext cx="7315200" cy="1097280"/>
           </a:xfrm>
           <a:prstGeom prst="rect">
             <a:avLst/>
@@ -12693,27 +16088,27 @@
           <a:lstStyle/>
           <a:p>
             <a:r>
-              <a:rPr sz="1200" b="1">
-                <a:solidFill>
-                  <a:srgbClr val="00D4AA"/>
-                </a:solidFill>
-                <a:latin typeface="Inter"/>
-              </a:rPr>
-              <a:t>LECTURE 13.2</a:t>
-            </a:r>
-          </a:p>
-        </p:txBody>
-      </p:sp>
-      <p:sp>
-        <p:nvSpPr>
-          <p:cNvPr id="5" name="TextBox 4"/>
-          <p:cNvSpPr txBox="1"/>
-          <p:nvPr/>
-        </p:nvSpPr>
-        <p:spPr>
-          <a:xfrm>
-            <a:off x="914400" y="1874519"/>
-            <a:ext cx="10332720" cy="1645920"/>
+              <a:rPr sz="2600" b="1">
+                <a:solidFill>
+                  <a:srgbClr val="FFFFFF"/>
+                </a:solidFill>
+                <a:latin typeface="Inter"/>
+              </a:rPr>
+              <a:t>OTel Collector as the traffic cop</a:t>
+            </a:r>
+          </a:p>
+        </p:txBody>
+      </p:sp>
+      <p:sp>
+        <p:nvSpPr>
+          <p:cNvPr id="6" name="TextBox 5"/>
+          <p:cNvSpPr txBox="1"/>
+          <p:nvPr/>
+        </p:nvSpPr>
+        <p:spPr>
+          <a:xfrm>
+            <a:off x="3566160" y="3703320"/>
+            <a:ext cx="7315200" cy="1097280"/>
           </a:xfrm>
           <a:prstGeom prst="rect">
             <a:avLst/>
@@ -12726,100 +16121,14 @@
           </a:bodyPr>
           <a:lstStyle/>
           <a:p>
-            <a:pPr>
-              <a:lnSpc>
-                <a:spcPct val="110000"/>
-              </a:lnSpc>
-            </a:pPr>
-            <a:r>
-              <a:rPr sz="3000" b="1">
-                <a:solidFill>
-                  <a:srgbClr val="FFFFFF"/>
-                </a:solidFill>
-                <a:latin typeface="Inter"/>
-              </a:rPr>
-              <a:t>OTel Collector as the traffic cop</a:t>
-            </a:r>
-          </a:p>
-        </p:txBody>
-      </p:sp>
-      <p:sp>
-        <p:nvSpPr>
-          <p:cNvPr id="6" name="Rectangle 5"/>
-          <p:cNvSpPr/>
-          <p:nvPr/>
-        </p:nvSpPr>
-        <p:spPr>
-          <a:xfrm>
-            <a:off x="914400" y="3794760"/>
-            <a:ext cx="64008" cy="1143000"/>
-          </a:xfrm>
-          <a:prstGeom prst="rect">
-            <a:avLst/>
-          </a:prstGeom>
-          <a:solidFill>
-            <a:srgbClr val="00D4AA"/>
-          </a:solidFill>
-          <a:ln>
-            <a:noFill/>
-          </a:ln>
-          <a:effectLst/>
-        </p:spPr>
-        <p:style>
-          <a:lnRef idx="1">
-            <a:schemeClr val="accent1"/>
-          </a:lnRef>
-          <a:fillRef idx="3">
-            <a:schemeClr val="accent1"/>
-          </a:fillRef>
-          <a:effectRef idx="2">
-            <a:schemeClr val="accent1"/>
-          </a:effectRef>
-          <a:fontRef idx="minor">
-            <a:schemeClr val="lt1"/>
-          </a:fontRef>
-        </p:style>
-        <p:txBody>
-          <a:bodyPr rtlCol="0" anchor="ctr"/>
-          <a:lstStyle/>
-          <a:p/>
-        </p:txBody>
-      </p:sp>
-      <p:sp>
-        <p:nvSpPr>
-          <p:cNvPr id="7" name="TextBox 6"/>
-          <p:cNvSpPr txBox="1"/>
-          <p:nvPr/>
-        </p:nvSpPr>
-        <p:spPr>
-          <a:xfrm>
-            <a:off x="1188720" y="3749039"/>
-            <a:ext cx="9692640" cy="1280160"/>
-          </a:xfrm>
-          <a:prstGeom prst="rect">
-            <a:avLst/>
-          </a:prstGeom>
-          <a:noFill/>
-        </p:spPr>
-        <p:txBody>
-          <a:bodyPr wrap="square" lIns="45720" rIns="45720" tIns="27432" bIns="27432" anchor="ctr">
-            <a:spAutoFit/>
-          </a:bodyPr>
-          <a:lstStyle/>
-          <a:p>
-            <a:pPr>
-              <a:lnSpc>
-                <a:spcPct val="130000"/>
-              </a:lnSpc>
-            </a:pPr>
-            <a:r>
-              <a:rPr sz="1600" b="0">
-                <a:solidFill>
-                  <a:srgbClr val="CBD5E1"/>
-                </a:solidFill>
-                <a:latin typeface="Inter"/>
-              </a:rPr>
-              <a:t>Read a Collector config as a pipeline: receivers, processors, exporters.</a:t>
+            <a:r>
+              <a:rPr sz="1400" b="0">
+                <a:solidFill>
+                  <a:srgbClr val="94A3B8"/>
+                </a:solidFill>
+                <a:latin typeface="Inter"/>
+              </a:rPr>
+              <a:t>Next, the OpenTelemetry Collector: receivers, processors and exporters that mask, sample and fan out to two backends at…</a:t>
             </a:r>
           </a:p>
         </p:txBody>
@@ -12892,8 +16201,77 @@
         </p:nvSpPr>
         <p:spPr>
           <a:xfrm>
-            <a:off x="457200" y="411480"/>
-            <a:ext cx="11247120" cy="868680"/>
+            <a:off x="6675120" y="320040"/>
+            <a:ext cx="5074920" cy="548640"/>
+          </a:xfrm>
+          <a:prstGeom prst="rect">
+            <a:avLst/>
+          </a:prstGeom>
+          <a:noFill/>
+        </p:spPr>
+        <p:txBody>
+          <a:bodyPr wrap="square" lIns="45720" rIns="45720" tIns="27432" bIns="27432" anchor="t">
+            <a:spAutoFit/>
+          </a:bodyPr>
+          <a:lstStyle/>
+          <a:p>
+            <a:pPr algn="r"/>
+            <a:r>
+              <a:rPr sz="1000" b="0">
+                <a:solidFill>
+                  <a:srgbClr val="94A3B8"/>
+                </a:solidFill>
+                <a:latin typeface="Inter"/>
+              </a:rPr>
+              <a:t>SECTION 13 · DEPLOYING THE STACK AND CI BUDGET GATES</a:t>
+            </a:r>
+          </a:p>
+        </p:txBody>
+      </p:sp>
+      <p:sp>
+        <p:nvSpPr>
+          <p:cNvPr id="4" name="TextBox 3"/>
+          <p:cNvSpPr txBox="1"/>
+          <p:nvPr/>
+        </p:nvSpPr>
+        <p:spPr>
+          <a:xfrm>
+            <a:off x="914400" y="1417320"/>
+            <a:ext cx="10332720" cy="457200"/>
+          </a:xfrm>
+          <a:prstGeom prst="rect">
+            <a:avLst/>
+          </a:prstGeom>
+          <a:noFill/>
+        </p:spPr>
+        <p:txBody>
+          <a:bodyPr wrap="square" lIns="45720" rIns="45720" tIns="27432" bIns="27432" anchor="t">
+            <a:spAutoFit/>
+          </a:bodyPr>
+          <a:lstStyle/>
+          <a:p>
+            <a:r>
+              <a:rPr sz="1200" b="1">
+                <a:solidFill>
+                  <a:srgbClr val="00D4AA"/>
+                </a:solidFill>
+                <a:latin typeface="Inter"/>
+              </a:rPr>
+              <a:t>LECTURE 13.2</a:t>
+            </a:r>
+          </a:p>
+        </p:txBody>
+      </p:sp>
+      <p:sp>
+        <p:nvSpPr>
+          <p:cNvPr id="5" name="TextBox 4"/>
+          <p:cNvSpPr txBox="1"/>
+          <p:nvPr/>
+        </p:nvSpPr>
+        <p:spPr>
+          <a:xfrm>
+            <a:off x="914400" y="1874519"/>
+            <a:ext cx="10332720" cy="1645920"/>
           </a:xfrm>
           <a:prstGeom prst="rect">
             <a:avLst/>
@@ -12912,27 +16290,27 @@
               </a:lnSpc>
             </a:pPr>
             <a:r>
-              <a:rPr sz="2600" b="1">
+              <a:rPr sz="3000" b="1">
                 <a:solidFill>
                   <a:srgbClr val="FFFFFF"/>
                 </a:solidFill>
                 <a:latin typeface="Inter"/>
               </a:rPr>
-              <a:t>Collector rules</a:t>
-            </a:r>
-          </a:p>
-        </p:txBody>
-      </p:sp>
-      <p:sp>
-        <p:nvSpPr>
-          <p:cNvPr id="4" name="Rectangle 3"/>
+              <a:t>OTel Collector as the traffic cop</a:t>
+            </a:r>
+          </a:p>
+        </p:txBody>
+      </p:sp>
+      <p:sp>
+        <p:nvSpPr>
+          <p:cNvPr id="6" name="Rectangle 5"/>
           <p:cNvSpPr/>
           <p:nvPr/>
         </p:nvSpPr>
         <p:spPr>
           <a:xfrm>
-            <a:off x="502920" y="1024128"/>
-            <a:ext cx="822960" cy="54864"/>
+            <a:off x="914400" y="3794760"/>
+            <a:ext cx="64008" cy="1143000"/>
           </a:xfrm>
           <a:prstGeom prst="rect">
             <a:avLst/>
@@ -12967,188 +16345,39 @@
       </p:sp>
       <p:sp>
         <p:nvSpPr>
-          <p:cNvPr id="5" name="TextBox 4"/>
-          <p:cNvSpPr txBox="1"/>
-          <p:nvPr/>
-        </p:nvSpPr>
-        <p:spPr>
-          <a:xfrm>
-            <a:off x="640080" y="1417320"/>
-            <a:ext cx="10881360" cy="4892040"/>
-          </a:xfrm>
-          <a:prstGeom prst="rect">
-            <a:avLst/>
-          </a:prstGeom>
-          <a:noFill/>
-        </p:spPr>
-        <p:txBody>
-          <a:bodyPr wrap="square" lIns="45720" rIns="45720" tIns="27432" bIns="27432" anchor="t">
-            <a:spAutoFit/>
-          </a:bodyPr>
-          <a:lstStyle/>
-          <a:p>
-            <a:pPr marL="292608" indent="-292608">
+          <p:cNvPr id="7" name="TextBox 6"/>
+          <p:cNvSpPr txBox="1"/>
+          <p:nvPr/>
+        </p:nvSpPr>
+        <p:spPr>
+          <a:xfrm>
+            <a:off x="1188720" y="3749039"/>
+            <a:ext cx="9692640" cy="1280160"/>
+          </a:xfrm>
+          <a:prstGeom prst="rect">
+            <a:avLst/>
+          </a:prstGeom>
+          <a:noFill/>
+        </p:spPr>
+        <p:txBody>
+          <a:bodyPr wrap="square" lIns="45720" rIns="45720" tIns="27432" bIns="27432" anchor="ctr">
+            <a:spAutoFit/>
+          </a:bodyPr>
+          <a:lstStyle/>
+          <a:p>
+            <a:pPr>
               <a:lnSpc>
-                <a:spcPct val="120000"/>
+                <a:spcPct val="130000"/>
               </a:lnSpc>
-              <a:spcAft>
-                <a:spcPts val="1260"/>
-              </a:spcAft>
-              <a:buClr>
-                <a:srgbClr val="00D4AA"/>
-              </a:buClr>
-              <a:buFont typeface="Inter"/>
-              <a:buChar char="•"/>
             </a:pPr>
             <a:r>
-              <a:rPr sz="1656" b="0">
-                <a:solidFill>
-                  <a:srgbClr val="00D4AA"/>
-                </a:solidFill>
-                <a:latin typeface="JetBrains Mono"/>
-              </a:rPr>
-              <a:t>memory_limiter</a:t>
-            </a:r>
-            <a:r>
-              <a:rPr sz="1800" b="0">
-                <a:solidFill>
-                  <a:srgbClr val="FFFFFF"/>
-                </a:solidFill>
-                <a:latin typeface="Inter"/>
-              </a:rPr>
-              <a:t> first, </a:t>
-            </a:r>
-            <a:r>
-              <a:rPr sz="1656" b="0">
-                <a:solidFill>
-                  <a:srgbClr val="00D4AA"/>
-                </a:solidFill>
-                <a:latin typeface="JetBrains Mono"/>
-              </a:rPr>
-              <a:t>batch</a:t>
-            </a:r>
-            <a:r>
-              <a:rPr sz="1800" b="0">
-                <a:solidFill>
-                  <a:srgbClr val="FFFFFF"/>
-                </a:solidFill>
-                <a:latin typeface="Inter"/>
-              </a:rPr>
-              <a:t> last, in every pipeline</a:t>
-            </a:r>
-          </a:p>
-          <a:p>
-            <a:pPr marL="292608" indent="-292608">
-              <a:lnSpc>
-                <a:spcPct val="120000"/>
-              </a:lnSpc>
-              <a:spcAft>
-                <a:spcPts val="1260"/>
-              </a:spcAft>
-              <a:buClr>
-                <a:srgbClr val="00D4AA"/>
-              </a:buClr>
-              <a:buFont typeface="Inter"/>
-              <a:buChar char="•"/>
-            </a:pPr>
-            <a:r>
-              <a:rPr sz="1800" b="0">
-                <a:solidFill>
-                  <a:srgbClr val="FFFFFF"/>
-                </a:solidFill>
-                <a:latin typeface="Inter"/>
-              </a:rPr>
-              <a:t>Mask in the Collector as the second layer; the SDK </a:t>
-            </a:r>
-            <a:r>
-              <a:rPr sz="1656" b="0">
-                <a:solidFill>
-                  <a:srgbClr val="00D4AA"/>
-                </a:solidFill>
-                <a:latin typeface="JetBrains Mono"/>
-              </a:rPr>
-              <a:t>mask=</a:t>
-            </a:r>
-            <a:r>
-              <a:rPr sz="1800" b="0">
-                <a:solidFill>
-                  <a:srgbClr val="FFFFFF"/>
-                </a:solidFill>
-                <a:latin typeface="Inter"/>
-              </a:rPr>
-              <a:t> stays as the first</a:t>
-            </a:r>
-          </a:p>
-          <a:p>
-            <a:pPr marL="292608" indent="-292608">
-              <a:lnSpc>
-                <a:spcPct val="120000"/>
-              </a:lnSpc>
-              <a:spcAft>
-                <a:spcPts val="1260"/>
-              </a:spcAft>
-              <a:buClr>
-                <a:srgbClr val="00D4AA"/>
-              </a:buClr>
-              <a:buFont typeface="Inter"/>
-              <a:buChar char="•"/>
-            </a:pPr>
-            <a:r>
-              <a:rPr sz="1800" b="0">
-                <a:solidFill>
-                  <a:srgbClr val="FFFFFF"/>
-                </a:solidFill>
-                <a:latin typeface="Inter"/>
-              </a:rPr>
-              <a:t>Tail sample on error, latency and cost; probabilistic for the rest</a:t>
-            </a:r>
-          </a:p>
-          <a:p>
-            <a:pPr marL="292608" indent="-292608">
-              <a:lnSpc>
-                <a:spcPct val="120000"/>
-              </a:lnSpc>
-              <a:spcAft>
-                <a:spcPts val="1260"/>
-              </a:spcAft>
-              <a:buClr>
-                <a:srgbClr val="00D4AA"/>
-              </a:buClr>
-              <a:buFont typeface="Inter"/>
-              <a:buChar char="•"/>
-            </a:pPr>
-            <a:r>
-              <a:rPr sz="1800" b="0">
-                <a:solidFill>
-                  <a:srgbClr val="FFFFFF"/>
-                </a:solidFill>
-                <a:latin typeface="Inter"/>
-              </a:rPr>
-              <a:t>Credentials live in the Collector, not in Atlas</a:t>
-            </a:r>
-          </a:p>
-          <a:p>
-            <a:pPr marL="292608" indent="-292608">
-              <a:lnSpc>
-                <a:spcPct val="120000"/>
-              </a:lnSpc>
-              <a:spcAft>
-                <a:spcPts val="1260"/>
-              </a:spcAft>
-              <a:buClr>
-                <a:srgbClr val="00D4AA"/>
-              </a:buClr>
-              <a:buFont typeface="Inter"/>
-              <a:buChar char="•"/>
-            </a:pPr>
-            <a:r>
-              <a:rPr sz="1800" b="0">
-                <a:solidFill>
-                  <a:srgbClr val="FFFFFF"/>
-                </a:solidFill>
-                <a:latin typeface="Inter"/>
-              </a:rPr>
-              <a:t>One exporter per backend; add or remove without touching Atlas</a:t>
+              <a:rPr sz="1600" b="0">
+                <a:solidFill>
+                  <a:srgbClr val="CBD5E1"/>
+                </a:solidFill>
+                <a:latin typeface="Inter"/>
+              </a:rPr>
+              <a:t>Read a Collector config as a pipeline: receivers, processors, exporters.</a:t>
             </a:r>
           </a:p>
         </p:txBody>
@@ -13221,130 +16450,263 @@
         </p:nvSpPr>
         <p:spPr>
           <a:xfrm>
-            <a:off x="2377440" y="2286000"/>
-            <a:ext cx="1097280" cy="1097280"/>
-          </a:xfrm>
-          <a:prstGeom prst="rect">
-            <a:avLst/>
-          </a:prstGeom>
-          <a:noFill/>
-        </p:spPr>
-        <p:txBody>
-          <a:bodyPr wrap="square" lIns="45720" rIns="45720" tIns="27432" bIns="27432" anchor="ctr">
-            <a:spAutoFit/>
-          </a:bodyPr>
-          <a:lstStyle/>
-          <a:p>
-            <a:r>
-              <a:rPr sz="5400" b="1">
+            <a:off x="457200" y="411480"/>
+            <a:ext cx="11247120" cy="868680"/>
+          </a:xfrm>
+          <a:prstGeom prst="rect">
+            <a:avLst/>
+          </a:prstGeom>
+          <a:noFill/>
+        </p:spPr>
+        <p:txBody>
+          <a:bodyPr wrap="square" lIns="45720" rIns="45720" tIns="27432" bIns="27432" anchor="t">
+            <a:spAutoFit/>
+          </a:bodyPr>
+          <a:lstStyle/>
+          <a:p>
+            <a:pPr>
+              <a:lnSpc>
+                <a:spcPct val="110000"/>
+              </a:lnSpc>
+            </a:pPr>
+            <a:r>
+              <a:rPr sz="2600" b="1">
+                <a:solidFill>
+                  <a:srgbClr val="FFFFFF"/>
+                </a:solidFill>
+                <a:latin typeface="Inter"/>
+              </a:rPr>
+              <a:t>Collector rules</a:t>
+            </a:r>
+          </a:p>
+        </p:txBody>
+      </p:sp>
+      <p:sp>
+        <p:nvSpPr>
+          <p:cNvPr id="4" name="Rectangle 3"/>
+          <p:cNvSpPr/>
+          <p:nvPr/>
+        </p:nvSpPr>
+        <p:spPr>
+          <a:xfrm>
+            <a:off x="502920" y="1024128"/>
+            <a:ext cx="822960" cy="54864"/>
+          </a:xfrm>
+          <a:prstGeom prst="rect">
+            <a:avLst/>
+          </a:prstGeom>
+          <a:solidFill>
+            <a:srgbClr val="00D4AA"/>
+          </a:solidFill>
+          <a:ln>
+            <a:noFill/>
+          </a:ln>
+          <a:effectLst/>
+        </p:spPr>
+        <p:style>
+          <a:lnRef idx="1">
+            <a:schemeClr val="accent1"/>
+          </a:lnRef>
+          <a:fillRef idx="3">
+            <a:schemeClr val="accent1"/>
+          </a:fillRef>
+          <a:effectRef idx="2">
+            <a:schemeClr val="accent1"/>
+          </a:effectRef>
+          <a:fontRef idx="minor">
+            <a:schemeClr val="lt1"/>
+          </a:fontRef>
+        </p:style>
+        <p:txBody>
+          <a:bodyPr rtlCol="0" anchor="ctr"/>
+          <a:lstStyle/>
+          <a:p/>
+        </p:txBody>
+      </p:sp>
+      <p:sp>
+        <p:nvSpPr>
+          <p:cNvPr id="5" name="TextBox 4"/>
+          <p:cNvSpPr txBox="1"/>
+          <p:nvPr/>
+        </p:nvSpPr>
+        <p:spPr>
+          <a:xfrm>
+            <a:off x="640080" y="1417320"/>
+            <a:ext cx="10881360" cy="4892040"/>
+          </a:xfrm>
+          <a:prstGeom prst="rect">
+            <a:avLst/>
+          </a:prstGeom>
+          <a:noFill/>
+        </p:spPr>
+        <p:txBody>
+          <a:bodyPr wrap="square" lIns="45720" rIns="45720" tIns="27432" bIns="27432" anchor="t">
+            <a:spAutoFit/>
+          </a:bodyPr>
+          <a:lstStyle/>
+          <a:p>
+            <a:pPr marL="292608" indent="-292608">
+              <a:lnSpc>
+                <a:spcPct val="120000"/>
+              </a:lnSpc>
+              <a:spcAft>
+                <a:spcPts val="1260"/>
+              </a:spcAft>
+              <a:buClr>
+                <a:srgbClr val="00D4AA"/>
+              </a:buClr>
+              <a:buFont typeface="Inter"/>
+              <a:buChar char="•"/>
+            </a:pPr>
+            <a:r>
+              <a:rPr sz="1656" b="0">
                 <a:solidFill>
                   <a:srgbClr val="00D4AA"/>
                 </a:solidFill>
-                <a:latin typeface="Inter"/>
-              </a:rPr>
-              <a:t>→</a:t>
-            </a:r>
-          </a:p>
-        </p:txBody>
-      </p:sp>
-      <p:sp>
-        <p:nvSpPr>
-          <p:cNvPr id="4" name="TextBox 3"/>
-          <p:cNvSpPr txBox="1"/>
-          <p:nvPr/>
-        </p:nvSpPr>
-        <p:spPr>
-          <a:xfrm>
-            <a:off x="3566160" y="2148840"/>
-            <a:ext cx="7315200" cy="457200"/>
-          </a:xfrm>
-          <a:prstGeom prst="rect">
-            <a:avLst/>
-          </a:prstGeom>
-          <a:noFill/>
-        </p:spPr>
-        <p:txBody>
-          <a:bodyPr wrap="square" lIns="45720" rIns="45720" tIns="27432" bIns="27432" anchor="t">
-            <a:spAutoFit/>
-          </a:bodyPr>
-          <a:lstStyle/>
-          <a:p>
-            <a:r>
-              <a:rPr sz="1400" b="0">
-                <a:solidFill>
-                  <a:srgbClr val="94A3B8"/>
-                </a:solidFill>
-                <a:latin typeface="Inter"/>
-              </a:rPr>
-              <a:t>Next up:</a:t>
-            </a:r>
-          </a:p>
-        </p:txBody>
-      </p:sp>
-      <p:sp>
-        <p:nvSpPr>
-          <p:cNvPr id="5" name="TextBox 4"/>
-          <p:cNvSpPr txBox="1"/>
-          <p:nvPr/>
-        </p:nvSpPr>
-        <p:spPr>
-          <a:xfrm>
-            <a:off x="3566160" y="2560320"/>
-            <a:ext cx="7315200" cy="1097280"/>
-          </a:xfrm>
-          <a:prstGeom prst="rect">
-            <a:avLst/>
-          </a:prstGeom>
-          <a:noFill/>
-        </p:spPr>
-        <p:txBody>
-          <a:bodyPr wrap="square" lIns="45720" rIns="45720" tIns="27432" bIns="27432" anchor="t">
-            <a:spAutoFit/>
-          </a:bodyPr>
-          <a:lstStyle/>
-          <a:p>
-            <a:r>
-              <a:rPr sz="2600" b="1">
+                <a:latin typeface="JetBrains Mono"/>
+              </a:rPr>
+              <a:t>memory_limiter</a:t>
+            </a:r>
+            <a:r>
+              <a:rPr sz="1800" b="0">
                 <a:solidFill>
                   <a:srgbClr val="FFFFFF"/>
                 </a:solidFill>
                 <a:latin typeface="Inter"/>
               </a:rPr>
-              <a:t>Code-along: the CI budget gate</a:t>
-            </a:r>
-          </a:p>
-        </p:txBody>
-      </p:sp>
-      <p:sp>
-        <p:nvSpPr>
-          <p:cNvPr id="6" name="TextBox 5"/>
-          <p:cNvSpPr txBox="1"/>
-          <p:nvPr/>
-        </p:nvSpPr>
-        <p:spPr>
-          <a:xfrm>
-            <a:off x="3566160" y="3703320"/>
-            <a:ext cx="7315200" cy="1097280"/>
-          </a:xfrm>
-          <a:prstGeom prst="rect">
-            <a:avLst/>
-          </a:prstGeom>
-          <a:noFill/>
-        </p:spPr>
-        <p:txBody>
-          <a:bodyPr wrap="square" lIns="45720" rIns="45720" tIns="27432" bIns="27432" anchor="t">
-            <a:spAutoFit/>
-          </a:bodyPr>
-          <a:lstStyle/>
-          <a:p>
-            <a:r>
-              <a:rPr sz="1400" b="0">
-                <a:solidFill>
-                  <a:srgbClr val="94A3B8"/>
-                </a:solidFill>
-                <a:latin typeface="Inter"/>
-              </a:rPr>
-              <a:t>Next, the CI budget gate: a test that replays a day of traffic and fails the pull request…</a:t>
+              <a:t> first, </a:t>
+            </a:r>
+            <a:r>
+              <a:rPr sz="1656" b="0">
+                <a:solidFill>
+                  <a:srgbClr val="00D4AA"/>
+                </a:solidFill>
+                <a:latin typeface="JetBrains Mono"/>
+              </a:rPr>
+              <a:t>batch</a:t>
+            </a:r>
+            <a:r>
+              <a:rPr sz="1800" b="0">
+                <a:solidFill>
+                  <a:srgbClr val="FFFFFF"/>
+                </a:solidFill>
+                <a:latin typeface="Inter"/>
+              </a:rPr>
+              <a:t> last, in every pipeline</a:t>
+            </a:r>
+          </a:p>
+          <a:p>
+            <a:pPr marL="292608" indent="-292608">
+              <a:lnSpc>
+                <a:spcPct val="120000"/>
+              </a:lnSpc>
+              <a:spcAft>
+                <a:spcPts val="1260"/>
+              </a:spcAft>
+              <a:buClr>
+                <a:srgbClr val="00D4AA"/>
+              </a:buClr>
+              <a:buFont typeface="Inter"/>
+              <a:buChar char="•"/>
+            </a:pPr>
+            <a:r>
+              <a:rPr sz="1800" b="0">
+                <a:solidFill>
+                  <a:srgbClr val="FFFFFF"/>
+                </a:solidFill>
+                <a:latin typeface="Inter"/>
+              </a:rPr>
+              <a:t>Mask in the Collector as the second layer; the SDK </a:t>
+            </a:r>
+            <a:r>
+              <a:rPr sz="1656" b="0">
+                <a:solidFill>
+                  <a:srgbClr val="00D4AA"/>
+                </a:solidFill>
+                <a:latin typeface="JetBrains Mono"/>
+              </a:rPr>
+              <a:t>mask=</a:t>
+            </a:r>
+            <a:r>
+              <a:rPr sz="1800" b="0">
+                <a:solidFill>
+                  <a:srgbClr val="FFFFFF"/>
+                </a:solidFill>
+                <a:latin typeface="Inter"/>
+              </a:rPr>
+              <a:t> stays as the first</a:t>
+            </a:r>
+          </a:p>
+          <a:p>
+            <a:pPr marL="292608" indent="-292608">
+              <a:lnSpc>
+                <a:spcPct val="120000"/>
+              </a:lnSpc>
+              <a:spcAft>
+                <a:spcPts val="1260"/>
+              </a:spcAft>
+              <a:buClr>
+                <a:srgbClr val="00D4AA"/>
+              </a:buClr>
+              <a:buFont typeface="Inter"/>
+              <a:buChar char="•"/>
+            </a:pPr>
+            <a:r>
+              <a:rPr sz="1800" b="0">
+                <a:solidFill>
+                  <a:srgbClr val="FFFFFF"/>
+                </a:solidFill>
+                <a:latin typeface="Inter"/>
+              </a:rPr>
+              <a:t>Tail sample on error, latency and cost; probabilistic for the rest</a:t>
+            </a:r>
+          </a:p>
+          <a:p>
+            <a:pPr marL="292608" indent="-292608">
+              <a:lnSpc>
+                <a:spcPct val="120000"/>
+              </a:lnSpc>
+              <a:spcAft>
+                <a:spcPts val="1260"/>
+              </a:spcAft>
+              <a:buClr>
+                <a:srgbClr val="00D4AA"/>
+              </a:buClr>
+              <a:buFont typeface="Inter"/>
+              <a:buChar char="•"/>
+            </a:pPr>
+            <a:r>
+              <a:rPr sz="1800" b="0">
+                <a:solidFill>
+                  <a:srgbClr val="FFFFFF"/>
+                </a:solidFill>
+                <a:latin typeface="Inter"/>
+              </a:rPr>
+              <a:t>Credentials live in the Collector, not in Atlas</a:t>
+            </a:r>
+          </a:p>
+          <a:p>
+            <a:pPr marL="292608" indent="-292608">
+              <a:lnSpc>
+                <a:spcPct val="120000"/>
+              </a:lnSpc>
+              <a:spcAft>
+                <a:spcPts val="1260"/>
+              </a:spcAft>
+              <a:buClr>
+                <a:srgbClr val="00D4AA"/>
+              </a:buClr>
+              <a:buFont typeface="Inter"/>
+              <a:buChar char="•"/>
+            </a:pPr>
+            <a:r>
+              <a:rPr sz="1800" b="0">
+                <a:solidFill>
+                  <a:srgbClr val="FFFFFF"/>
+                </a:solidFill>
+                <a:latin typeface="Inter"/>
+              </a:rPr>
+              <a:t>One exporter per backend; add or remove without touching Atlas</a:t>
             </a:r>
           </a:p>
         </p:txBody>
